--- a/Inventory_Management_System.pptx
+++ b/Inventory_Management_System.pptx
@@ -15,7 +15,7 @@
     <p:sldId id="260" r:id="rId6"/>
     <p:sldId id="261" r:id="rId7"/>
     <p:sldId id="262" r:id="rId8"/>
-    <p:sldId id="272" r:id="rId9"/>
+    <p:sldId id="273" r:id="rId9"/>
     <p:sldId id="263" r:id="rId10"/>
     <p:sldId id="264" r:id="rId11"/>
     <p:sldId id="265" r:id="rId12"/>
@@ -145,9 +145,536 @@
 <file path=ppt/revisionInfo.xml><?xml version="1.0" encoding="utf-8"?>
 <p1510:revInfo xmlns:a="http://schemas.openxmlformats.org/drawingml/2006/main" xmlns:r="http://schemas.openxmlformats.org/officeDocument/2006/relationships" xmlns:p1510="http://schemas.microsoft.com/office/powerpoint/2015/10/main">
   <p1510:revLst>
-    <p1510:client id="{6C307E88-4362-4B6F-90E7-4D3BF291939A}" v="17" dt="2026-04-23T16:52:28.502"/>
+    <p1510:client id="{5816BE70-0E7B-4F76-9B9A-339FBF9AAFBE}" v="5" dt="2026-04-24T20:40:22.041"/>
   </p1510:revLst>
 </p1510:revInfo>
+</file>
+
+<file path=ppt/changesInfos/changesInfo1.xml><?xml version="1.0" encoding="utf-8"?>
+<pc:chgInfo xmlns:a="http://schemas.openxmlformats.org/drawingml/2006/main" xmlns:r="http://schemas.openxmlformats.org/officeDocument/2006/relationships" xmlns:ac="http://schemas.microsoft.com/office/drawing/2013/main/command" xmlns:pc="http://schemas.microsoft.com/office/powerpoint/2013/main/command">
+  <pc:docChgLst>
+    <pc:chgData name="Olamide Adeboye" userId="9e787034137b2853" providerId="LiveId" clId="{7D6CD3DA-39E8-4DBC-AE6D-988E01832CC9}"/>
+    <pc:docChg chg="undo redo custSel addSld delSld modSld">
+      <pc:chgData name="Olamide Adeboye" userId="9e787034137b2853" providerId="LiveId" clId="{7D6CD3DA-39E8-4DBC-AE6D-988E01832CC9}" dt="2026-04-24T20:43:26.228" v="407" actId="20577"/>
+      <pc:docMkLst>
+        <pc:docMk/>
+      </pc:docMkLst>
+      <pc:sldChg chg="addSp delSp modSp mod">
+        <pc:chgData name="Olamide Adeboye" userId="9e787034137b2853" providerId="LiveId" clId="{7D6CD3DA-39E8-4DBC-AE6D-988E01832CC9}" dt="2026-04-24T20:24:00.643" v="158" actId="1076"/>
+        <pc:sldMkLst>
+          <pc:docMk/>
+          <pc:sldMk cId="0" sldId="262"/>
+        </pc:sldMkLst>
+        <pc:spChg chg="mod">
+          <ac:chgData name="Olamide Adeboye" userId="9e787034137b2853" providerId="LiveId" clId="{7D6CD3DA-39E8-4DBC-AE6D-988E01832CC9}" dt="2026-04-24T20:24:00.643" v="158" actId="1076"/>
+          <ac:spMkLst>
+            <pc:docMk/>
+            <pc:sldMk cId="0" sldId="262"/>
+            <ac:spMk id="2" creationId="{00000000-0000-0000-0000-000000000000}"/>
+          </ac:spMkLst>
+        </pc:spChg>
+        <pc:spChg chg="del">
+          <ac:chgData name="Olamide Adeboye" userId="9e787034137b2853" providerId="LiveId" clId="{7D6CD3DA-39E8-4DBC-AE6D-988E01832CC9}" dt="2026-04-24T20:22:14.857" v="144" actId="478"/>
+          <ac:spMkLst>
+            <pc:docMk/>
+            <pc:sldMk cId="0" sldId="262"/>
+            <ac:spMk id="9" creationId="{00000000-0000-0000-0000-000000000000}"/>
+          </ac:spMkLst>
+        </pc:spChg>
+        <pc:spChg chg="add del">
+          <ac:chgData name="Olamide Adeboye" userId="9e787034137b2853" providerId="LiveId" clId="{7D6CD3DA-39E8-4DBC-AE6D-988E01832CC9}" dt="2026-04-24T20:22:29.111" v="148" actId="478"/>
+          <ac:spMkLst>
+            <pc:docMk/>
+            <pc:sldMk cId="0" sldId="262"/>
+            <ac:spMk id="10" creationId="{00000000-0000-0000-0000-000000000000}"/>
+          </ac:spMkLst>
+        </pc:spChg>
+        <pc:spChg chg="del">
+          <ac:chgData name="Olamide Adeboye" userId="9e787034137b2853" providerId="LiveId" clId="{7D6CD3DA-39E8-4DBC-AE6D-988E01832CC9}" dt="2026-04-24T20:22:12.722" v="143" actId="478"/>
+          <ac:spMkLst>
+            <pc:docMk/>
+            <pc:sldMk cId="0" sldId="262"/>
+            <ac:spMk id="11" creationId="{00000000-0000-0000-0000-000000000000}"/>
+          </ac:spMkLst>
+        </pc:spChg>
+        <pc:spChg chg="mod">
+          <ac:chgData name="Olamide Adeboye" userId="9e787034137b2853" providerId="LiveId" clId="{7D6CD3DA-39E8-4DBC-AE6D-988E01832CC9}" dt="2026-04-24T20:22:06.091" v="142" actId="164"/>
+          <ac:spMkLst>
+            <pc:docMk/>
+            <pc:sldMk cId="0" sldId="262"/>
+            <ac:spMk id="13" creationId="{00000000-0000-0000-0000-000000000000}"/>
+          </ac:spMkLst>
+        </pc:spChg>
+        <pc:spChg chg="mod ord">
+          <ac:chgData name="Olamide Adeboye" userId="9e787034137b2853" providerId="LiveId" clId="{7D6CD3DA-39E8-4DBC-AE6D-988E01832CC9}" dt="2026-04-24T20:23:12.648" v="152" actId="164"/>
+          <ac:spMkLst>
+            <pc:docMk/>
+            <pc:sldMk cId="0" sldId="262"/>
+            <ac:spMk id="14" creationId="{00000000-0000-0000-0000-000000000000}"/>
+          </ac:spMkLst>
+        </pc:spChg>
+        <pc:spChg chg="mod">
+          <ac:chgData name="Olamide Adeboye" userId="9e787034137b2853" providerId="LiveId" clId="{7D6CD3DA-39E8-4DBC-AE6D-988E01832CC9}" dt="2026-04-24T20:22:06.091" v="142" actId="164"/>
+          <ac:spMkLst>
+            <pc:docMk/>
+            <pc:sldMk cId="0" sldId="262"/>
+            <ac:spMk id="15" creationId="{00000000-0000-0000-0000-000000000000}"/>
+          </ac:spMkLst>
+        </pc:spChg>
+        <pc:spChg chg="mod">
+          <ac:chgData name="Olamide Adeboye" userId="9e787034137b2853" providerId="LiveId" clId="{7D6CD3DA-39E8-4DBC-AE6D-988E01832CC9}" dt="2026-04-24T20:23:45.410" v="157" actId="1076"/>
+          <ac:spMkLst>
+            <pc:docMk/>
+            <pc:sldMk cId="0" sldId="262"/>
+            <ac:spMk id="17" creationId="{00000000-0000-0000-0000-000000000000}"/>
+          </ac:spMkLst>
+        </pc:spChg>
+        <pc:grpChg chg="add del mod">
+          <ac:chgData name="Olamide Adeboye" userId="9e787034137b2853" providerId="LiveId" clId="{7D6CD3DA-39E8-4DBC-AE6D-988E01832CC9}" dt="2026-04-24T20:23:12.648" v="152" actId="164"/>
+          <ac:grpSpMkLst>
+            <pc:docMk/>
+            <pc:sldMk cId="0" sldId="262"/>
+            <ac:grpSpMk id="24" creationId="{3A046D46-9C8F-B8E3-0F4E-1BAD0A167360}"/>
+          </ac:grpSpMkLst>
+        </pc:grpChg>
+        <pc:grpChg chg="add mod">
+          <ac:chgData name="Olamide Adeboye" userId="9e787034137b2853" providerId="LiveId" clId="{7D6CD3DA-39E8-4DBC-AE6D-988E01832CC9}" dt="2026-04-24T20:23:38.545" v="156" actId="1076"/>
+          <ac:grpSpMkLst>
+            <pc:docMk/>
+            <pc:sldMk cId="0" sldId="262"/>
+            <ac:grpSpMk id="25" creationId="{868B5EE4-B59D-A5E0-2ACA-501E037C50EA}"/>
+          </ac:grpSpMkLst>
+        </pc:grpChg>
+        <pc:cxnChg chg="del">
+          <ac:chgData name="Olamide Adeboye" userId="9e787034137b2853" providerId="LiveId" clId="{7D6CD3DA-39E8-4DBC-AE6D-988E01832CC9}" dt="2026-04-24T20:23:26.224" v="155" actId="478"/>
+          <ac:cxnSpMkLst>
+            <pc:docMk/>
+            <pc:sldMk cId="0" sldId="262"/>
+            <ac:cxnSpMk id="16" creationId="{00000000-0000-0000-0000-000000000000}"/>
+          </ac:cxnSpMkLst>
+        </pc:cxnChg>
+      </pc:sldChg>
+      <pc:sldChg chg="mod modShow">
+        <pc:chgData name="Olamide Adeboye" userId="9e787034137b2853" providerId="LiveId" clId="{7D6CD3DA-39E8-4DBC-AE6D-988E01832CC9}" dt="2026-04-24T20:41:53.860" v="402" actId="34476"/>
+        <pc:sldMkLst>
+          <pc:docMk/>
+          <pc:sldMk cId="0" sldId="266"/>
+        </pc:sldMkLst>
+      </pc:sldChg>
+      <pc:sldChg chg="modSp mod modNotesTx">
+        <pc:chgData name="Olamide Adeboye" userId="9e787034137b2853" providerId="LiveId" clId="{7D6CD3DA-39E8-4DBC-AE6D-988E01832CC9}" dt="2026-04-24T20:42:34.298" v="403" actId="20577"/>
+        <pc:sldMkLst>
+          <pc:docMk/>
+          <pc:sldMk cId="0" sldId="269"/>
+        </pc:sldMkLst>
+        <pc:spChg chg="mod">
+          <ac:chgData name="Olamide Adeboye" userId="9e787034137b2853" providerId="LiveId" clId="{7D6CD3DA-39E8-4DBC-AE6D-988E01832CC9}" dt="2026-04-24T20:42:34.298" v="403" actId="20577"/>
+          <ac:spMkLst>
+            <pc:docMk/>
+            <pc:sldMk cId="0" sldId="269"/>
+            <ac:spMk id="9" creationId="{00000000-0000-0000-0000-000000000000}"/>
+          </ac:spMkLst>
+        </pc:spChg>
+        <pc:spChg chg="mod">
+          <ac:chgData name="Olamide Adeboye" userId="9e787034137b2853" providerId="LiveId" clId="{7D6CD3DA-39E8-4DBC-AE6D-988E01832CC9}" dt="2026-04-24T20:28:15.429" v="162" actId="20577"/>
+          <ac:spMkLst>
+            <pc:docMk/>
+            <pc:sldMk cId="0" sldId="269"/>
+            <ac:spMk id="12" creationId="{00000000-0000-0000-0000-000000000000}"/>
+          </ac:spMkLst>
+        </pc:spChg>
+      </pc:sldChg>
+      <pc:sldChg chg="addSp delSp modSp add del mod modNotesTx">
+        <pc:chgData name="Olamide Adeboye" userId="9e787034137b2853" providerId="LiveId" clId="{7D6CD3DA-39E8-4DBC-AE6D-988E01832CC9}" dt="2026-04-24T20:20:37.552" v="141" actId="2696"/>
+        <pc:sldMkLst>
+          <pc:docMk/>
+          <pc:sldMk cId="0" sldId="272"/>
+        </pc:sldMkLst>
+        <pc:spChg chg="del mod">
+          <ac:chgData name="Olamide Adeboye" userId="9e787034137b2853" providerId="LiveId" clId="{7D6CD3DA-39E8-4DBC-AE6D-988E01832CC9}" dt="2026-04-24T20:11:42.768" v="107" actId="478"/>
+          <ac:spMkLst>
+            <pc:docMk/>
+            <pc:sldMk cId="0" sldId="272"/>
+            <ac:spMk id="2" creationId="{00000000-0000-0000-0000-000000000000}"/>
+          </ac:spMkLst>
+        </pc:spChg>
+        <pc:spChg chg="del mod">
+          <ac:chgData name="Olamide Adeboye" userId="9e787034137b2853" providerId="LiveId" clId="{7D6CD3DA-39E8-4DBC-AE6D-988E01832CC9}" dt="2026-04-24T20:10:46.624" v="97" actId="478"/>
+          <ac:spMkLst>
+            <pc:docMk/>
+            <pc:sldMk cId="0" sldId="272"/>
+            <ac:spMk id="6" creationId="{00000000-0000-0000-0000-000000000000}"/>
+          </ac:spMkLst>
+        </pc:spChg>
+        <pc:spChg chg="add del mod">
+          <ac:chgData name="Olamide Adeboye" userId="9e787034137b2853" providerId="LiveId" clId="{7D6CD3DA-39E8-4DBC-AE6D-988E01832CC9}" dt="2026-04-24T20:11:57.213" v="109" actId="478"/>
+          <ac:spMkLst>
+            <pc:docMk/>
+            <pc:sldMk cId="0" sldId="272"/>
+            <ac:spMk id="7" creationId="{00000000-0000-0000-0000-000000000000}"/>
+          </ac:spMkLst>
+        </pc:spChg>
+        <pc:spChg chg="del mod">
+          <ac:chgData name="Olamide Adeboye" userId="9e787034137b2853" providerId="LiveId" clId="{7D6CD3DA-39E8-4DBC-AE6D-988E01832CC9}" dt="2026-04-24T20:11:57.213" v="109" actId="478"/>
+          <ac:spMkLst>
+            <pc:docMk/>
+            <pc:sldMk cId="0" sldId="272"/>
+            <ac:spMk id="8" creationId="{00000000-0000-0000-0000-000000000000}"/>
+          </ac:spMkLst>
+        </pc:spChg>
+        <pc:spChg chg="add del mod">
+          <ac:chgData name="Olamide Adeboye" userId="9e787034137b2853" providerId="LiveId" clId="{7D6CD3DA-39E8-4DBC-AE6D-988E01832CC9}" dt="2026-04-24T20:11:57.213" v="109" actId="478"/>
+          <ac:spMkLst>
+            <pc:docMk/>
+            <pc:sldMk cId="0" sldId="272"/>
+            <ac:spMk id="9" creationId="{00000000-0000-0000-0000-000000000000}"/>
+          </ac:spMkLst>
+        </pc:spChg>
+        <pc:spChg chg="add del mod">
+          <ac:chgData name="Olamide Adeboye" userId="9e787034137b2853" providerId="LiveId" clId="{7D6CD3DA-39E8-4DBC-AE6D-988E01832CC9}" dt="2026-04-24T20:10:51.898" v="99" actId="478"/>
+          <ac:spMkLst>
+            <pc:docMk/>
+            <pc:sldMk cId="0" sldId="272"/>
+            <ac:spMk id="10" creationId="{00000000-0000-0000-0000-000000000000}"/>
+          </ac:spMkLst>
+        </pc:spChg>
+        <pc:spChg chg="add del mod">
+          <ac:chgData name="Olamide Adeboye" userId="9e787034137b2853" providerId="LiveId" clId="{7D6CD3DA-39E8-4DBC-AE6D-988E01832CC9}" dt="2026-04-24T20:11:50.126" v="108" actId="478"/>
+          <ac:spMkLst>
+            <pc:docMk/>
+            <pc:sldMk cId="0" sldId="272"/>
+            <ac:spMk id="11" creationId="{00000000-0000-0000-0000-000000000000}"/>
+          </ac:spMkLst>
+        </pc:spChg>
+        <pc:spChg chg="add del mod">
+          <ac:chgData name="Olamide Adeboye" userId="9e787034137b2853" providerId="LiveId" clId="{7D6CD3DA-39E8-4DBC-AE6D-988E01832CC9}" dt="2026-04-24T20:10:49.380" v="98" actId="478"/>
+          <ac:spMkLst>
+            <pc:docMk/>
+            <pc:sldMk cId="0" sldId="272"/>
+            <ac:spMk id="12" creationId="{00000000-0000-0000-0000-000000000000}"/>
+          </ac:spMkLst>
+        </pc:spChg>
+        <pc:spChg chg="add del mod">
+          <ac:chgData name="Olamide Adeboye" userId="9e787034137b2853" providerId="LiveId" clId="{7D6CD3DA-39E8-4DBC-AE6D-988E01832CC9}" dt="2026-04-24T20:11:50.126" v="108" actId="478"/>
+          <ac:spMkLst>
+            <pc:docMk/>
+            <pc:sldMk cId="0" sldId="272"/>
+            <ac:spMk id="14" creationId="{00000000-0000-0000-0000-000000000000}"/>
+          </ac:spMkLst>
+        </pc:spChg>
+        <pc:spChg chg="add del mod">
+          <ac:chgData name="Olamide Adeboye" userId="9e787034137b2853" providerId="LiveId" clId="{7D6CD3DA-39E8-4DBC-AE6D-988E01832CC9}" dt="2026-04-24T20:11:50.126" v="108" actId="478"/>
+          <ac:spMkLst>
+            <pc:docMk/>
+            <pc:sldMk cId="0" sldId="272"/>
+            <ac:spMk id="15" creationId="{00000000-0000-0000-0000-000000000000}"/>
+          </ac:spMkLst>
+        </pc:spChg>
+        <pc:spChg chg="del">
+          <ac:chgData name="Olamide Adeboye" userId="9e787034137b2853" providerId="LiveId" clId="{7D6CD3DA-39E8-4DBC-AE6D-988E01832CC9}" dt="2026-04-24T20:12:19.057" v="117" actId="478"/>
+          <ac:spMkLst>
+            <pc:docMk/>
+            <pc:sldMk cId="0" sldId="272"/>
+            <ac:spMk id="16" creationId="{00000000-0000-0000-0000-000000000000}"/>
+          </ac:spMkLst>
+        </pc:spChg>
+        <pc:spChg chg="del">
+          <ac:chgData name="Olamide Adeboye" userId="9e787034137b2853" providerId="LiveId" clId="{7D6CD3DA-39E8-4DBC-AE6D-988E01832CC9}" dt="2026-04-24T20:12:18.071" v="116" actId="478"/>
+          <ac:spMkLst>
+            <pc:docMk/>
+            <pc:sldMk cId="0" sldId="272"/>
+            <ac:spMk id="17" creationId="{00000000-0000-0000-0000-000000000000}"/>
+          </ac:spMkLst>
+        </pc:spChg>
+        <pc:spChg chg="del">
+          <ac:chgData name="Olamide Adeboye" userId="9e787034137b2853" providerId="LiveId" clId="{7D6CD3DA-39E8-4DBC-AE6D-988E01832CC9}" dt="2026-04-24T20:12:16.983" v="115" actId="478"/>
+          <ac:spMkLst>
+            <pc:docMk/>
+            <pc:sldMk cId="0" sldId="272"/>
+            <ac:spMk id="18" creationId="{00000000-0000-0000-0000-000000000000}"/>
+          </ac:spMkLst>
+        </pc:spChg>
+        <pc:spChg chg="del">
+          <ac:chgData name="Olamide Adeboye" userId="9e787034137b2853" providerId="LiveId" clId="{7D6CD3DA-39E8-4DBC-AE6D-988E01832CC9}" dt="2026-04-24T20:12:15.727" v="114" actId="478"/>
+          <ac:spMkLst>
+            <pc:docMk/>
+            <pc:sldMk cId="0" sldId="272"/>
+            <ac:spMk id="19" creationId="{00000000-0000-0000-0000-000000000000}"/>
+          </ac:spMkLst>
+        </pc:spChg>
+        <pc:spChg chg="del">
+          <ac:chgData name="Olamide Adeboye" userId="9e787034137b2853" providerId="LiveId" clId="{7D6CD3DA-39E8-4DBC-AE6D-988E01832CC9}" dt="2026-04-24T20:12:30.600" v="119" actId="478"/>
+          <ac:spMkLst>
+            <pc:docMk/>
+            <pc:sldMk cId="0" sldId="272"/>
+            <ac:spMk id="20" creationId="{00000000-0000-0000-0000-000000000000}"/>
+          </ac:spMkLst>
+        </pc:spChg>
+        <pc:spChg chg="del mod">
+          <ac:chgData name="Olamide Adeboye" userId="9e787034137b2853" providerId="LiveId" clId="{7D6CD3DA-39E8-4DBC-AE6D-988E01832CC9}" dt="2026-04-24T20:12:34.232" v="121" actId="478"/>
+          <ac:spMkLst>
+            <pc:docMk/>
+            <pc:sldMk cId="0" sldId="272"/>
+            <ac:spMk id="21" creationId="{00000000-0000-0000-0000-000000000000}"/>
+          </ac:spMkLst>
+        </pc:spChg>
+        <pc:spChg chg="del mod">
+          <ac:chgData name="Olamide Adeboye" userId="9e787034137b2853" providerId="LiveId" clId="{7D6CD3DA-39E8-4DBC-AE6D-988E01832CC9}" dt="2026-04-24T20:12:57.318" v="125" actId="478"/>
+          <ac:spMkLst>
+            <pc:docMk/>
+            <pc:sldMk cId="0" sldId="272"/>
+            <ac:spMk id="23" creationId="{00000000-0000-0000-0000-000000000000}"/>
+          </ac:spMkLst>
+        </pc:spChg>
+        <pc:spChg chg="del mod">
+          <ac:chgData name="Olamide Adeboye" userId="9e787034137b2853" providerId="LiveId" clId="{7D6CD3DA-39E8-4DBC-AE6D-988E01832CC9}" dt="2026-04-24T20:12:30.600" v="119" actId="478"/>
+          <ac:spMkLst>
+            <pc:docMk/>
+            <pc:sldMk cId="0" sldId="272"/>
+            <ac:spMk id="24" creationId="{00000000-0000-0000-0000-000000000000}"/>
+          </ac:spMkLst>
+        </pc:spChg>
+        <pc:spChg chg="del">
+          <ac:chgData name="Olamide Adeboye" userId="9e787034137b2853" providerId="LiveId" clId="{7D6CD3DA-39E8-4DBC-AE6D-988E01832CC9}" dt="2026-04-24T20:12:04.047" v="110" actId="478"/>
+          <ac:spMkLst>
+            <pc:docMk/>
+            <pc:sldMk cId="0" sldId="272"/>
+            <ac:spMk id="25" creationId="{00000000-0000-0000-0000-000000000000}"/>
+          </ac:spMkLst>
+        </pc:spChg>
+        <pc:spChg chg="del">
+          <ac:chgData name="Olamide Adeboye" userId="9e787034137b2853" providerId="LiveId" clId="{7D6CD3DA-39E8-4DBC-AE6D-988E01832CC9}" dt="2026-04-24T20:11:50.126" v="108" actId="478"/>
+          <ac:spMkLst>
+            <pc:docMk/>
+            <pc:sldMk cId="0" sldId="272"/>
+            <ac:spMk id="26" creationId="{00000000-0000-0000-0000-000000000000}"/>
+          </ac:spMkLst>
+        </pc:spChg>
+        <pc:spChg chg="del">
+          <ac:chgData name="Olamide Adeboye" userId="9e787034137b2853" providerId="LiveId" clId="{7D6CD3DA-39E8-4DBC-AE6D-988E01832CC9}" dt="2026-04-24T20:11:50.126" v="108" actId="478"/>
+          <ac:spMkLst>
+            <pc:docMk/>
+            <pc:sldMk cId="0" sldId="272"/>
+            <ac:spMk id="27" creationId="{00000000-0000-0000-0000-000000000000}"/>
+          </ac:spMkLst>
+        </pc:spChg>
+        <pc:spChg chg="del">
+          <ac:chgData name="Olamide Adeboye" userId="9e787034137b2853" providerId="LiveId" clId="{7D6CD3DA-39E8-4DBC-AE6D-988E01832CC9}" dt="2026-04-24T20:11:50.126" v="108" actId="478"/>
+          <ac:spMkLst>
+            <pc:docMk/>
+            <pc:sldMk cId="0" sldId="272"/>
+            <ac:spMk id="28" creationId="{00000000-0000-0000-0000-000000000000}"/>
+          </ac:spMkLst>
+        </pc:spChg>
+        <pc:spChg chg="del">
+          <ac:chgData name="Olamide Adeboye" userId="9e787034137b2853" providerId="LiveId" clId="{7D6CD3DA-39E8-4DBC-AE6D-988E01832CC9}" dt="2026-04-24T20:11:50.126" v="108" actId="478"/>
+          <ac:spMkLst>
+            <pc:docMk/>
+            <pc:sldMk cId="0" sldId="272"/>
+            <ac:spMk id="29" creationId="{00000000-0000-0000-0000-000000000000}"/>
+          </ac:spMkLst>
+        </pc:spChg>
+        <pc:spChg chg="del">
+          <ac:chgData name="Olamide Adeboye" userId="9e787034137b2853" providerId="LiveId" clId="{7D6CD3DA-39E8-4DBC-AE6D-988E01832CC9}" dt="2026-04-24T20:11:57.213" v="109" actId="478"/>
+          <ac:spMkLst>
+            <pc:docMk/>
+            <pc:sldMk cId="0" sldId="272"/>
+            <ac:spMk id="30" creationId="{00000000-0000-0000-0000-000000000000}"/>
+          </ac:spMkLst>
+        </pc:spChg>
+        <pc:spChg chg="del">
+          <ac:chgData name="Olamide Adeboye" userId="9e787034137b2853" providerId="LiveId" clId="{7D6CD3DA-39E8-4DBC-AE6D-988E01832CC9}" dt="2026-04-24T20:11:57.213" v="109" actId="478"/>
+          <ac:spMkLst>
+            <pc:docMk/>
+            <pc:sldMk cId="0" sldId="272"/>
+            <ac:spMk id="32" creationId="{00000000-0000-0000-0000-000000000000}"/>
+          </ac:spMkLst>
+        </pc:spChg>
+        <pc:spChg chg="del">
+          <ac:chgData name="Olamide Adeboye" userId="9e787034137b2853" providerId="LiveId" clId="{7D6CD3DA-39E8-4DBC-AE6D-988E01832CC9}" dt="2026-04-24T20:11:57.213" v="109" actId="478"/>
+          <ac:spMkLst>
+            <pc:docMk/>
+            <pc:sldMk cId="0" sldId="272"/>
+            <ac:spMk id="33" creationId="{00000000-0000-0000-0000-000000000000}"/>
+          </ac:spMkLst>
+        </pc:spChg>
+        <pc:spChg chg="del">
+          <ac:chgData name="Olamide Adeboye" userId="9e787034137b2853" providerId="LiveId" clId="{7D6CD3DA-39E8-4DBC-AE6D-988E01832CC9}" dt="2026-04-24T20:12:11.409" v="111" actId="478"/>
+          <ac:spMkLst>
+            <pc:docMk/>
+            <pc:sldMk cId="0" sldId="272"/>
+            <ac:spMk id="34" creationId="{00000000-0000-0000-0000-000000000000}"/>
+          </ac:spMkLst>
+        </pc:spChg>
+        <pc:spChg chg="del">
+          <ac:chgData name="Olamide Adeboye" userId="9e787034137b2853" providerId="LiveId" clId="{7D6CD3DA-39E8-4DBC-AE6D-988E01832CC9}" dt="2026-04-24T20:12:13.906" v="113" actId="478"/>
+          <ac:spMkLst>
+            <pc:docMk/>
+            <pc:sldMk cId="0" sldId="272"/>
+            <ac:spMk id="35" creationId="{00000000-0000-0000-0000-000000000000}"/>
+          </ac:spMkLst>
+        </pc:spChg>
+        <pc:spChg chg="del">
+          <ac:chgData name="Olamide Adeboye" userId="9e787034137b2853" providerId="LiveId" clId="{7D6CD3DA-39E8-4DBC-AE6D-988E01832CC9}" dt="2026-04-24T20:12:12.931" v="112" actId="478"/>
+          <ac:spMkLst>
+            <pc:docMk/>
+            <pc:sldMk cId="0" sldId="272"/>
+            <ac:spMk id="37" creationId="{00000000-0000-0000-0000-000000000000}"/>
+          </ac:spMkLst>
+        </pc:spChg>
+        <pc:spChg chg="del">
+          <ac:chgData name="Olamide Adeboye" userId="9e787034137b2853" providerId="LiveId" clId="{7D6CD3DA-39E8-4DBC-AE6D-988E01832CC9}" dt="2026-04-24T20:11:57.213" v="109" actId="478"/>
+          <ac:spMkLst>
+            <pc:docMk/>
+            <pc:sldMk cId="0" sldId="272"/>
+            <ac:spMk id="38" creationId="{00000000-0000-0000-0000-000000000000}"/>
+          </ac:spMkLst>
+        </pc:spChg>
+        <pc:spChg chg="del">
+          <ac:chgData name="Olamide Adeboye" userId="9e787034137b2853" providerId="LiveId" clId="{7D6CD3DA-39E8-4DBC-AE6D-988E01832CC9}" dt="2026-04-24T20:11:57.213" v="109" actId="478"/>
+          <ac:spMkLst>
+            <pc:docMk/>
+            <pc:sldMk cId="0" sldId="272"/>
+            <ac:spMk id="39" creationId="{00000000-0000-0000-0000-000000000000}"/>
+          </ac:spMkLst>
+        </pc:spChg>
+        <pc:spChg chg="del">
+          <ac:chgData name="Olamide Adeboye" userId="9e787034137b2853" providerId="LiveId" clId="{7D6CD3DA-39E8-4DBC-AE6D-988E01832CC9}" dt="2026-04-24T20:11:57.213" v="109" actId="478"/>
+          <ac:spMkLst>
+            <pc:docMk/>
+            <pc:sldMk cId="0" sldId="272"/>
+            <ac:spMk id="41" creationId="{00000000-0000-0000-0000-000000000000}"/>
+          </ac:spMkLst>
+        </pc:spChg>
+        <pc:spChg chg="del">
+          <ac:chgData name="Olamide Adeboye" userId="9e787034137b2853" providerId="LiveId" clId="{7D6CD3DA-39E8-4DBC-AE6D-988E01832CC9}" dt="2026-04-24T20:11:57.213" v="109" actId="478"/>
+          <ac:spMkLst>
+            <pc:docMk/>
+            <pc:sldMk cId="0" sldId="272"/>
+            <ac:spMk id="42" creationId="{00000000-0000-0000-0000-000000000000}"/>
+          </ac:spMkLst>
+        </pc:spChg>
+        <pc:spChg chg="del mod">
+          <ac:chgData name="Olamide Adeboye" userId="9e787034137b2853" providerId="LiveId" clId="{7D6CD3DA-39E8-4DBC-AE6D-988E01832CC9}" dt="2026-04-24T20:12:54.369" v="124" actId="478"/>
+          <ac:spMkLst>
+            <pc:docMk/>
+            <pc:sldMk cId="0" sldId="272"/>
+            <ac:spMk id="48" creationId="{00000000-0000-0000-0000-000000000000}"/>
+          </ac:spMkLst>
+        </pc:spChg>
+        <pc:spChg chg="del">
+          <ac:chgData name="Olamide Adeboye" userId="9e787034137b2853" providerId="LiveId" clId="{7D6CD3DA-39E8-4DBC-AE6D-988E01832CC9}" dt="2026-04-24T20:12:44.655" v="122" actId="478"/>
+          <ac:spMkLst>
+            <pc:docMk/>
+            <pc:sldMk cId="0" sldId="272"/>
+            <ac:spMk id="49" creationId="{00000000-0000-0000-0000-000000000000}"/>
+          </ac:spMkLst>
+        </pc:spChg>
+        <pc:picChg chg="add mod">
+          <ac:chgData name="Olamide Adeboye" userId="9e787034137b2853" providerId="LiveId" clId="{7D6CD3DA-39E8-4DBC-AE6D-988E01832CC9}" dt="2026-04-24T20:14:23.485" v="131" actId="1076"/>
+          <ac:picMkLst>
+            <pc:docMk/>
+            <pc:sldMk cId="0" sldId="272"/>
+            <ac:picMk id="52" creationId="{5A3AB45E-495D-7AA4-CA25-5E33D8945E8A}"/>
+          </ac:picMkLst>
+        </pc:picChg>
+        <pc:cxnChg chg="del mod">
+          <ac:chgData name="Olamide Adeboye" userId="9e787034137b2853" providerId="LiveId" clId="{7D6CD3DA-39E8-4DBC-AE6D-988E01832CC9}" dt="2026-04-24T20:11:50.126" v="108" actId="478"/>
+          <ac:cxnSpMkLst>
+            <pc:docMk/>
+            <pc:sldMk cId="0" sldId="272"/>
+            <ac:cxnSpMk id="13" creationId="{00000000-0000-0000-0000-000000000000}"/>
+          </ac:cxnSpMkLst>
+        </pc:cxnChg>
+        <pc:cxnChg chg="del">
+          <ac:chgData name="Olamide Adeboye" userId="9e787034137b2853" providerId="LiveId" clId="{7D6CD3DA-39E8-4DBC-AE6D-988E01832CC9}" dt="2026-04-24T20:12:30.600" v="119" actId="478"/>
+          <ac:cxnSpMkLst>
+            <pc:docMk/>
+            <pc:sldMk cId="0" sldId="272"/>
+            <ac:cxnSpMk id="22" creationId="{00000000-0000-0000-0000-000000000000}"/>
+          </ac:cxnSpMkLst>
+        </pc:cxnChg>
+        <pc:cxnChg chg="del">
+          <ac:chgData name="Olamide Adeboye" userId="9e787034137b2853" providerId="LiveId" clId="{7D6CD3DA-39E8-4DBC-AE6D-988E01832CC9}" dt="2026-04-24T20:11:50.126" v="108" actId="478"/>
+          <ac:cxnSpMkLst>
+            <pc:docMk/>
+            <pc:sldMk cId="0" sldId="272"/>
+            <ac:cxnSpMk id="31" creationId="{00000000-0000-0000-0000-000000000000}"/>
+          </ac:cxnSpMkLst>
+        </pc:cxnChg>
+        <pc:cxnChg chg="mod">
+          <ac:chgData name="Olamide Adeboye" userId="9e787034137b2853" providerId="LiveId" clId="{7D6CD3DA-39E8-4DBC-AE6D-988E01832CC9}" dt="2026-04-24T17:51:56.347" v="93" actId="1035"/>
+          <ac:cxnSpMkLst>
+            <pc:docMk/>
+            <pc:sldMk cId="0" sldId="272"/>
+            <ac:cxnSpMk id="43" creationId="{00000000-0000-0000-0000-000000000000}"/>
+          </ac:cxnSpMkLst>
+        </pc:cxnChg>
+        <pc:cxnChg chg="mod">
+          <ac:chgData name="Olamide Adeboye" userId="9e787034137b2853" providerId="LiveId" clId="{7D6CD3DA-39E8-4DBC-AE6D-988E01832CC9}" dt="2026-04-24T17:51:56.347" v="93" actId="1035"/>
+          <ac:cxnSpMkLst>
+            <pc:docMk/>
+            <pc:sldMk cId="0" sldId="272"/>
+            <ac:cxnSpMk id="44" creationId="{00000000-0000-0000-0000-000000000000}"/>
+          </ac:cxnSpMkLst>
+        </pc:cxnChg>
+      </pc:sldChg>
+      <pc:sldChg chg="new del">
+        <pc:chgData name="Olamide Adeboye" userId="9e787034137b2853" providerId="LiveId" clId="{7D6CD3DA-39E8-4DBC-AE6D-988E01832CC9}" dt="2026-04-24T20:11:15.904" v="103" actId="680"/>
+        <pc:sldMkLst>
+          <pc:docMk/>
+          <pc:sldMk cId="2554505550" sldId="272"/>
+        </pc:sldMkLst>
+      </pc:sldChg>
+      <pc:sldChg chg="addSp delSp modSp add mod modNotesTx">
+        <pc:chgData name="Olamide Adeboye" userId="9e787034137b2853" providerId="LiveId" clId="{7D6CD3DA-39E8-4DBC-AE6D-988E01832CC9}" dt="2026-04-24T20:43:26.228" v="407" actId="20577"/>
+        <pc:sldMkLst>
+          <pc:docMk/>
+          <pc:sldMk cId="1252368480" sldId="273"/>
+        </pc:sldMkLst>
+        <pc:spChg chg="add mod">
+          <ac:chgData name="Olamide Adeboye" userId="9e787034137b2853" providerId="LiveId" clId="{7D6CD3DA-39E8-4DBC-AE6D-988E01832CC9}" dt="2026-04-24T20:20:21.198" v="139" actId="14100"/>
+          <ac:spMkLst>
+            <pc:docMk/>
+            <pc:sldMk cId="1252368480" sldId="273"/>
+            <ac:spMk id="7" creationId="{7B3C42AC-7A9F-A73D-ABD8-D00873FBE8B3}"/>
+          </ac:spMkLst>
+        </pc:spChg>
+        <pc:spChg chg="add mod">
+          <ac:chgData name="Olamide Adeboye" userId="9e787034137b2853" providerId="LiveId" clId="{7D6CD3DA-39E8-4DBC-AE6D-988E01832CC9}" dt="2026-04-24T20:20:30.954" v="140"/>
+          <ac:spMkLst>
+            <pc:docMk/>
+            <pc:sldMk cId="1252368480" sldId="273"/>
+            <ac:spMk id="8" creationId="{070D9284-C3B6-A871-4359-7669D3E176E2}"/>
+          </ac:spMkLst>
+        </pc:spChg>
+        <pc:picChg chg="add mod">
+          <ac:chgData name="Olamide Adeboye" userId="9e787034137b2853" providerId="LiveId" clId="{7D6CD3DA-39E8-4DBC-AE6D-988E01832CC9}" dt="2026-04-24T20:17:39.398" v="136"/>
+          <ac:picMkLst>
+            <pc:docMk/>
+            <pc:sldMk cId="1252368480" sldId="273"/>
+            <ac:picMk id="6" creationId="{A6A51D73-CC5D-AB60-EA38-409D3E96FD65}"/>
+          </ac:picMkLst>
+        </pc:picChg>
+        <pc:picChg chg="del">
+          <ac:chgData name="Olamide Adeboye" userId="9e787034137b2853" providerId="LiveId" clId="{7D6CD3DA-39E8-4DBC-AE6D-988E01832CC9}" dt="2026-04-24T20:17:37.960" v="134" actId="478"/>
+          <ac:picMkLst>
+            <pc:docMk/>
+            <pc:sldMk cId="1252368480" sldId="273"/>
+            <ac:picMk id="52" creationId="{C4D5E57D-43BE-8363-2A57-F4999AD37348}"/>
+          </ac:picMkLst>
+        </pc:picChg>
+      </pc:sldChg>
+      <pc:sldChg chg="add del">
+        <pc:chgData name="Olamide Adeboye" userId="9e787034137b2853" providerId="LiveId" clId="{7D6CD3DA-39E8-4DBC-AE6D-988E01832CC9}" dt="2026-04-24T20:11:29.850" v="106" actId="2696"/>
+        <pc:sldMkLst>
+          <pc:docMk/>
+          <pc:sldMk cId="2985713827" sldId="273"/>
+        </pc:sldMkLst>
+      </pc:sldChg>
+    </pc:docChg>
+  </pc:docChgLst>
+</pc:chgInfo>
 </file>
 
 <file path=ppt/notesMasters/notesMaster1.xml><?xml version="1.0" encoding="utf-8"?>
@@ -1440,12 +1967,6 @@
           <a:p>
             <a:r>
               <a:rPr lang="en-US" dirty="0"/>
-              <a:t>"Getting serialization right across subclasses" refers to making sure each product type saves and loads its unique fields correctly (expiry date for perishables, download link for digital).</a:t>
-            </a:r>
-          </a:p>
-          <a:p>
-            <a:r>
-              <a:rPr lang="en-US" dirty="0"/>
               <a:t>"Testing shapes the design, not just the bugs" is a genuinely important lesson. When code is hard to test, it's usually because the design is tangled.</a:t>
             </a:r>
           </a:p>
@@ -3021,7 +3542,13 @@
   <p:cSld>
     <p:spTree>
       <p:nvGrpSpPr>
-        <p:cNvPr id="1" name=""/>
+        <p:cNvPr id="1" name="">
+          <a:extLst>
+            <a:ext uri="{FF2B5EF4-FFF2-40B4-BE49-F238E27FC236}">
+              <a16:creationId xmlns:a16="http://schemas.microsoft.com/office/drawing/2014/main" id="{CEA0C335-F13E-0506-3709-882A0B3F0BCB}"/>
+            </a:ext>
+          </a:extLst>
+        </p:cNvPr>
         <p:cNvGrpSpPr/>
         <p:nvPr/>
       </p:nvGrpSpPr>
@@ -3035,7 +3562,13 @@
       </p:grpSpPr>
       <p:sp>
         <p:nvSpPr>
-          <p:cNvPr id="2" name="Slide Image Placeholder 1"/>
+          <p:cNvPr id="2" name="Slide Image Placeholder 1">
+            <a:extLst>
+              <a:ext uri="{FF2B5EF4-FFF2-40B4-BE49-F238E27FC236}">
+                <a16:creationId xmlns:a16="http://schemas.microsoft.com/office/drawing/2014/main" id="{FFB3E87A-F9D5-27CD-1D57-CEC477FDEA47}"/>
+              </a:ext>
+            </a:extLst>
+          </p:cNvPr>
           <p:cNvSpPr>
             <a:spLocks noGrp="1" noRot="1" noChangeAspect="1"/>
           </p:cNvSpPr>
@@ -3047,7 +3580,13 @@
       </p:sp>
       <p:sp>
         <p:nvSpPr>
-          <p:cNvPr id="3" name="Notes Placeholder 2"/>
+          <p:cNvPr id="3" name="Notes Placeholder 2">
+            <a:extLst>
+              <a:ext uri="{FF2B5EF4-FFF2-40B4-BE49-F238E27FC236}">
+                <a16:creationId xmlns:a16="http://schemas.microsoft.com/office/drawing/2014/main" id="{9A2AE72E-BF51-D7CF-D791-B9F6DCBF35BB}"/>
+              </a:ext>
+            </a:extLst>
+          </p:cNvPr>
           <p:cNvSpPr>
             <a:spLocks noGrp="1"/>
           </p:cNvSpPr>
@@ -3061,43 +3600,67 @@
           <a:lstStyle/>
           <a:p>
             <a:r>
-              <a:rPr lang="en-US" dirty="0"/>
-              <a:t>A </a:t>
-            </a:r>
-            <a:r>
-              <a:rPr lang="en-US" b="1" dirty="0"/>
-              <a:t>UML diagram</a:t>
-            </a:r>
-            <a:r>
-              <a:rPr lang="en-US" dirty="0"/>
-              <a:t>, which is a standard way to draw classes as boxes. Each box lists attributes (data) on top and methods (actions) below. The </a:t>
+              <a:rPr lang="en-US" b="1" dirty="0">
+                <a:effectLst/>
+              </a:rPr>
+              <a:t>Product (the base class)</a:t>
+            </a:r>
+          </a:p>
+          <a:p>
+            <a:r>
+              <a:rPr lang="en-US" dirty="0">
+                <a:effectLst/>
+              </a:rPr>
+              <a:t>This is the foundation. Everything else in the system either </a:t>
+            </a:r>
+            <a:r>
+              <a:rPr lang="en-US" b="1" dirty="0">
+                <a:effectLst/>
+              </a:rPr>
+              <a:t>is</a:t>
+            </a:r>
+            <a:r>
+              <a:rPr lang="en-US" dirty="0">
+                <a:effectLst/>
+              </a:rPr>
+              <a:t> a </a:t>
             </a:r>
             <a:r>
               <a:rPr lang="en-US" sz="1200" kern="1200" dirty="0">
                 <a:solidFill>
                   <a:schemeClr val="tx1"/>
                 </a:solidFill>
-                <a:latin typeface="+mn-lt"/>
-                <a:ea typeface="+mn-ea"/>
-                <a:cs typeface="+mn-cs"/>
-              </a:rPr>
-              <a:t>+</a:t>
-            </a:r>
-            <a:r>
-              <a:rPr lang="en-US" dirty="0"/>
-              <a:t> sign means "public" (accessible from outside the class).</a:t>
-            </a:r>
-          </a:p>
-          <a:p>
-            <a:r>
-              <a:rPr lang="en-US" dirty="0"/>
-              <a:t>The base </a:t>
+                <a:effectLst/>
+                <a:latin typeface="+mn-lt"/>
+                <a:ea typeface="+mn-ea"/>
+                <a:cs typeface="+mn-cs"/>
+              </a:rPr>
+              <a:t>Product</a:t>
+            </a:r>
+            <a:r>
+              <a:rPr lang="en-US" dirty="0">
+                <a:effectLst/>
+              </a:rPr>
+              <a:t> (inheritance) or </a:t>
+            </a:r>
+            <a:r>
+              <a:rPr lang="en-US" b="1" dirty="0">
+                <a:effectLst/>
+              </a:rPr>
+              <a:t>holds</a:t>
+            </a:r>
+            <a:r>
+              <a:rPr lang="en-US" dirty="0">
+                <a:effectLst/>
+              </a:rPr>
+              <a:t> </a:t>
             </a:r>
             <a:r>
               <a:rPr lang="en-US" sz="1200" kern="1200" dirty="0">
                 <a:solidFill>
                   <a:schemeClr val="tx1"/>
                 </a:solidFill>
+                <a:effectLst/>
                 <a:latin typeface="+mn-lt"/>
                 <a:ea typeface="+mn-ea"/>
                 <a:cs typeface="+mn-cs"/>
@@ -3105,14 +3668,73 @@
               <a:t>Product</a:t>
             </a:r>
             <a:r>
-              <a:rPr lang="en-US" dirty="0"/>
-              <a:t> has </a:t>
+              <a:rPr lang="en-US" dirty="0">
+                <a:effectLst/>
+              </a:rPr>
+              <a:t> objects (composition).</a:t>
+            </a:r>
+          </a:p>
+          <a:p>
+            <a:r>
+              <a:rPr lang="en-US" b="1" dirty="0">
+                <a:effectLst/>
+              </a:rPr>
+              <a:t>Attributes</a:t>
+            </a:r>
+            <a:r>
+              <a:rPr lang="en-US" dirty="0">
+                <a:effectLst/>
+              </a:rPr>
+              <a:t> (set in </a:t>
+            </a:r>
+            <a:r>
+              <a:rPr lang="en-US" sz="1200" kern="1200" dirty="0">
+                <a:solidFill>
+                  <a:schemeClr val="tx1"/>
+                </a:solidFill>
+                <a:effectLst/>
+                <a:latin typeface="+mn-lt"/>
+                <a:ea typeface="+mn-ea"/>
+                <a:cs typeface="+mn-cs"/>
+              </a:rPr>
+              <a:t>__</a:t>
             </a:r>
             <a:r>
               <a:rPr lang="en-US" sz="1200" kern="1200" dirty="0" err="1">
                 <a:solidFill>
                   <a:schemeClr val="tx1"/>
                 </a:solidFill>
+                <a:effectLst/>
+                <a:latin typeface="+mn-lt"/>
+                <a:ea typeface="+mn-ea"/>
+                <a:cs typeface="+mn-cs"/>
+              </a:rPr>
+              <a:t>init</a:t>
+            </a:r>
+            <a:r>
+              <a:rPr lang="en-US" sz="1200" kern="1200" dirty="0">
+                <a:solidFill>
+                  <a:schemeClr val="tx1"/>
+                </a:solidFill>
+                <a:effectLst/>
+                <a:latin typeface="+mn-lt"/>
+                <a:ea typeface="+mn-ea"/>
+                <a:cs typeface="+mn-cs"/>
+              </a:rPr>
+              <a:t>__</a:t>
+            </a:r>
+            <a:r>
+              <a:rPr lang="en-US" dirty="0">
+                <a:effectLst/>
+              </a:rPr>
+              <a:t>): </a:t>
+            </a:r>
+            <a:r>
+              <a:rPr lang="en-US" sz="1200" kern="1200" dirty="0" err="1">
+                <a:solidFill>
+                  <a:schemeClr val="tx1"/>
+                </a:solidFill>
+                <a:effectLst/>
                 <a:latin typeface="+mn-lt"/>
                 <a:ea typeface="+mn-ea"/>
                 <a:cs typeface="+mn-cs"/>
@@ -3120,7 +3742,9 @@
               <a:t>product_id</a:t>
             </a:r>
             <a:r>
-              <a:rPr lang="en-US" dirty="0"/>
+              <a:rPr lang="en-US" dirty="0">
+                <a:effectLst/>
+              </a:rPr>
               <a:t>, </a:t>
             </a:r>
             <a:r>
@@ -3128,6 +3752,7 @@
                 <a:solidFill>
                   <a:schemeClr val="tx1"/>
                 </a:solidFill>
+                <a:effectLst/>
                 <a:latin typeface="+mn-lt"/>
                 <a:ea typeface="+mn-ea"/>
                 <a:cs typeface="+mn-cs"/>
@@ -3135,7 +3760,9 @@
               <a:t>name</a:t>
             </a:r>
             <a:r>
-              <a:rPr lang="en-US" dirty="0"/>
+              <a:rPr lang="en-US" dirty="0">
+                <a:effectLst/>
+              </a:rPr>
               <a:t>, </a:t>
             </a:r>
             <a:r>
@@ -3143,6 +3770,7 @@
                 <a:solidFill>
                   <a:schemeClr val="tx1"/>
                 </a:solidFill>
+                <a:effectLst/>
                 <a:latin typeface="+mn-lt"/>
                 <a:ea typeface="+mn-ea"/>
                 <a:cs typeface="+mn-cs"/>
@@ -3150,7 +3778,9 @@
               <a:t>price</a:t>
             </a:r>
             <a:r>
-              <a:rPr lang="en-US" dirty="0"/>
+              <a:rPr lang="en-US" dirty="0">
+                <a:effectLst/>
+              </a:rPr>
               <a:t>, </a:t>
             </a:r>
             <a:r>
@@ -3158,6 +3788,7 @@
                 <a:solidFill>
                   <a:schemeClr val="tx1"/>
                 </a:solidFill>
+                <a:effectLst/>
                 <a:latin typeface="+mn-lt"/>
                 <a:ea typeface="+mn-ea"/>
                 <a:cs typeface="+mn-cs"/>
@@ -3165,7 +3796,9 @@
               <a:t>quantity</a:t>
             </a:r>
             <a:r>
-              <a:rPr lang="en-US" dirty="0"/>
+              <a:rPr lang="en-US" dirty="0">
+                <a:effectLst/>
+              </a:rPr>
               <a:t>, </a:t>
             </a:r>
             <a:r>
@@ -3173,6 +3806,7 @@
                 <a:solidFill>
                   <a:schemeClr val="tx1"/>
                 </a:solidFill>
+                <a:effectLst/>
                 <a:latin typeface="+mn-lt"/>
                 <a:ea typeface="+mn-ea"/>
                 <a:cs typeface="+mn-cs"/>
@@ -3180,14 +3814,90 @@
               <a:t>category</a:t>
             </a:r>
             <a:r>
-              <a:rPr lang="en-US" dirty="0"/>
-              <a:t>, plus methods like </a:t>
+              <a:rPr lang="en-US" dirty="0">
+                <a:effectLst/>
+              </a:rPr>
+              <a:t>. All five are validated before being assigned. If any check fails, </a:t>
             </a:r>
             <a:r>
               <a:rPr lang="en-US" sz="1200" kern="1200" dirty="0">
                 <a:solidFill>
                   <a:schemeClr val="tx1"/>
                 </a:solidFill>
+                <a:effectLst/>
+                <a:latin typeface="+mn-lt"/>
+                <a:ea typeface="+mn-ea"/>
+                <a:cs typeface="+mn-cs"/>
+              </a:rPr>
+              <a:t>__</a:t>
+            </a:r>
+            <a:r>
+              <a:rPr lang="en-US" sz="1200" kern="1200" dirty="0" err="1">
+                <a:solidFill>
+                  <a:schemeClr val="tx1"/>
+                </a:solidFill>
+                <a:effectLst/>
+                <a:latin typeface="+mn-lt"/>
+                <a:ea typeface="+mn-ea"/>
+                <a:cs typeface="+mn-cs"/>
+              </a:rPr>
+              <a:t>init</a:t>
+            </a:r>
+            <a:r>
+              <a:rPr lang="en-US" sz="1200" kern="1200" dirty="0">
+                <a:solidFill>
+                  <a:schemeClr val="tx1"/>
+                </a:solidFill>
+                <a:effectLst/>
+                <a:latin typeface="+mn-lt"/>
+                <a:ea typeface="+mn-ea"/>
+                <a:cs typeface="+mn-cs"/>
+              </a:rPr>
+              <a:t>__</a:t>
+            </a:r>
+            <a:r>
+              <a:rPr lang="en-US" dirty="0">
+                <a:effectLst/>
+              </a:rPr>
+              <a:t> raises </a:t>
+            </a:r>
+            <a:r>
+              <a:rPr lang="en-US" sz="1200" kern="1200" dirty="0" err="1">
+                <a:solidFill>
+                  <a:schemeClr val="tx1"/>
+                </a:solidFill>
+                <a:effectLst/>
+                <a:latin typeface="+mn-lt"/>
+                <a:ea typeface="+mn-ea"/>
+                <a:cs typeface="+mn-cs"/>
+              </a:rPr>
+              <a:t>InvalidProductError</a:t>
+            </a:r>
+            <a:r>
+              <a:rPr lang="en-US" dirty="0">
+                <a:effectLst/>
+              </a:rPr>
+              <a:t> straight away. This is the "fail fast" idea from the presentation.</a:t>
+            </a:r>
+          </a:p>
+          <a:p>
+            <a:r>
+              <a:rPr lang="en-US" b="1" dirty="0">
+                <a:effectLst/>
+              </a:rPr>
+              <a:t>Methods:</a:t>
+            </a:r>
+            <a:endParaRPr lang="en-US" dirty="0">
+              <a:effectLst/>
+            </a:endParaRPr>
+          </a:p>
+          <a:p>
+            <a:r>
+              <a:rPr lang="en-US" sz="1200" kern="1200" dirty="0">
+                <a:solidFill>
+                  <a:schemeClr val="tx1"/>
+                </a:solidFill>
+                <a:effectLst/>
                 <a:latin typeface="+mn-lt"/>
                 <a:ea typeface="+mn-ea"/>
                 <a:cs typeface="+mn-cs"/>
@@ -3195,14 +3905,55 @@
               <a:t>sell(qty)</a:t>
             </a:r>
             <a:r>
-              <a:rPr lang="en-US" dirty="0"/>
-              <a:t>, </a:t>
-            </a:r>
+              <a:rPr lang="en-US" dirty="0">
+                <a:effectLst/>
+              </a:rPr>
+              <a:t> checks the requested quantity is a positive whole number, checks there's enough stock, subtracts from </a:t>
+            </a:r>
+            <a:r>
+              <a:rPr lang="en-US" sz="1200" kern="1200" dirty="0" err="1">
+                <a:solidFill>
+                  <a:schemeClr val="tx1"/>
+                </a:solidFill>
+                <a:effectLst/>
+                <a:latin typeface="+mn-lt"/>
+                <a:ea typeface="+mn-ea"/>
+                <a:cs typeface="+mn-cs"/>
+              </a:rPr>
+              <a:t>self.quantity</a:t>
+            </a:r>
+            <a:r>
+              <a:rPr lang="en-US" dirty="0">
+                <a:effectLst/>
+              </a:rPr>
+              <a:t>, and logs the sale. If there isn't enough stock it raises </a:t>
+            </a:r>
+            <a:r>
+              <a:rPr lang="en-US" sz="1200" kern="1200" dirty="0" err="1">
+                <a:solidFill>
+                  <a:schemeClr val="tx1"/>
+                </a:solidFill>
+                <a:effectLst/>
+                <a:latin typeface="+mn-lt"/>
+                <a:ea typeface="+mn-ea"/>
+                <a:cs typeface="+mn-cs"/>
+              </a:rPr>
+              <a:t>OutOfStockError</a:t>
+            </a:r>
+            <a:r>
+              <a:rPr lang="en-US" dirty="0">
+                <a:effectLst/>
+              </a:rPr>
+              <a:t>.</a:t>
+            </a:r>
+          </a:p>
+          <a:p>
             <a:r>
               <a:rPr lang="en-US" sz="1200" kern="1200" dirty="0">
                 <a:solidFill>
                   <a:schemeClr val="tx1"/>
                 </a:solidFill>
+                <a:effectLst/>
                 <a:latin typeface="+mn-lt"/>
                 <a:ea typeface="+mn-ea"/>
                 <a:cs typeface="+mn-cs"/>
@@ -3210,14 +3961,93 @@
               <a:t>restock(qty)</a:t>
             </a:r>
             <a:r>
-              <a:rPr lang="en-US" dirty="0"/>
-              <a:t>, </a:t>
+              <a:rPr lang="en-US" dirty="0">
+                <a:effectLst/>
+              </a:rPr>
+              <a:t> is the opposite: validate, add to </a:t>
             </a:r>
             <a:r>
               <a:rPr lang="en-US" sz="1200" kern="1200" dirty="0" err="1">
                 <a:solidFill>
                   <a:schemeClr val="tx1"/>
                 </a:solidFill>
+                <a:effectLst/>
+                <a:latin typeface="+mn-lt"/>
+                <a:ea typeface="+mn-ea"/>
+                <a:cs typeface="+mn-cs"/>
+              </a:rPr>
+              <a:t>self.quantity</a:t>
+            </a:r>
+            <a:r>
+              <a:rPr lang="en-US" dirty="0">
+                <a:effectLst/>
+              </a:rPr>
+              <a:t>, log.</a:t>
+            </a:r>
+          </a:p>
+          <a:p>
+            <a:r>
+              <a:rPr lang="en-US" sz="1200" kern="1200" dirty="0">
+                <a:solidFill>
+                  <a:schemeClr val="tx1"/>
+                </a:solidFill>
+                <a:effectLst/>
+                <a:latin typeface="+mn-lt"/>
+                <a:ea typeface="+mn-ea"/>
+                <a:cs typeface="+mn-cs"/>
+              </a:rPr>
+              <a:t>__str__()</a:t>
+            </a:r>
+            <a:r>
+              <a:rPr lang="en-US" dirty="0">
+                <a:effectLst/>
+              </a:rPr>
+              <a:t> is what Python calls when you </a:t>
+            </a:r>
+            <a:r>
+              <a:rPr lang="en-US" sz="1200" kern="1200" dirty="0">
+                <a:solidFill>
+                  <a:schemeClr val="tx1"/>
+                </a:solidFill>
+                <a:effectLst/>
+                <a:latin typeface="+mn-lt"/>
+                <a:ea typeface="+mn-ea"/>
+                <a:cs typeface="+mn-cs"/>
+              </a:rPr>
+              <a:t>print(product)</a:t>
+            </a:r>
+            <a:r>
+              <a:rPr lang="en-US" dirty="0">
+                <a:effectLst/>
+              </a:rPr>
+              <a:t>. It returns that formatted one-liner you see in </a:t>
+            </a:r>
+            <a:r>
+              <a:rPr lang="en-US" sz="1200" kern="1200" dirty="0">
+                <a:solidFill>
+                  <a:schemeClr val="tx1"/>
+                </a:solidFill>
+                <a:effectLst/>
+                <a:latin typeface="+mn-lt"/>
+                <a:ea typeface="+mn-ea"/>
+                <a:cs typeface="+mn-cs"/>
+              </a:rPr>
+              <a:t>main.py</a:t>
+            </a:r>
+            <a:r>
+              <a:rPr lang="en-US" dirty="0">
+                <a:effectLst/>
+              </a:rPr>
+              <a:t> option 2.</a:t>
+            </a:r>
+          </a:p>
+          <a:p>
+            <a:r>
+              <a:rPr lang="en-US" sz="1200" kern="1200" dirty="0" err="1">
+                <a:solidFill>
+                  <a:schemeClr val="tx1"/>
+                </a:solidFill>
+                <a:effectLst/>
                 <a:latin typeface="+mn-lt"/>
                 <a:ea typeface="+mn-ea"/>
                 <a:cs typeface="+mn-cs"/>
@@ -3229,6 +4059,7 @@
                 <a:solidFill>
                   <a:schemeClr val="tx1"/>
                 </a:solidFill>
+                <a:effectLst/>
                 <a:latin typeface="+mn-lt"/>
                 <a:ea typeface="+mn-ea"/>
                 <a:cs typeface="+mn-cs"/>
@@ -3236,7 +4067,1330 @@
               <a:t>()</a:t>
             </a:r>
             <a:r>
-              <a:rPr lang="en-US" dirty="0"/>
+              <a:rPr lang="en-US" dirty="0">
+                <a:effectLst/>
+              </a:rPr>
+              <a:t> converts the object into a plain dictionary for saving to JSON. It tags the output with </a:t>
+            </a:r>
+            <a:r>
+              <a:rPr lang="en-US" sz="1200" kern="1200" dirty="0">
+                <a:solidFill>
+                  <a:schemeClr val="tx1"/>
+                </a:solidFill>
+                <a:effectLst/>
+                <a:latin typeface="+mn-lt"/>
+                <a:ea typeface="+mn-ea"/>
+                <a:cs typeface="+mn-cs"/>
+              </a:rPr>
+              <a:t>"type": "standard"</a:t>
+            </a:r>
+            <a:r>
+              <a:rPr lang="en-US" dirty="0">
+                <a:effectLst/>
+              </a:rPr>
+              <a:t> so the system knows what kind of product this is when loading.</a:t>
+            </a:r>
+          </a:p>
+          <a:p>
+            <a:r>
+              <a:rPr lang="en-US" sz="1200" kern="1200" dirty="0" err="1">
+                <a:solidFill>
+                  <a:schemeClr val="tx1"/>
+                </a:solidFill>
+                <a:effectLst/>
+                <a:latin typeface="+mn-lt"/>
+                <a:ea typeface="+mn-ea"/>
+                <a:cs typeface="+mn-cs"/>
+              </a:rPr>
+              <a:t>from_dict</a:t>
+            </a:r>
+            <a:r>
+              <a:rPr lang="en-US" sz="1200" kern="1200" dirty="0">
+                <a:solidFill>
+                  <a:schemeClr val="tx1"/>
+                </a:solidFill>
+                <a:effectLst/>
+                <a:latin typeface="+mn-lt"/>
+                <a:ea typeface="+mn-ea"/>
+                <a:cs typeface="+mn-cs"/>
+              </a:rPr>
+              <a:t>(data)</a:t>
+            </a:r>
+            <a:r>
+              <a:rPr lang="en-US" dirty="0">
+                <a:effectLst/>
+              </a:rPr>
+              <a:t> is a </a:t>
+            </a:r>
+            <a:r>
+              <a:rPr lang="en-US" b="1" dirty="0" err="1">
+                <a:effectLst/>
+              </a:rPr>
+              <a:t>classmethod</a:t>
+            </a:r>
+            <a:r>
+              <a:rPr lang="en-US" dirty="0">
+                <a:effectLst/>
+              </a:rPr>
+              <a:t> (notice the </a:t>
+            </a:r>
+            <a:r>
+              <a:rPr lang="en-US" sz="1200" kern="1200" dirty="0">
+                <a:solidFill>
+                  <a:schemeClr val="tx1"/>
+                </a:solidFill>
+                <a:effectLst/>
+                <a:latin typeface="+mn-lt"/>
+                <a:ea typeface="+mn-ea"/>
+                <a:cs typeface="+mn-cs"/>
+              </a:rPr>
+              <a:t>@classmethod</a:t>
+            </a:r>
+            <a:r>
+              <a:rPr lang="en-US" dirty="0">
+                <a:effectLst/>
+              </a:rPr>
+              <a:t> decorator). This is the factory method. It reads </a:t>
+            </a:r>
+            <a:r>
+              <a:rPr lang="en-US" sz="1200" kern="1200" dirty="0">
+                <a:solidFill>
+                  <a:schemeClr val="tx1"/>
+                </a:solidFill>
+                <a:effectLst/>
+                <a:latin typeface="+mn-lt"/>
+                <a:ea typeface="+mn-ea"/>
+                <a:cs typeface="+mn-cs"/>
+              </a:rPr>
+              <a:t>data["type"]</a:t>
+            </a:r>
+            <a:r>
+              <a:rPr lang="en-US" dirty="0">
+                <a:effectLst/>
+              </a:rPr>
+              <a:t> and returns the right kind of product: a </a:t>
+            </a:r>
+            <a:r>
+              <a:rPr lang="en-US" sz="1200" kern="1200" dirty="0" err="1">
+                <a:solidFill>
+                  <a:schemeClr val="tx1"/>
+                </a:solidFill>
+                <a:effectLst/>
+                <a:latin typeface="+mn-lt"/>
+                <a:ea typeface="+mn-ea"/>
+                <a:cs typeface="+mn-cs"/>
+              </a:rPr>
+              <a:t>PerishableProduct</a:t>
+            </a:r>
+            <a:r>
+              <a:rPr lang="en-US" dirty="0">
+                <a:effectLst/>
+              </a:rPr>
+              <a:t>, a </a:t>
+            </a:r>
+            <a:r>
+              <a:rPr lang="en-US" sz="1200" kern="1200" dirty="0" err="1">
+                <a:solidFill>
+                  <a:schemeClr val="tx1"/>
+                </a:solidFill>
+                <a:effectLst/>
+                <a:latin typeface="+mn-lt"/>
+                <a:ea typeface="+mn-ea"/>
+                <a:cs typeface="+mn-cs"/>
+              </a:rPr>
+              <a:t>DigitalProduct</a:t>
+            </a:r>
+            <a:r>
+              <a:rPr lang="en-US" dirty="0">
+                <a:effectLst/>
+              </a:rPr>
+              <a:t>, or a plain </a:t>
+            </a:r>
+            <a:r>
+              <a:rPr lang="en-US" sz="1200" kern="1200" dirty="0">
+                <a:solidFill>
+                  <a:schemeClr val="tx1"/>
+                </a:solidFill>
+                <a:effectLst/>
+                <a:latin typeface="+mn-lt"/>
+                <a:ea typeface="+mn-ea"/>
+                <a:cs typeface="+mn-cs"/>
+              </a:rPr>
+              <a:t>Product</a:t>
+            </a:r>
+            <a:r>
+              <a:rPr lang="en-US" dirty="0">
+                <a:effectLst/>
+              </a:rPr>
+              <a:t>. This is the bit that makes loading from JSON work properly.</a:t>
+            </a:r>
+          </a:p>
+          <a:p>
+            <a:r>
+              <a:rPr lang="en-US" b="1" dirty="0" err="1">
+                <a:effectLst/>
+              </a:rPr>
+              <a:t>PerishableProduct</a:t>
+            </a:r>
+            <a:r>
+              <a:rPr lang="en-US" b="1" dirty="0">
+                <a:effectLst/>
+              </a:rPr>
+              <a:t> (inherits from Product)</a:t>
+            </a:r>
+          </a:p>
+          <a:p>
+            <a:r>
+              <a:rPr lang="en-US" dirty="0">
+                <a:effectLst/>
+              </a:rPr>
+              <a:t>Same as </a:t>
+            </a:r>
+            <a:r>
+              <a:rPr lang="en-US" sz="1200" kern="1200" dirty="0">
+                <a:solidFill>
+                  <a:schemeClr val="tx1"/>
+                </a:solidFill>
+                <a:effectLst/>
+                <a:latin typeface="+mn-lt"/>
+                <a:ea typeface="+mn-ea"/>
+                <a:cs typeface="+mn-cs"/>
+              </a:rPr>
+              <a:t>Product</a:t>
+            </a:r>
+            <a:r>
+              <a:rPr lang="en-US" dirty="0">
+                <a:effectLst/>
+              </a:rPr>
+              <a:t> but for things that go off, like milk or bread.</a:t>
+            </a:r>
+          </a:p>
+          <a:p>
+            <a:r>
+              <a:rPr lang="en-US" b="1" dirty="0">
+                <a:effectLst/>
+              </a:rPr>
+              <a:t>How the link works:</a:t>
+            </a:r>
+            <a:r>
+              <a:rPr lang="en-US" dirty="0">
+                <a:effectLst/>
+              </a:rPr>
+              <a:t> The line </a:t>
+            </a:r>
+            <a:r>
+              <a:rPr lang="en-US" sz="1200" kern="1200" dirty="0">
+                <a:solidFill>
+                  <a:schemeClr val="tx1"/>
+                </a:solidFill>
+                <a:effectLst/>
+                <a:latin typeface="+mn-lt"/>
+                <a:ea typeface="+mn-ea"/>
+                <a:cs typeface="+mn-cs"/>
+              </a:rPr>
+              <a:t>class </a:t>
+            </a:r>
+            <a:r>
+              <a:rPr lang="en-US" sz="1200" kern="1200" dirty="0" err="1">
+                <a:solidFill>
+                  <a:schemeClr val="tx1"/>
+                </a:solidFill>
+                <a:effectLst/>
+                <a:latin typeface="+mn-lt"/>
+                <a:ea typeface="+mn-ea"/>
+                <a:cs typeface="+mn-cs"/>
+              </a:rPr>
+              <a:t>PerishableProduct</a:t>
+            </a:r>
+            <a:r>
+              <a:rPr lang="en-US" sz="1200" kern="1200" dirty="0">
+                <a:solidFill>
+                  <a:schemeClr val="tx1"/>
+                </a:solidFill>
+                <a:effectLst/>
+                <a:latin typeface="+mn-lt"/>
+                <a:ea typeface="+mn-ea"/>
+                <a:cs typeface="+mn-cs"/>
+              </a:rPr>
+              <a:t>(Product):</a:t>
+            </a:r>
+            <a:r>
+              <a:rPr lang="en-US" dirty="0">
+                <a:effectLst/>
+              </a:rPr>
+              <a:t> tells Python that this class </a:t>
+            </a:r>
+            <a:r>
+              <a:rPr lang="en-US" b="1" dirty="0">
+                <a:effectLst/>
+              </a:rPr>
+              <a:t>is a</a:t>
+            </a:r>
+            <a:r>
+              <a:rPr lang="en-US" dirty="0">
+                <a:effectLst/>
+              </a:rPr>
+              <a:t> </a:t>
+            </a:r>
+            <a:r>
+              <a:rPr lang="en-US" sz="1200" kern="1200" dirty="0">
+                <a:solidFill>
+                  <a:schemeClr val="tx1"/>
+                </a:solidFill>
+                <a:effectLst/>
+                <a:latin typeface="+mn-lt"/>
+                <a:ea typeface="+mn-ea"/>
+                <a:cs typeface="+mn-cs"/>
+              </a:rPr>
+              <a:t>Product</a:t>
+            </a:r>
+            <a:r>
+              <a:rPr lang="en-US" dirty="0">
+                <a:effectLst/>
+              </a:rPr>
+              <a:t>. The word </a:t>
+            </a:r>
+            <a:r>
+              <a:rPr lang="en-US" sz="1200" kern="1200" dirty="0">
+                <a:solidFill>
+                  <a:schemeClr val="tx1"/>
+                </a:solidFill>
+                <a:effectLst/>
+                <a:latin typeface="+mn-lt"/>
+                <a:ea typeface="+mn-ea"/>
+                <a:cs typeface="+mn-cs"/>
+              </a:rPr>
+              <a:t>super()</a:t>
+            </a:r>
+            <a:r>
+              <a:rPr lang="en-US" dirty="0">
+                <a:effectLst/>
+              </a:rPr>
+              <a:t> in the code means "the parent class." So </a:t>
+            </a:r>
+            <a:r>
+              <a:rPr lang="en-US" sz="1200" kern="1200" dirty="0">
+                <a:solidFill>
+                  <a:schemeClr val="tx1"/>
+                </a:solidFill>
+                <a:effectLst/>
+                <a:latin typeface="+mn-lt"/>
+                <a:ea typeface="+mn-ea"/>
+                <a:cs typeface="+mn-cs"/>
+              </a:rPr>
+              <a:t>super().__</a:t>
+            </a:r>
+            <a:r>
+              <a:rPr lang="en-US" sz="1200" kern="1200" dirty="0" err="1">
+                <a:solidFill>
+                  <a:schemeClr val="tx1"/>
+                </a:solidFill>
+                <a:effectLst/>
+                <a:latin typeface="+mn-lt"/>
+                <a:ea typeface="+mn-ea"/>
+                <a:cs typeface="+mn-cs"/>
+              </a:rPr>
+              <a:t>init</a:t>
+            </a:r>
+            <a:r>
+              <a:rPr lang="en-US" sz="1200" kern="1200" dirty="0">
+                <a:solidFill>
+                  <a:schemeClr val="tx1"/>
+                </a:solidFill>
+                <a:effectLst/>
+                <a:latin typeface="+mn-lt"/>
+                <a:ea typeface="+mn-ea"/>
+                <a:cs typeface="+mn-cs"/>
+              </a:rPr>
+              <a:t>__(</a:t>
+            </a:r>
+            <a:r>
+              <a:rPr lang="en-US" sz="1200" kern="1200" dirty="0" err="1">
+                <a:solidFill>
+                  <a:schemeClr val="tx1"/>
+                </a:solidFill>
+                <a:effectLst/>
+                <a:latin typeface="+mn-lt"/>
+                <a:ea typeface="+mn-ea"/>
+                <a:cs typeface="+mn-cs"/>
+              </a:rPr>
+              <a:t>product_id</a:t>
+            </a:r>
+            <a:r>
+              <a:rPr lang="en-US" sz="1200" kern="1200" dirty="0">
+                <a:solidFill>
+                  <a:schemeClr val="tx1"/>
+                </a:solidFill>
+                <a:effectLst/>
+                <a:latin typeface="+mn-lt"/>
+                <a:ea typeface="+mn-ea"/>
+                <a:cs typeface="+mn-cs"/>
+              </a:rPr>
+              <a:t>, name, price, quantity, category)</a:t>
+            </a:r>
+            <a:r>
+              <a:rPr lang="en-US" dirty="0">
+                <a:effectLst/>
+              </a:rPr>
+              <a:t> runs </a:t>
+            </a:r>
+            <a:r>
+              <a:rPr lang="en-US" sz="1200" kern="1200" dirty="0">
+                <a:solidFill>
+                  <a:schemeClr val="tx1"/>
+                </a:solidFill>
+                <a:effectLst/>
+                <a:latin typeface="+mn-lt"/>
+                <a:ea typeface="+mn-ea"/>
+                <a:cs typeface="+mn-cs"/>
+              </a:rPr>
+              <a:t>Product</a:t>
+            </a:r>
+            <a:r>
+              <a:rPr lang="en-US" dirty="0">
+                <a:effectLst/>
+              </a:rPr>
+              <a:t>'s own </a:t>
+            </a:r>
+            <a:r>
+              <a:rPr lang="en-US" sz="1200" kern="1200" dirty="0">
+                <a:solidFill>
+                  <a:schemeClr val="tx1"/>
+                </a:solidFill>
+                <a:effectLst/>
+                <a:latin typeface="+mn-lt"/>
+                <a:ea typeface="+mn-ea"/>
+                <a:cs typeface="+mn-cs"/>
+              </a:rPr>
+              <a:t>__</a:t>
+            </a:r>
+            <a:r>
+              <a:rPr lang="en-US" sz="1200" kern="1200" dirty="0" err="1">
+                <a:solidFill>
+                  <a:schemeClr val="tx1"/>
+                </a:solidFill>
+                <a:effectLst/>
+                <a:latin typeface="+mn-lt"/>
+                <a:ea typeface="+mn-ea"/>
+                <a:cs typeface="+mn-cs"/>
+              </a:rPr>
+              <a:t>init</a:t>
+            </a:r>
+            <a:r>
+              <a:rPr lang="en-US" sz="1200" kern="1200" dirty="0">
+                <a:solidFill>
+                  <a:schemeClr val="tx1"/>
+                </a:solidFill>
+                <a:effectLst/>
+                <a:latin typeface="+mn-lt"/>
+                <a:ea typeface="+mn-ea"/>
+                <a:cs typeface="+mn-cs"/>
+              </a:rPr>
+              <a:t>__</a:t>
+            </a:r>
+            <a:r>
+              <a:rPr lang="en-US" dirty="0">
+                <a:effectLst/>
+              </a:rPr>
+              <a:t> first to set up and validate the five standard fields. Then the subclass adds its own extra work: validating the </a:t>
+            </a:r>
+            <a:r>
+              <a:rPr lang="en-US" sz="1200" kern="1200" dirty="0" err="1">
+                <a:solidFill>
+                  <a:schemeClr val="tx1"/>
+                </a:solidFill>
+                <a:effectLst/>
+                <a:latin typeface="+mn-lt"/>
+                <a:ea typeface="+mn-ea"/>
+                <a:cs typeface="+mn-cs"/>
+              </a:rPr>
+              <a:t>expiry_date</a:t>
+            </a:r>
+            <a:r>
+              <a:rPr lang="en-US" dirty="0">
+                <a:effectLst/>
+              </a:rPr>
+              <a:t> format and storing it.</a:t>
+            </a:r>
+          </a:p>
+          <a:p>
+            <a:r>
+              <a:rPr lang="en-US" b="1" dirty="0">
+                <a:effectLst/>
+              </a:rPr>
+              <a:t>New attribute:</a:t>
+            </a:r>
+            <a:r>
+              <a:rPr lang="en-US" dirty="0">
+                <a:effectLst/>
+              </a:rPr>
+              <a:t> </a:t>
+            </a:r>
+            <a:r>
+              <a:rPr lang="en-US" sz="1200" kern="1200" dirty="0" err="1">
+                <a:solidFill>
+                  <a:schemeClr val="tx1"/>
+                </a:solidFill>
+                <a:effectLst/>
+                <a:latin typeface="+mn-lt"/>
+                <a:ea typeface="+mn-ea"/>
+                <a:cs typeface="+mn-cs"/>
+              </a:rPr>
+              <a:t>expiry_date</a:t>
+            </a:r>
+            <a:r>
+              <a:rPr lang="en-US" dirty="0">
+                <a:effectLst/>
+              </a:rPr>
+              <a:t> as a string like </a:t>
+            </a:r>
+            <a:r>
+              <a:rPr lang="en-US" sz="1200" kern="1200" dirty="0">
+                <a:solidFill>
+                  <a:schemeClr val="tx1"/>
+                </a:solidFill>
+                <a:effectLst/>
+                <a:latin typeface="+mn-lt"/>
+                <a:ea typeface="+mn-ea"/>
+                <a:cs typeface="+mn-cs"/>
+              </a:rPr>
+              <a:t>"2026-05-15"</a:t>
+            </a:r>
+            <a:r>
+              <a:rPr lang="en-US" dirty="0">
+                <a:effectLst/>
+              </a:rPr>
+              <a:t>.</a:t>
+            </a:r>
+          </a:p>
+          <a:p>
+            <a:r>
+              <a:rPr lang="en-US" b="1" dirty="0">
+                <a:effectLst/>
+              </a:rPr>
+              <a:t>New and changed methods:</a:t>
+            </a:r>
+            <a:endParaRPr lang="en-US" dirty="0">
+              <a:effectLst/>
+            </a:endParaRPr>
+          </a:p>
+          <a:p>
+            <a:r>
+              <a:rPr lang="en-US" sz="1200" kern="1200" dirty="0" err="1">
+                <a:solidFill>
+                  <a:schemeClr val="tx1"/>
+                </a:solidFill>
+                <a:effectLst/>
+                <a:latin typeface="+mn-lt"/>
+                <a:ea typeface="+mn-ea"/>
+                <a:cs typeface="+mn-cs"/>
+              </a:rPr>
+              <a:t>is_expired</a:t>
+            </a:r>
+            <a:r>
+              <a:rPr lang="en-US" sz="1200" kern="1200" dirty="0">
+                <a:solidFill>
+                  <a:schemeClr val="tx1"/>
+                </a:solidFill>
+                <a:effectLst/>
+                <a:latin typeface="+mn-lt"/>
+                <a:ea typeface="+mn-ea"/>
+                <a:cs typeface="+mn-cs"/>
+              </a:rPr>
+              <a:t>()</a:t>
+            </a:r>
+            <a:r>
+              <a:rPr lang="en-US" dirty="0">
+                <a:effectLst/>
+              </a:rPr>
+              <a:t> compares the expiry date to today's date and returns </a:t>
+            </a:r>
+            <a:r>
+              <a:rPr lang="en-US" sz="1200" kern="1200" dirty="0">
+                <a:solidFill>
+                  <a:schemeClr val="tx1"/>
+                </a:solidFill>
+                <a:effectLst/>
+                <a:latin typeface="+mn-lt"/>
+                <a:ea typeface="+mn-ea"/>
+                <a:cs typeface="+mn-cs"/>
+              </a:rPr>
+              <a:t>True</a:t>
+            </a:r>
+            <a:r>
+              <a:rPr lang="en-US" dirty="0">
+                <a:effectLst/>
+              </a:rPr>
+              <a:t> if it's past.</a:t>
+            </a:r>
+          </a:p>
+          <a:p>
+            <a:r>
+              <a:rPr lang="en-US" sz="1200" kern="1200" dirty="0">
+                <a:solidFill>
+                  <a:schemeClr val="tx1"/>
+                </a:solidFill>
+                <a:effectLst/>
+                <a:latin typeface="+mn-lt"/>
+                <a:ea typeface="+mn-ea"/>
+                <a:cs typeface="+mn-cs"/>
+              </a:rPr>
+              <a:t>sell(qty)</a:t>
+            </a:r>
+            <a:r>
+              <a:rPr lang="en-US" dirty="0">
+                <a:effectLst/>
+              </a:rPr>
+              <a:t> </a:t>
+            </a:r>
+            <a:r>
+              <a:rPr lang="en-US" b="1" dirty="0">
+                <a:effectLst/>
+              </a:rPr>
+              <a:t>overrides</a:t>
+            </a:r>
+            <a:r>
+              <a:rPr lang="en-US" dirty="0">
+                <a:effectLst/>
+              </a:rPr>
+              <a:t> the parent's </a:t>
+            </a:r>
+            <a:r>
+              <a:rPr lang="en-US" sz="1200" kern="1200" dirty="0">
+                <a:solidFill>
+                  <a:schemeClr val="tx1"/>
+                </a:solidFill>
+                <a:effectLst/>
+                <a:latin typeface="+mn-lt"/>
+                <a:ea typeface="+mn-ea"/>
+                <a:cs typeface="+mn-cs"/>
+              </a:rPr>
+              <a:t>sell()</a:t>
+            </a:r>
+            <a:r>
+              <a:rPr lang="en-US" dirty="0">
+                <a:effectLst/>
+              </a:rPr>
+              <a:t>. It first checks </a:t>
+            </a:r>
+            <a:r>
+              <a:rPr lang="en-US" sz="1200" kern="1200" dirty="0" err="1">
+                <a:solidFill>
+                  <a:schemeClr val="tx1"/>
+                </a:solidFill>
+                <a:effectLst/>
+                <a:latin typeface="+mn-lt"/>
+                <a:ea typeface="+mn-ea"/>
+                <a:cs typeface="+mn-cs"/>
+              </a:rPr>
+              <a:t>is_expired</a:t>
+            </a:r>
+            <a:r>
+              <a:rPr lang="en-US" sz="1200" kern="1200" dirty="0">
+                <a:solidFill>
+                  <a:schemeClr val="tx1"/>
+                </a:solidFill>
+                <a:effectLst/>
+                <a:latin typeface="+mn-lt"/>
+                <a:ea typeface="+mn-ea"/>
+                <a:cs typeface="+mn-cs"/>
+              </a:rPr>
+              <a:t>()</a:t>
+            </a:r>
+            <a:r>
+              <a:rPr lang="en-US" dirty="0">
+                <a:effectLst/>
+              </a:rPr>
+              <a:t>. If the item has gone off, it raises </a:t>
+            </a:r>
+            <a:r>
+              <a:rPr lang="en-US" sz="1200" kern="1200" dirty="0" err="1">
+                <a:solidFill>
+                  <a:schemeClr val="tx1"/>
+                </a:solidFill>
+                <a:effectLst/>
+                <a:latin typeface="+mn-lt"/>
+                <a:ea typeface="+mn-ea"/>
+                <a:cs typeface="+mn-cs"/>
+              </a:rPr>
+              <a:t>OutOfStockError</a:t>
+            </a:r>
+            <a:r>
+              <a:rPr lang="en-US" dirty="0">
+                <a:effectLst/>
+              </a:rPr>
+              <a:t>. Otherwise it calls </a:t>
+            </a:r>
+            <a:r>
+              <a:rPr lang="en-US" sz="1200" kern="1200" dirty="0">
+                <a:solidFill>
+                  <a:schemeClr val="tx1"/>
+                </a:solidFill>
+                <a:effectLst/>
+                <a:latin typeface="+mn-lt"/>
+                <a:ea typeface="+mn-ea"/>
+                <a:cs typeface="+mn-cs"/>
+              </a:rPr>
+              <a:t>super().sell(qty)</a:t>
+            </a:r>
+            <a:r>
+              <a:rPr lang="en-US" dirty="0">
+                <a:effectLst/>
+              </a:rPr>
+              <a:t>, which runs the parent's normal sell logic. This is a nice clean use of inheritance: you're not rewriting the stock-checking code, just adding an extra check on top.</a:t>
+            </a:r>
+          </a:p>
+          <a:p>
+            <a:r>
+              <a:rPr lang="en-US" sz="1200" kern="1200" dirty="0" err="1">
+                <a:solidFill>
+                  <a:schemeClr val="tx1"/>
+                </a:solidFill>
+                <a:effectLst/>
+                <a:latin typeface="+mn-lt"/>
+                <a:ea typeface="+mn-ea"/>
+                <a:cs typeface="+mn-cs"/>
+              </a:rPr>
+              <a:t>to_dict</a:t>
+            </a:r>
+            <a:r>
+              <a:rPr lang="en-US" sz="1200" kern="1200" dirty="0">
+                <a:solidFill>
+                  <a:schemeClr val="tx1"/>
+                </a:solidFill>
+                <a:effectLst/>
+                <a:latin typeface="+mn-lt"/>
+                <a:ea typeface="+mn-ea"/>
+                <a:cs typeface="+mn-cs"/>
+              </a:rPr>
+              <a:t>()</a:t>
+            </a:r>
+            <a:r>
+              <a:rPr lang="en-US" dirty="0">
+                <a:effectLst/>
+              </a:rPr>
+              <a:t> calls the parent's </a:t>
+            </a:r>
+            <a:r>
+              <a:rPr lang="en-US" sz="1200" kern="1200" dirty="0" err="1">
+                <a:solidFill>
+                  <a:schemeClr val="tx1"/>
+                </a:solidFill>
+                <a:effectLst/>
+                <a:latin typeface="+mn-lt"/>
+                <a:ea typeface="+mn-ea"/>
+                <a:cs typeface="+mn-cs"/>
+              </a:rPr>
+              <a:t>to_dict</a:t>
+            </a:r>
+            <a:r>
+              <a:rPr lang="en-US" sz="1200" kern="1200" dirty="0">
+                <a:solidFill>
+                  <a:schemeClr val="tx1"/>
+                </a:solidFill>
+                <a:effectLst/>
+                <a:latin typeface="+mn-lt"/>
+                <a:ea typeface="+mn-ea"/>
+                <a:cs typeface="+mn-cs"/>
+              </a:rPr>
+              <a:t>()</a:t>
+            </a:r>
+            <a:r>
+              <a:rPr lang="en-US" dirty="0">
+                <a:effectLst/>
+              </a:rPr>
+              <a:t> first (to get the standard fields), then adds </a:t>
+            </a:r>
+            <a:r>
+              <a:rPr lang="en-US" sz="1200" kern="1200" dirty="0" err="1">
+                <a:solidFill>
+                  <a:schemeClr val="tx1"/>
+                </a:solidFill>
+                <a:effectLst/>
+                <a:latin typeface="+mn-lt"/>
+                <a:ea typeface="+mn-ea"/>
+                <a:cs typeface="+mn-cs"/>
+              </a:rPr>
+              <a:t>expiry_date</a:t>
+            </a:r>
+            <a:r>
+              <a:rPr lang="en-US" dirty="0">
+                <a:effectLst/>
+              </a:rPr>
+              <a:t> and changes </a:t>
+            </a:r>
+            <a:r>
+              <a:rPr lang="en-US" sz="1200" kern="1200" dirty="0">
+                <a:solidFill>
+                  <a:schemeClr val="tx1"/>
+                </a:solidFill>
+                <a:effectLst/>
+                <a:latin typeface="+mn-lt"/>
+                <a:ea typeface="+mn-ea"/>
+                <a:cs typeface="+mn-cs"/>
+              </a:rPr>
+              <a:t>"type"</a:t>
+            </a:r>
+            <a:r>
+              <a:rPr lang="en-US" dirty="0">
+                <a:effectLst/>
+              </a:rPr>
+              <a:t> to </a:t>
+            </a:r>
+            <a:r>
+              <a:rPr lang="en-US" sz="1200" kern="1200" dirty="0">
+                <a:solidFill>
+                  <a:schemeClr val="tx1"/>
+                </a:solidFill>
+                <a:effectLst/>
+                <a:latin typeface="+mn-lt"/>
+                <a:ea typeface="+mn-ea"/>
+                <a:cs typeface="+mn-cs"/>
+              </a:rPr>
+              <a:t>"perishable"</a:t>
+            </a:r>
+            <a:r>
+              <a:rPr lang="en-US" dirty="0">
+                <a:effectLst/>
+              </a:rPr>
+              <a:t>.</a:t>
+            </a:r>
+          </a:p>
+          <a:p>
+            <a:r>
+              <a:rPr lang="en-US" b="1" dirty="0" err="1">
+                <a:effectLst/>
+              </a:rPr>
+              <a:t>DigitalProduct</a:t>
+            </a:r>
+            <a:r>
+              <a:rPr lang="en-US" b="1" dirty="0">
+                <a:effectLst/>
+              </a:rPr>
+              <a:t> (inherits from Product)</a:t>
+            </a:r>
+          </a:p>
+          <a:p>
+            <a:r>
+              <a:rPr lang="en-US" dirty="0">
+                <a:effectLst/>
+              </a:rPr>
+              <a:t>For things you download, like an </a:t>
+            </a:r>
+            <a:r>
+              <a:rPr lang="en-US" dirty="0" err="1">
+                <a:effectLst/>
+              </a:rPr>
+              <a:t>ebook</a:t>
+            </a:r>
+            <a:r>
+              <a:rPr lang="en-US" dirty="0">
+                <a:effectLst/>
+              </a:rPr>
+              <a:t> or software. The quirky thing is there's no real stock to track, since you can sell infinite copies of a file.</a:t>
+            </a:r>
+          </a:p>
+          <a:p>
+            <a:r>
+              <a:rPr lang="en-US" b="1" dirty="0">
+                <a:effectLst/>
+              </a:rPr>
+              <a:t>New attributes:</a:t>
+            </a:r>
+            <a:r>
+              <a:rPr lang="en-US" dirty="0">
+                <a:effectLst/>
+              </a:rPr>
+              <a:t> </a:t>
+            </a:r>
+            <a:r>
+              <a:rPr lang="en-US" sz="1200" kern="1200" dirty="0" err="1">
+                <a:solidFill>
+                  <a:schemeClr val="tx1"/>
+                </a:solidFill>
+                <a:effectLst/>
+                <a:latin typeface="+mn-lt"/>
+                <a:ea typeface="+mn-ea"/>
+                <a:cs typeface="+mn-cs"/>
+              </a:rPr>
+              <a:t>download_link</a:t>
+            </a:r>
+            <a:r>
+              <a:rPr lang="en-US" dirty="0">
+                <a:effectLst/>
+              </a:rPr>
+              <a:t> as a string. Also, </a:t>
+            </a:r>
+            <a:r>
+              <a:rPr lang="en-US" sz="1200" kern="1200" dirty="0">
+                <a:solidFill>
+                  <a:schemeClr val="tx1"/>
+                </a:solidFill>
+                <a:effectLst/>
+                <a:latin typeface="+mn-lt"/>
+                <a:ea typeface="+mn-ea"/>
+                <a:cs typeface="+mn-cs"/>
+              </a:rPr>
+              <a:t>quantity</a:t>
+            </a:r>
+            <a:r>
+              <a:rPr lang="en-US" dirty="0">
+                <a:effectLst/>
+              </a:rPr>
+              <a:t> is always set to 0 (you can see </a:t>
+            </a:r>
+            <a:r>
+              <a:rPr lang="en-US" sz="1200" kern="1200" dirty="0">
+                <a:solidFill>
+                  <a:schemeClr val="tx1"/>
+                </a:solidFill>
+                <a:effectLst/>
+                <a:latin typeface="+mn-lt"/>
+                <a:ea typeface="+mn-ea"/>
+                <a:cs typeface="+mn-cs"/>
+              </a:rPr>
+              <a:t>super().__</a:t>
+            </a:r>
+            <a:r>
+              <a:rPr lang="en-US" sz="1200" kern="1200" dirty="0" err="1">
+                <a:solidFill>
+                  <a:schemeClr val="tx1"/>
+                </a:solidFill>
+                <a:effectLst/>
+                <a:latin typeface="+mn-lt"/>
+                <a:ea typeface="+mn-ea"/>
+                <a:cs typeface="+mn-cs"/>
+              </a:rPr>
+              <a:t>init</a:t>
+            </a:r>
+            <a:r>
+              <a:rPr lang="en-US" sz="1200" kern="1200" dirty="0">
+                <a:solidFill>
+                  <a:schemeClr val="tx1"/>
+                </a:solidFill>
+                <a:effectLst/>
+                <a:latin typeface="+mn-lt"/>
+                <a:ea typeface="+mn-ea"/>
+                <a:cs typeface="+mn-cs"/>
+              </a:rPr>
+              <a:t>__(</a:t>
+            </a:r>
+            <a:r>
+              <a:rPr lang="en-US" sz="1200" kern="1200" dirty="0" err="1">
+                <a:solidFill>
+                  <a:schemeClr val="tx1"/>
+                </a:solidFill>
+                <a:effectLst/>
+                <a:latin typeface="+mn-lt"/>
+                <a:ea typeface="+mn-ea"/>
+                <a:cs typeface="+mn-cs"/>
+              </a:rPr>
+              <a:t>product_id</a:t>
+            </a:r>
+            <a:r>
+              <a:rPr lang="en-US" sz="1200" kern="1200" dirty="0">
+                <a:solidFill>
+                  <a:schemeClr val="tx1"/>
+                </a:solidFill>
+                <a:effectLst/>
+                <a:latin typeface="+mn-lt"/>
+                <a:ea typeface="+mn-ea"/>
+                <a:cs typeface="+mn-cs"/>
+              </a:rPr>
+              <a:t>, name, price, 0, category)</a:t>
+            </a:r>
+            <a:r>
+              <a:rPr lang="en-US" dirty="0">
+                <a:effectLst/>
+              </a:rPr>
+              <a:t> hardcodes it).</a:t>
+            </a:r>
+          </a:p>
+          <a:p>
+            <a:r>
+              <a:rPr lang="en-US" b="1" dirty="0">
+                <a:effectLst/>
+              </a:rPr>
+              <a:t>Changed methods:</a:t>
+            </a:r>
+            <a:endParaRPr lang="en-US" dirty="0">
+              <a:effectLst/>
+            </a:endParaRPr>
+          </a:p>
+          <a:p>
+            <a:r>
+              <a:rPr lang="en-US" sz="1200" kern="1200" dirty="0">
+                <a:solidFill>
+                  <a:schemeClr val="tx1"/>
+                </a:solidFill>
+                <a:effectLst/>
+                <a:latin typeface="+mn-lt"/>
+                <a:ea typeface="+mn-ea"/>
+                <a:cs typeface="+mn-cs"/>
+              </a:rPr>
+              <a:t>sell(qty=1)</a:t>
+            </a:r>
+            <a:r>
+              <a:rPr lang="en-US" dirty="0">
+                <a:effectLst/>
+              </a:rPr>
+              <a:t> overrides the parent's sell. The </a:t>
+            </a:r>
+            <a:r>
+              <a:rPr lang="en-US" sz="1200" kern="1200" dirty="0">
+                <a:solidFill>
+                  <a:schemeClr val="tx1"/>
+                </a:solidFill>
+                <a:effectLst/>
+                <a:latin typeface="+mn-lt"/>
+                <a:ea typeface="+mn-ea"/>
+                <a:cs typeface="+mn-cs"/>
+              </a:rPr>
+              <a:t>qty=1</a:t>
+            </a:r>
+            <a:r>
+              <a:rPr lang="en-US" dirty="0">
+                <a:effectLst/>
+              </a:rPr>
+              <a:t> means "if nobody tells me how many, assume one." It validates the quantity, logs the sale, and </a:t>
+            </a:r>
+            <a:r>
+              <a:rPr lang="en-US" b="1" dirty="0">
+                <a:effectLst/>
+              </a:rPr>
+              <a:t>returns the download link</a:t>
+            </a:r>
+            <a:r>
+              <a:rPr lang="en-US" dirty="0">
+                <a:effectLst/>
+              </a:rPr>
+              <a:t>. It does </a:t>
+            </a:r>
+            <a:r>
+              <a:rPr lang="en-US" b="1" dirty="0">
+                <a:effectLst/>
+              </a:rPr>
+              <a:t>not</a:t>
+            </a:r>
+            <a:r>
+              <a:rPr lang="en-US" dirty="0">
+                <a:effectLst/>
+              </a:rPr>
+              <a:t> subtract from stock. This is why digital products are treated specially in </a:t>
+            </a:r>
+            <a:r>
+              <a:rPr lang="en-US" sz="1200" kern="1200" dirty="0" err="1">
+                <a:solidFill>
+                  <a:schemeClr val="tx1"/>
+                </a:solidFill>
+                <a:effectLst/>
+                <a:latin typeface="+mn-lt"/>
+                <a:ea typeface="+mn-ea"/>
+                <a:cs typeface="+mn-cs"/>
+              </a:rPr>
+              <a:t>Inventory.sell_product</a:t>
+            </a:r>
+            <a:r>
+              <a:rPr lang="en-US" sz="1200" kern="1200" dirty="0">
+                <a:solidFill>
+                  <a:schemeClr val="tx1"/>
+                </a:solidFill>
+                <a:effectLst/>
+                <a:latin typeface="+mn-lt"/>
+                <a:ea typeface="+mn-ea"/>
+                <a:cs typeface="+mn-cs"/>
+              </a:rPr>
+              <a:t>()</a:t>
+            </a:r>
+            <a:r>
+              <a:rPr lang="en-US" dirty="0">
+                <a:effectLst/>
+              </a:rPr>
+              <a:t>, which skips the low-stock warning for them.</a:t>
+            </a:r>
+          </a:p>
+          <a:p>
+            <a:r>
+              <a:rPr lang="en-US" sz="1200" kern="1200" dirty="0" err="1">
+                <a:solidFill>
+                  <a:schemeClr val="tx1"/>
+                </a:solidFill>
+                <a:effectLst/>
+                <a:latin typeface="+mn-lt"/>
+                <a:ea typeface="+mn-ea"/>
+                <a:cs typeface="+mn-cs"/>
+              </a:rPr>
+              <a:t>get_download_link</a:t>
+            </a:r>
+            <a:r>
+              <a:rPr lang="en-US" sz="1200" kern="1200" dirty="0">
+                <a:solidFill>
+                  <a:schemeClr val="tx1"/>
+                </a:solidFill>
+                <a:effectLst/>
+                <a:latin typeface="+mn-lt"/>
+                <a:ea typeface="+mn-ea"/>
+                <a:cs typeface="+mn-cs"/>
+              </a:rPr>
+              <a:t>()</a:t>
+            </a:r>
+            <a:r>
+              <a:rPr lang="en-US" dirty="0">
+                <a:effectLst/>
+              </a:rPr>
+              <a:t> is a simple getter.</a:t>
+            </a:r>
+          </a:p>
+          <a:p>
+            <a:r>
+              <a:rPr lang="en-US" sz="1200" kern="1200" dirty="0" err="1">
+                <a:solidFill>
+                  <a:schemeClr val="tx1"/>
+                </a:solidFill>
+                <a:effectLst/>
+                <a:latin typeface="+mn-lt"/>
+                <a:ea typeface="+mn-ea"/>
+                <a:cs typeface="+mn-cs"/>
+              </a:rPr>
+              <a:t>to_dict</a:t>
+            </a:r>
+            <a:r>
+              <a:rPr lang="en-US" sz="1200" kern="1200" dirty="0">
+                <a:solidFill>
+                  <a:schemeClr val="tx1"/>
+                </a:solidFill>
+                <a:effectLst/>
+                <a:latin typeface="+mn-lt"/>
+                <a:ea typeface="+mn-ea"/>
+                <a:cs typeface="+mn-cs"/>
+              </a:rPr>
+              <a:t>()</a:t>
+            </a:r>
+            <a:r>
+              <a:rPr lang="en-US" dirty="0">
+                <a:effectLst/>
+              </a:rPr>
+              <a:t> adds </a:t>
+            </a:r>
+            <a:r>
+              <a:rPr lang="en-US" sz="1200" kern="1200" dirty="0" err="1">
+                <a:solidFill>
+                  <a:schemeClr val="tx1"/>
+                </a:solidFill>
+                <a:effectLst/>
+                <a:latin typeface="+mn-lt"/>
+                <a:ea typeface="+mn-ea"/>
+                <a:cs typeface="+mn-cs"/>
+              </a:rPr>
+              <a:t>download_link</a:t>
+            </a:r>
+            <a:r>
+              <a:rPr lang="en-US" dirty="0">
+                <a:effectLst/>
+              </a:rPr>
+              <a:t> and sets </a:t>
+            </a:r>
+            <a:r>
+              <a:rPr lang="en-US" sz="1200" kern="1200" dirty="0">
+                <a:solidFill>
+                  <a:schemeClr val="tx1"/>
+                </a:solidFill>
+                <a:effectLst/>
+                <a:latin typeface="+mn-lt"/>
+                <a:ea typeface="+mn-ea"/>
+                <a:cs typeface="+mn-cs"/>
+              </a:rPr>
+              <a:t>"type": "digital"</a:t>
+            </a:r>
+            <a:r>
+              <a:rPr lang="en-US" dirty="0">
+                <a:effectLst/>
+              </a:rPr>
+              <a:t>.</a:t>
+            </a:r>
+          </a:p>
+          <a:p>
+            <a:br>
+              <a:rPr lang="en-US" b="1" dirty="0">
+                <a:effectLst/>
+              </a:rPr>
+            </a:br>
+            <a:r>
+              <a:rPr lang="en-US" b="1" dirty="0">
+                <a:effectLst/>
+              </a:rPr>
+              <a:t>Inventory (the manager)</a:t>
+            </a:r>
+          </a:p>
+          <a:p>
+            <a:r>
+              <a:rPr lang="en-US" dirty="0">
+                <a:effectLst/>
+              </a:rPr>
+              <a:t>This class doesn't inherit from anything. It </a:t>
+            </a:r>
+            <a:r>
+              <a:rPr lang="en-US" b="1" dirty="0">
+                <a:effectLst/>
+              </a:rPr>
+              <a:t>holds</a:t>
+            </a:r>
+            <a:r>
+              <a:rPr lang="en-US" dirty="0">
+                <a:effectLst/>
+              </a:rPr>
+              <a:t> products instead. The relationship is called </a:t>
+            </a:r>
+            <a:r>
+              <a:rPr lang="en-US" b="1" dirty="0">
+                <a:effectLst/>
+              </a:rPr>
+              <a:t>composition</a:t>
+            </a:r>
+            <a:r>
+              <a:rPr lang="en-US" dirty="0">
+                <a:effectLst/>
+              </a:rPr>
+              <a:t> (dashed arrow in the diagram): an </a:t>
+            </a:r>
+            <a:r>
+              <a:rPr lang="en-US" sz="1200" kern="1200" dirty="0">
+                <a:solidFill>
+                  <a:schemeClr val="tx1"/>
+                </a:solidFill>
+                <a:effectLst/>
+                <a:latin typeface="+mn-lt"/>
+                <a:ea typeface="+mn-ea"/>
+                <a:cs typeface="+mn-cs"/>
+              </a:rPr>
+              <a:t>Inventory</a:t>
+            </a:r>
+            <a:r>
+              <a:rPr lang="en-US" dirty="0">
+                <a:effectLst/>
+              </a:rPr>
+              <a:t> has a </a:t>
+            </a:r>
+            <a:r>
+              <a:rPr lang="en-US" sz="1200" kern="1200" dirty="0" err="1">
+                <a:solidFill>
+                  <a:schemeClr val="tx1"/>
+                </a:solidFill>
+                <a:effectLst/>
+                <a:latin typeface="+mn-lt"/>
+                <a:ea typeface="+mn-ea"/>
+                <a:cs typeface="+mn-cs"/>
+              </a:rPr>
+              <a:t>dict</a:t>
+            </a:r>
+            <a:r>
+              <a:rPr lang="en-US" dirty="0">
+                <a:effectLst/>
+              </a:rPr>
+              <a:t> full of </a:t>
+            </a:r>
+            <a:r>
+              <a:rPr lang="en-US" sz="1200" kern="1200" dirty="0">
+                <a:solidFill>
+                  <a:schemeClr val="tx1"/>
+                </a:solidFill>
+                <a:effectLst/>
+                <a:latin typeface="+mn-lt"/>
+                <a:ea typeface="+mn-ea"/>
+                <a:cs typeface="+mn-cs"/>
+              </a:rPr>
+              <a:t>Product</a:t>
+            </a:r>
+            <a:r>
+              <a:rPr lang="en-US" dirty="0">
+                <a:effectLst/>
+              </a:rPr>
+              <a:t> objects.</a:t>
+            </a:r>
+          </a:p>
+          <a:p>
+            <a:r>
+              <a:rPr lang="en-US" b="1" dirty="0">
+                <a:effectLst/>
+              </a:rPr>
+              <a:t>Attributes:</a:t>
+            </a:r>
+            <a:r>
+              <a:rPr lang="en-US" dirty="0">
+                <a:effectLst/>
+              </a:rPr>
+              <a:t> </a:t>
+            </a:r>
+            <a:r>
+              <a:rPr lang="en-US" sz="1200" kern="1200" dirty="0">
+                <a:solidFill>
+                  <a:schemeClr val="tx1"/>
+                </a:solidFill>
+                <a:effectLst/>
+                <a:latin typeface="+mn-lt"/>
+                <a:ea typeface="+mn-ea"/>
+                <a:cs typeface="+mn-cs"/>
+              </a:rPr>
+              <a:t>products</a:t>
+            </a:r>
+            <a:r>
+              <a:rPr lang="en-US" dirty="0">
+                <a:effectLst/>
+              </a:rPr>
+              <a:t> (a dictionary where the key is the </a:t>
+            </a:r>
+            <a:r>
+              <a:rPr lang="en-US" sz="1200" kern="1200" dirty="0" err="1">
+                <a:solidFill>
+                  <a:schemeClr val="tx1"/>
+                </a:solidFill>
+                <a:effectLst/>
+                <a:latin typeface="+mn-lt"/>
+                <a:ea typeface="+mn-ea"/>
+                <a:cs typeface="+mn-cs"/>
+              </a:rPr>
+              <a:t>product_id</a:t>
+            </a:r>
+            <a:r>
+              <a:rPr lang="en-US" dirty="0">
+                <a:effectLst/>
+              </a:rPr>
+              <a:t> and the value is the </a:t>
+            </a:r>
+            <a:r>
+              <a:rPr lang="en-US" sz="1200" kern="1200" dirty="0">
+                <a:solidFill>
+                  <a:schemeClr val="tx1"/>
+                </a:solidFill>
+                <a:effectLst/>
+                <a:latin typeface="+mn-lt"/>
+                <a:ea typeface="+mn-ea"/>
+                <a:cs typeface="+mn-cs"/>
+              </a:rPr>
+              <a:t>Product</a:t>
+            </a:r>
+            <a:r>
+              <a:rPr lang="en-US" dirty="0">
+                <a:effectLst/>
+              </a:rPr>
+              <a:t> object), </a:t>
+            </a:r>
+            <a:r>
+              <a:rPr lang="en-US" sz="1200" kern="1200" dirty="0" err="1">
+                <a:solidFill>
+                  <a:schemeClr val="tx1"/>
+                </a:solidFill>
+                <a:effectLst/>
+                <a:latin typeface="+mn-lt"/>
+                <a:ea typeface="+mn-ea"/>
+                <a:cs typeface="+mn-cs"/>
+              </a:rPr>
+              <a:t>low_stock_threshold</a:t>
+            </a:r>
+            <a:r>
+              <a:rPr lang="en-US" dirty="0">
+                <a:effectLst/>
+              </a:rPr>
               <a:t>, and </a:t>
             </a:r>
             <a:r>
@@ -3244,34 +5398,1232 @@
                 <a:solidFill>
                   <a:schemeClr val="tx1"/>
                 </a:solidFill>
-                <a:latin typeface="+mn-lt"/>
-                <a:ea typeface="+mn-ea"/>
-                <a:cs typeface="+mn-cs"/>
-              </a:rPr>
-              <a:t>from_dict</a:t>
+                <a:effectLst/>
+                <a:latin typeface="+mn-lt"/>
+                <a:ea typeface="+mn-ea"/>
+                <a:cs typeface="+mn-cs"/>
+              </a:rPr>
+              <a:t>data_file</a:t>
+            </a:r>
+            <a:r>
+              <a:rPr lang="en-US" dirty="0">
+                <a:effectLst/>
+              </a:rPr>
+              <a:t>.</a:t>
+            </a:r>
+          </a:p>
+          <a:p>
+            <a:r>
+              <a:rPr lang="en-US" b="1" dirty="0">
+                <a:effectLst/>
+              </a:rPr>
+              <a:t>How it links to </a:t>
+            </a:r>
+            <a:r>
+              <a:rPr lang="en-US" sz="1200" b="1" kern="1200" dirty="0">
+                <a:solidFill>
+                  <a:schemeClr val="tx1"/>
+                </a:solidFill>
+                <a:effectLst/>
+                <a:latin typeface="+mn-lt"/>
+                <a:ea typeface="+mn-ea"/>
+                <a:cs typeface="+mn-cs"/>
+              </a:rPr>
+              <a:t>Product</a:t>
+            </a:r>
+            <a:r>
+              <a:rPr lang="en-US" b="1" dirty="0">
+                <a:effectLst/>
+              </a:rPr>
+              <a:t>:</a:t>
+            </a:r>
+            <a:endParaRPr lang="en-US" dirty="0">
+              <a:effectLst/>
+            </a:endParaRPr>
+          </a:p>
+          <a:p>
+            <a:r>
+              <a:rPr lang="en-US" sz="1200" kern="1200" dirty="0" err="1">
+                <a:solidFill>
+                  <a:schemeClr val="tx1"/>
+                </a:solidFill>
+                <a:effectLst/>
+                <a:latin typeface="+mn-lt"/>
+                <a:ea typeface="+mn-ea"/>
+                <a:cs typeface="+mn-cs"/>
+              </a:rPr>
+              <a:t>add_product</a:t>
             </a:r>
             <a:r>
               <a:rPr lang="en-US" sz="1200" kern="1200" dirty="0">
                 <a:solidFill>
                   <a:schemeClr val="tx1"/>
                 </a:solidFill>
-                <a:latin typeface="+mn-lt"/>
-                <a:ea typeface="+mn-ea"/>
-                <a:cs typeface="+mn-cs"/>
-              </a:rPr>
-              <a:t>(data)</a:t>
-            </a:r>
-            <a:r>
-              <a:rPr lang="en-US" dirty="0"/>
+                <a:effectLst/>
+                <a:latin typeface="+mn-lt"/>
+                <a:ea typeface="+mn-ea"/>
+                <a:cs typeface="+mn-cs"/>
+              </a:rPr>
+              <a:t>(product)</a:t>
+            </a:r>
+            <a:r>
+              <a:rPr lang="en-US" dirty="0">
+                <a:effectLst/>
+              </a:rPr>
+              <a:t> takes any </a:t>
+            </a:r>
+            <a:r>
+              <a:rPr lang="en-US" sz="1200" kern="1200" dirty="0">
+                <a:solidFill>
+                  <a:schemeClr val="tx1"/>
+                </a:solidFill>
+                <a:effectLst/>
+                <a:latin typeface="+mn-lt"/>
+                <a:ea typeface="+mn-ea"/>
+                <a:cs typeface="+mn-cs"/>
+              </a:rPr>
+              <a:t>Product</a:t>
+            </a:r>
+            <a:r>
+              <a:rPr lang="en-US" dirty="0">
+                <a:effectLst/>
+              </a:rPr>
+              <a:t> (or subclass) and stores it in the dictionary. Before storing, it checks for a duplicate ID and raises </a:t>
+            </a:r>
+            <a:r>
+              <a:rPr lang="en-US" sz="1200" kern="1200" dirty="0" err="1">
+                <a:solidFill>
+                  <a:schemeClr val="tx1"/>
+                </a:solidFill>
+                <a:effectLst/>
+                <a:latin typeface="+mn-lt"/>
+                <a:ea typeface="+mn-ea"/>
+                <a:cs typeface="+mn-cs"/>
+              </a:rPr>
+              <a:t>DuplicateProductError</a:t>
+            </a:r>
+            <a:r>
+              <a:rPr lang="en-US" dirty="0">
+                <a:effectLst/>
+              </a:rPr>
+              <a:t> if there's a clash.</a:t>
+            </a:r>
+          </a:p>
+          <a:p>
+            <a:r>
+              <a:rPr lang="en-US" sz="1200" kern="1200" dirty="0" err="1">
+                <a:solidFill>
+                  <a:schemeClr val="tx1"/>
+                </a:solidFill>
+                <a:effectLst/>
+                <a:latin typeface="+mn-lt"/>
+                <a:ea typeface="+mn-ea"/>
+                <a:cs typeface="+mn-cs"/>
+              </a:rPr>
+              <a:t>sell_product</a:t>
+            </a:r>
+            <a:r>
+              <a:rPr lang="en-US" sz="1200" kern="1200" dirty="0">
+                <a:solidFill>
+                  <a:schemeClr val="tx1"/>
+                </a:solidFill>
+                <a:effectLst/>
+                <a:latin typeface="+mn-lt"/>
+                <a:ea typeface="+mn-ea"/>
+                <a:cs typeface="+mn-cs"/>
+              </a:rPr>
+              <a:t>(</a:t>
+            </a:r>
+            <a:r>
+              <a:rPr lang="en-US" sz="1200" kern="1200" dirty="0" err="1">
+                <a:solidFill>
+                  <a:schemeClr val="tx1"/>
+                </a:solidFill>
+                <a:effectLst/>
+                <a:latin typeface="+mn-lt"/>
+                <a:ea typeface="+mn-ea"/>
+                <a:cs typeface="+mn-cs"/>
+              </a:rPr>
+              <a:t>product_id</a:t>
+            </a:r>
+            <a:r>
+              <a:rPr lang="en-US" sz="1200" kern="1200" dirty="0">
+                <a:solidFill>
+                  <a:schemeClr val="tx1"/>
+                </a:solidFill>
+                <a:effectLst/>
+                <a:latin typeface="+mn-lt"/>
+                <a:ea typeface="+mn-ea"/>
+                <a:cs typeface="+mn-cs"/>
+              </a:rPr>
+              <a:t>, qty)</a:t>
+            </a:r>
+            <a:r>
+              <a:rPr lang="en-US" dirty="0">
+                <a:effectLst/>
+              </a:rPr>
+              <a:t> first calls </a:t>
+            </a:r>
+            <a:r>
+              <a:rPr lang="en-US" sz="1200" kern="1200" dirty="0" err="1">
+                <a:solidFill>
+                  <a:schemeClr val="tx1"/>
+                </a:solidFill>
+                <a:effectLst/>
+                <a:latin typeface="+mn-lt"/>
+                <a:ea typeface="+mn-ea"/>
+                <a:cs typeface="+mn-cs"/>
+              </a:rPr>
+              <a:t>find_product</a:t>
+            </a:r>
+            <a:r>
+              <a:rPr lang="en-US" sz="1200" kern="1200" dirty="0">
+                <a:solidFill>
+                  <a:schemeClr val="tx1"/>
+                </a:solidFill>
+                <a:effectLst/>
+                <a:latin typeface="+mn-lt"/>
+                <a:ea typeface="+mn-ea"/>
+                <a:cs typeface="+mn-cs"/>
+              </a:rPr>
+              <a:t>()</a:t>
+            </a:r>
+            <a:r>
+              <a:rPr lang="en-US" dirty="0">
+                <a:effectLst/>
+              </a:rPr>
+              <a:t> to look up the product, then calls </a:t>
+            </a:r>
+            <a:r>
+              <a:rPr lang="en-US" sz="1200" kern="1200" dirty="0" err="1">
+                <a:solidFill>
+                  <a:schemeClr val="tx1"/>
+                </a:solidFill>
+                <a:effectLst/>
+                <a:latin typeface="+mn-lt"/>
+                <a:ea typeface="+mn-ea"/>
+                <a:cs typeface="+mn-cs"/>
+              </a:rPr>
+              <a:t>product.sell</a:t>
+            </a:r>
+            <a:r>
+              <a:rPr lang="en-US" sz="1200" kern="1200" dirty="0">
+                <a:solidFill>
+                  <a:schemeClr val="tx1"/>
+                </a:solidFill>
+                <a:effectLst/>
+                <a:latin typeface="+mn-lt"/>
+                <a:ea typeface="+mn-ea"/>
+                <a:cs typeface="+mn-cs"/>
+              </a:rPr>
+              <a:t>(qty)</a:t>
+            </a:r>
+            <a:r>
+              <a:rPr lang="en-US" dirty="0">
+                <a:effectLst/>
+              </a:rPr>
+              <a:t> on it. Because of polymorphism, if the product happens to be a </a:t>
+            </a:r>
+            <a:r>
+              <a:rPr lang="en-US" sz="1200" kern="1200" dirty="0" err="1">
+                <a:solidFill>
+                  <a:schemeClr val="tx1"/>
+                </a:solidFill>
+                <a:effectLst/>
+                <a:latin typeface="+mn-lt"/>
+                <a:ea typeface="+mn-ea"/>
+                <a:cs typeface="+mn-cs"/>
+              </a:rPr>
+              <a:t>PerishableProduct</a:t>
+            </a:r>
+            <a:r>
+              <a:rPr lang="en-US" dirty="0">
+                <a:effectLst/>
+              </a:rPr>
+              <a:t>, the expiry check runs automatically. If it's a </a:t>
+            </a:r>
+            <a:r>
+              <a:rPr lang="en-US" sz="1200" kern="1200" dirty="0" err="1">
+                <a:solidFill>
+                  <a:schemeClr val="tx1"/>
+                </a:solidFill>
+                <a:effectLst/>
+                <a:latin typeface="+mn-lt"/>
+                <a:ea typeface="+mn-ea"/>
+                <a:cs typeface="+mn-cs"/>
+              </a:rPr>
+              <a:t>DigitalProduct</a:t>
+            </a:r>
+            <a:r>
+              <a:rPr lang="en-US" dirty="0">
+                <a:effectLst/>
+              </a:rPr>
+              <a:t>, no stock is decremented. </a:t>
+            </a:r>
+            <a:r>
+              <a:rPr lang="en-US" sz="1200" kern="1200" dirty="0">
+                <a:solidFill>
+                  <a:schemeClr val="tx1"/>
+                </a:solidFill>
+                <a:effectLst/>
+                <a:latin typeface="+mn-lt"/>
+                <a:ea typeface="+mn-ea"/>
+                <a:cs typeface="+mn-cs"/>
+              </a:rPr>
+              <a:t>Inventory</a:t>
+            </a:r>
+            <a:r>
+              <a:rPr lang="en-US" dirty="0">
+                <a:effectLst/>
+              </a:rPr>
+              <a:t> doesn't need to know or care which kind it's dealing with.</a:t>
+            </a:r>
+          </a:p>
+          <a:p>
+            <a:r>
+              <a:rPr lang="en-US" sz="1200" kern="1200" dirty="0" err="1">
+                <a:solidFill>
+                  <a:schemeClr val="tx1"/>
+                </a:solidFill>
+                <a:effectLst/>
+                <a:latin typeface="+mn-lt"/>
+                <a:ea typeface="+mn-ea"/>
+                <a:cs typeface="+mn-cs"/>
+              </a:rPr>
+              <a:t>load_data</a:t>
+            </a:r>
+            <a:r>
+              <a:rPr lang="en-US" sz="1200" kern="1200" dirty="0">
+                <a:solidFill>
+                  <a:schemeClr val="tx1"/>
+                </a:solidFill>
+                <a:effectLst/>
+                <a:latin typeface="+mn-lt"/>
+                <a:ea typeface="+mn-ea"/>
+                <a:cs typeface="+mn-cs"/>
+              </a:rPr>
+              <a:t>()</a:t>
+            </a:r>
+            <a:r>
+              <a:rPr lang="en-US" dirty="0">
+                <a:effectLst/>
+              </a:rPr>
+              <a:t> reads the JSON file and calls </a:t>
+            </a:r>
+            <a:r>
+              <a:rPr lang="en-US" sz="1200" kern="1200" dirty="0" err="1">
+                <a:solidFill>
+                  <a:schemeClr val="tx1"/>
+                </a:solidFill>
+                <a:effectLst/>
+                <a:latin typeface="+mn-lt"/>
+                <a:ea typeface="+mn-ea"/>
+                <a:cs typeface="+mn-cs"/>
+              </a:rPr>
+              <a:t>Product.from_dict</a:t>
+            </a:r>
+            <a:r>
+              <a:rPr lang="en-US" sz="1200" kern="1200" dirty="0">
+                <a:solidFill>
+                  <a:schemeClr val="tx1"/>
+                </a:solidFill>
+                <a:effectLst/>
+                <a:latin typeface="+mn-lt"/>
+                <a:ea typeface="+mn-ea"/>
+                <a:cs typeface="+mn-cs"/>
+              </a:rPr>
+              <a:t>(item)</a:t>
+            </a:r>
+            <a:r>
+              <a:rPr lang="en-US" dirty="0">
+                <a:effectLst/>
+              </a:rPr>
+              <a:t> for each entry. The factory method builds the right subclass, and </a:t>
+            </a:r>
+            <a:r>
+              <a:rPr lang="en-US" sz="1200" kern="1200" dirty="0">
+                <a:solidFill>
+                  <a:schemeClr val="tx1"/>
+                </a:solidFill>
+                <a:effectLst/>
+                <a:latin typeface="+mn-lt"/>
+                <a:ea typeface="+mn-ea"/>
+                <a:cs typeface="+mn-cs"/>
+              </a:rPr>
+              <a:t>Inventory</a:t>
+            </a:r>
+            <a:r>
+              <a:rPr lang="en-US" dirty="0">
+                <a:effectLst/>
+              </a:rPr>
+              <a:t> just stores whatever comes back.</a:t>
+            </a:r>
+          </a:p>
+          <a:p>
+            <a:r>
+              <a:rPr lang="en-US" sz="1200" kern="1200" dirty="0" err="1">
+                <a:solidFill>
+                  <a:schemeClr val="tx1"/>
+                </a:solidFill>
+                <a:effectLst/>
+                <a:latin typeface="+mn-lt"/>
+                <a:ea typeface="+mn-ea"/>
+                <a:cs typeface="+mn-cs"/>
+              </a:rPr>
+              <a:t>save_data</a:t>
+            </a:r>
+            <a:r>
+              <a:rPr lang="en-US" sz="1200" kern="1200" dirty="0">
+                <a:solidFill>
+                  <a:schemeClr val="tx1"/>
+                </a:solidFill>
+                <a:effectLst/>
+                <a:latin typeface="+mn-lt"/>
+                <a:ea typeface="+mn-ea"/>
+                <a:cs typeface="+mn-cs"/>
+              </a:rPr>
+              <a:t>()</a:t>
+            </a:r>
+            <a:r>
+              <a:rPr lang="en-US" dirty="0">
+                <a:effectLst/>
+              </a:rPr>
+              <a:t> loops through </a:t>
+            </a:r>
+            <a:r>
+              <a:rPr lang="en-US" sz="1200" kern="1200" dirty="0" err="1">
+                <a:solidFill>
+                  <a:schemeClr val="tx1"/>
+                </a:solidFill>
+                <a:effectLst/>
+                <a:latin typeface="+mn-lt"/>
+                <a:ea typeface="+mn-ea"/>
+                <a:cs typeface="+mn-cs"/>
+              </a:rPr>
+              <a:t>self.products.values</a:t>
+            </a:r>
+            <a:r>
+              <a:rPr lang="en-US" sz="1200" kern="1200" dirty="0">
+                <a:solidFill>
+                  <a:schemeClr val="tx1"/>
+                </a:solidFill>
+                <a:effectLst/>
+                <a:latin typeface="+mn-lt"/>
+                <a:ea typeface="+mn-ea"/>
+                <a:cs typeface="+mn-cs"/>
+              </a:rPr>
+              <a:t>()</a:t>
+            </a:r>
+            <a:r>
+              <a:rPr lang="en-US" dirty="0">
+                <a:effectLst/>
+              </a:rPr>
+              <a:t> and calls </a:t>
+            </a:r>
+            <a:r>
+              <a:rPr lang="en-US" sz="1200" kern="1200" dirty="0" err="1">
+                <a:solidFill>
+                  <a:schemeClr val="tx1"/>
+                </a:solidFill>
+                <a:effectLst/>
+                <a:latin typeface="+mn-lt"/>
+                <a:ea typeface="+mn-ea"/>
+                <a:cs typeface="+mn-cs"/>
+              </a:rPr>
+              <a:t>to_dict</a:t>
+            </a:r>
+            <a:r>
+              <a:rPr lang="en-US" sz="1200" kern="1200" dirty="0">
+                <a:solidFill>
+                  <a:schemeClr val="tx1"/>
+                </a:solidFill>
+                <a:effectLst/>
+                <a:latin typeface="+mn-lt"/>
+                <a:ea typeface="+mn-ea"/>
+                <a:cs typeface="+mn-cs"/>
+              </a:rPr>
+              <a:t>()</a:t>
+            </a:r>
+            <a:r>
+              <a:rPr lang="en-US" dirty="0">
+                <a:effectLst/>
+              </a:rPr>
+              <a:t> on each. Again, polymorphism: each product knows how to serialize itself.</a:t>
+            </a:r>
+          </a:p>
+          <a:p>
+            <a:br>
+              <a:rPr lang="en-US" b="1" dirty="0">
+                <a:effectLst/>
+              </a:rPr>
+            </a:br>
+            <a:r>
+              <a:rPr lang="en-US" b="1" dirty="0" err="1">
+                <a:effectLst/>
+              </a:rPr>
+              <a:t>TransactionLog</a:t>
+            </a:r>
+            <a:r>
+              <a:rPr lang="en-US" b="1" dirty="0">
+                <a:effectLst/>
+              </a:rPr>
+              <a:t> (the diary)</a:t>
+            </a:r>
+          </a:p>
+          <a:p>
+            <a:r>
+              <a:rPr lang="en-US" dirty="0">
+                <a:effectLst/>
+              </a:rPr>
+              <a:t>Also doesn't inherit from anything and doesn't hold any </a:t>
+            </a:r>
+            <a:r>
+              <a:rPr lang="en-US" sz="1200" kern="1200" dirty="0">
+                <a:solidFill>
+                  <a:schemeClr val="tx1"/>
+                </a:solidFill>
+                <a:effectLst/>
+                <a:latin typeface="+mn-lt"/>
+                <a:ea typeface="+mn-ea"/>
+                <a:cs typeface="+mn-cs"/>
+              </a:rPr>
+              <a:t>Product</a:t>
+            </a:r>
+            <a:r>
+              <a:rPr lang="en-US" dirty="0">
+                <a:effectLst/>
+              </a:rPr>
+              <a:t> objects. It just records </a:t>
+            </a:r>
+            <a:r>
+              <a:rPr lang="en-US" b="1" dirty="0">
+                <a:effectLst/>
+              </a:rPr>
+              <a:t>information about</a:t>
+            </a:r>
+            <a:r>
+              <a:rPr lang="en-US" dirty="0">
+                <a:effectLst/>
+              </a:rPr>
+              <a:t> transactions, specifically the IDs and names rather than the objects themselves.</a:t>
+            </a:r>
+          </a:p>
+          <a:p>
+            <a:r>
+              <a:rPr lang="en-US" b="1" dirty="0">
+                <a:effectLst/>
+              </a:rPr>
+              <a:t>Attributes:</a:t>
+            </a:r>
+            <a:r>
+              <a:rPr lang="en-US" dirty="0">
+                <a:effectLst/>
+              </a:rPr>
+              <a:t> </a:t>
+            </a:r>
+            <a:r>
+              <a:rPr lang="en-US" sz="1200" kern="1200" dirty="0">
+                <a:solidFill>
+                  <a:schemeClr val="tx1"/>
+                </a:solidFill>
+                <a:effectLst/>
+                <a:latin typeface="+mn-lt"/>
+                <a:ea typeface="+mn-ea"/>
+                <a:cs typeface="+mn-cs"/>
+              </a:rPr>
+              <a:t>entries</a:t>
+            </a:r>
+            <a:r>
+              <a:rPr lang="en-US" dirty="0">
+                <a:effectLst/>
+              </a:rPr>
+              <a:t> (a list of dictionaries) and </a:t>
+            </a:r>
+            <a:r>
+              <a:rPr lang="en-US" sz="1200" kern="1200" dirty="0" err="1">
+                <a:solidFill>
+                  <a:schemeClr val="tx1"/>
+                </a:solidFill>
+                <a:effectLst/>
+                <a:latin typeface="+mn-lt"/>
+                <a:ea typeface="+mn-ea"/>
+                <a:cs typeface="+mn-cs"/>
+              </a:rPr>
+              <a:t>log_file</a:t>
+            </a:r>
+            <a:r>
+              <a:rPr lang="en-US" dirty="0">
+                <a:effectLst/>
+              </a:rPr>
               <a:t>.</a:t>
             </a:r>
           </a:p>
           <a:p>
             <a:r>
+              <a:rPr lang="en-US" b="1" dirty="0">
+                <a:effectLst/>
+              </a:rPr>
+              <a:t>How it links to the rest:</a:t>
+            </a:r>
+            <a:r>
+              <a:rPr lang="en-US" dirty="0">
+                <a:effectLst/>
+              </a:rPr>
+              <a:t> It doesn't, directly. Look at </a:t>
+            </a:r>
+            <a:r>
+              <a:rPr lang="en-US" sz="1200" kern="1200" dirty="0">
+                <a:solidFill>
+                  <a:schemeClr val="tx1"/>
+                </a:solidFill>
+                <a:effectLst/>
+                <a:latin typeface="+mn-lt"/>
+                <a:ea typeface="+mn-ea"/>
+                <a:cs typeface="+mn-cs"/>
+              </a:rPr>
+              <a:t>main.py</a:t>
+            </a:r>
+            <a:r>
+              <a:rPr lang="en-US" dirty="0">
+                <a:effectLst/>
+              </a:rPr>
+              <a:t>: when you sell a product, </a:t>
+            </a:r>
+            <a:r>
+              <a:rPr lang="en-US" sz="1200" kern="1200" dirty="0">
+                <a:solidFill>
+                  <a:schemeClr val="tx1"/>
+                </a:solidFill>
+                <a:effectLst/>
+                <a:latin typeface="+mn-lt"/>
+                <a:ea typeface="+mn-ea"/>
+                <a:cs typeface="+mn-cs"/>
+              </a:rPr>
+              <a:t>main.py</a:t>
+            </a:r>
+            <a:r>
+              <a:rPr lang="en-US" dirty="0">
+                <a:effectLst/>
+              </a:rPr>
+              <a:t> calls </a:t>
+            </a:r>
+            <a:r>
               <a:rPr lang="en-US" sz="1200" kern="1200" dirty="0" err="1">
                 <a:solidFill>
                   <a:schemeClr val="tx1"/>
                 </a:solidFill>
+                <a:effectLst/>
+                <a:latin typeface="+mn-lt"/>
+                <a:ea typeface="+mn-ea"/>
+                <a:cs typeface="+mn-cs"/>
+              </a:rPr>
+              <a:t>inventory.sell_product</a:t>
+            </a:r>
+            <a:r>
+              <a:rPr lang="en-US" sz="1200" kern="1200" dirty="0">
+                <a:solidFill>
+                  <a:schemeClr val="tx1"/>
+                </a:solidFill>
+                <a:effectLst/>
+                <a:latin typeface="+mn-lt"/>
+                <a:ea typeface="+mn-ea"/>
+                <a:cs typeface="+mn-cs"/>
+              </a:rPr>
+              <a:t>(...)</a:t>
+            </a:r>
+            <a:r>
+              <a:rPr lang="en-US" dirty="0">
+                <a:effectLst/>
+              </a:rPr>
+              <a:t> and then separately calls </a:t>
+            </a:r>
+            <a:r>
+              <a:rPr lang="en-US" sz="1200" kern="1200" dirty="0" err="1">
+                <a:solidFill>
+                  <a:schemeClr val="tx1"/>
+                </a:solidFill>
+                <a:effectLst/>
+                <a:latin typeface="+mn-lt"/>
+                <a:ea typeface="+mn-ea"/>
+                <a:cs typeface="+mn-cs"/>
+              </a:rPr>
+              <a:t>log.record</a:t>
+            </a:r>
+            <a:r>
+              <a:rPr lang="en-US" sz="1200" kern="1200" dirty="0">
+                <a:solidFill>
+                  <a:schemeClr val="tx1"/>
+                </a:solidFill>
+                <a:effectLst/>
+                <a:latin typeface="+mn-lt"/>
+                <a:ea typeface="+mn-ea"/>
+                <a:cs typeface="+mn-cs"/>
+              </a:rPr>
+              <a:t>(...)</a:t>
+            </a:r>
+            <a:r>
+              <a:rPr lang="en-US" dirty="0">
+                <a:effectLst/>
+              </a:rPr>
+              <a:t>. These two classes never talk to each other. </a:t>
+            </a:r>
+            <a:r>
+              <a:rPr lang="en-US" sz="1200" kern="1200" dirty="0">
+                <a:solidFill>
+                  <a:schemeClr val="tx1"/>
+                </a:solidFill>
+                <a:effectLst/>
+                <a:latin typeface="+mn-lt"/>
+                <a:ea typeface="+mn-ea"/>
+                <a:cs typeface="+mn-cs"/>
+              </a:rPr>
+              <a:t>main.py</a:t>
+            </a:r>
+            <a:r>
+              <a:rPr lang="en-US" dirty="0">
+                <a:effectLst/>
+              </a:rPr>
+              <a:t> is the coordinator.</a:t>
+            </a:r>
+          </a:p>
+          <a:p>
+            <a:r>
+              <a:rPr lang="en-US" dirty="0">
+                <a:effectLst/>
+              </a:rPr>
+              <a:t>This is actually a deliberate design choice. Keeping </a:t>
+            </a:r>
+            <a:r>
+              <a:rPr lang="en-US" sz="1200" kern="1200" dirty="0">
+                <a:solidFill>
+                  <a:schemeClr val="tx1"/>
+                </a:solidFill>
+                <a:effectLst/>
+                <a:latin typeface="+mn-lt"/>
+                <a:ea typeface="+mn-ea"/>
+                <a:cs typeface="+mn-cs"/>
+              </a:rPr>
+              <a:t>Inventory</a:t>
+            </a:r>
+            <a:r>
+              <a:rPr lang="en-US" dirty="0">
+                <a:effectLst/>
+              </a:rPr>
+              <a:t> and </a:t>
+            </a:r>
+            <a:r>
+              <a:rPr lang="en-US" sz="1200" kern="1200" dirty="0" err="1">
+                <a:solidFill>
+                  <a:schemeClr val="tx1"/>
+                </a:solidFill>
+                <a:effectLst/>
+                <a:latin typeface="+mn-lt"/>
+                <a:ea typeface="+mn-ea"/>
+                <a:cs typeface="+mn-cs"/>
+              </a:rPr>
+              <a:t>TransactionLog</a:t>
+            </a:r>
+            <a:r>
+              <a:rPr lang="en-US" dirty="0">
+                <a:effectLst/>
+              </a:rPr>
+              <a:t> separate means you could swap in a different logging system (maybe one that sends messages to a server) without changing anything about </a:t>
+            </a:r>
+            <a:r>
+              <a:rPr lang="en-US" sz="1200" kern="1200" dirty="0">
+                <a:solidFill>
+                  <a:schemeClr val="tx1"/>
+                </a:solidFill>
+                <a:effectLst/>
+                <a:latin typeface="+mn-lt"/>
+                <a:ea typeface="+mn-ea"/>
+                <a:cs typeface="+mn-cs"/>
+              </a:rPr>
+              <a:t>Inventory</a:t>
+            </a:r>
+            <a:r>
+              <a:rPr lang="en-US" dirty="0">
+                <a:effectLst/>
+              </a:rPr>
+              <a:t>.</a:t>
+            </a:r>
+          </a:p>
+          <a:p>
+            <a:br>
+              <a:rPr lang="en-US" b="1" dirty="0">
+                <a:effectLst/>
+              </a:rPr>
+            </a:br>
+            <a:r>
+              <a:rPr lang="en-US" b="1" dirty="0">
+                <a:effectLst/>
+              </a:rPr>
+              <a:t>Custom Exceptions</a:t>
+            </a:r>
+          </a:p>
+          <a:p>
+            <a:r>
+              <a:rPr lang="en-US" dirty="0">
+                <a:effectLst/>
+              </a:rPr>
+              <a:t>The three exception classes in </a:t>
+            </a:r>
+            <a:r>
+              <a:rPr lang="en-US" sz="1200" kern="1200" dirty="0">
+                <a:solidFill>
+                  <a:schemeClr val="tx1"/>
+                </a:solidFill>
+                <a:effectLst/>
+                <a:latin typeface="+mn-lt"/>
+                <a:ea typeface="+mn-ea"/>
+                <a:cs typeface="+mn-cs"/>
+              </a:rPr>
+              <a:t>exceptions.py</a:t>
+            </a:r>
+            <a:r>
+              <a:rPr lang="en-US" dirty="0">
+                <a:effectLst/>
+              </a:rPr>
+              <a:t> all inherit from Python's built-in </a:t>
+            </a:r>
+            <a:r>
+              <a:rPr lang="en-US" sz="1200" kern="1200" dirty="0">
+                <a:solidFill>
+                  <a:schemeClr val="tx1"/>
+                </a:solidFill>
+                <a:effectLst/>
+                <a:latin typeface="+mn-lt"/>
+                <a:ea typeface="+mn-ea"/>
+                <a:cs typeface="+mn-cs"/>
+              </a:rPr>
+              <a:t>Exception</a:t>
+            </a:r>
+            <a:r>
+              <a:rPr lang="en-US" dirty="0">
+                <a:effectLst/>
+              </a:rPr>
+              <a:t>. Their only job is to have distinct names so </a:t>
+            </a:r>
+            <a:r>
+              <a:rPr lang="en-US" sz="1200" kern="1200" dirty="0">
+                <a:solidFill>
+                  <a:schemeClr val="tx1"/>
+                </a:solidFill>
+                <a:effectLst/>
+                <a:latin typeface="+mn-lt"/>
+                <a:ea typeface="+mn-ea"/>
+                <a:cs typeface="+mn-cs"/>
+              </a:rPr>
+              <a:t>main.py</a:t>
+            </a:r>
+            <a:r>
+              <a:rPr lang="en-US" dirty="0">
+                <a:effectLst/>
+              </a:rPr>
+              <a:t> can catch each one with its own </a:t>
+            </a:r>
+            <a:r>
+              <a:rPr lang="en-US" sz="1200" kern="1200" dirty="0">
+                <a:solidFill>
+                  <a:schemeClr val="tx1"/>
+                </a:solidFill>
+                <a:effectLst/>
+                <a:latin typeface="+mn-lt"/>
+                <a:ea typeface="+mn-ea"/>
+                <a:cs typeface="+mn-cs"/>
+              </a:rPr>
+              <a:t>except</a:t>
+            </a:r>
+            <a:r>
+              <a:rPr lang="en-US" dirty="0">
+                <a:effectLst/>
+              </a:rPr>
+              <a:t> block and print a specific error message.</a:t>
+            </a:r>
+          </a:p>
+          <a:p>
+            <a:r>
+              <a:rPr lang="en-US" b="1" dirty="0">
+                <a:effectLst/>
+              </a:rPr>
+              <a:t>Who raises what:</a:t>
+            </a:r>
+            <a:endParaRPr lang="en-US" dirty="0">
+              <a:effectLst/>
+            </a:endParaRPr>
+          </a:p>
+          <a:p>
+            <a:r>
+              <a:rPr lang="en-US" sz="1200" kern="1200" dirty="0">
+                <a:solidFill>
+                  <a:schemeClr val="tx1"/>
+                </a:solidFill>
+                <a:effectLst/>
+                <a:latin typeface="+mn-lt"/>
+                <a:ea typeface="+mn-ea"/>
+                <a:cs typeface="+mn-cs"/>
+              </a:rPr>
+              <a:t>Product.__</a:t>
+            </a:r>
+            <a:r>
+              <a:rPr lang="en-US" sz="1200" kern="1200" dirty="0" err="1">
+                <a:solidFill>
+                  <a:schemeClr val="tx1"/>
+                </a:solidFill>
+                <a:effectLst/>
+                <a:latin typeface="+mn-lt"/>
+                <a:ea typeface="+mn-ea"/>
+                <a:cs typeface="+mn-cs"/>
+              </a:rPr>
+              <a:t>init</a:t>
+            </a:r>
+            <a:r>
+              <a:rPr lang="en-US" sz="1200" kern="1200" dirty="0">
+                <a:solidFill>
+                  <a:schemeClr val="tx1"/>
+                </a:solidFill>
+                <a:effectLst/>
+                <a:latin typeface="+mn-lt"/>
+                <a:ea typeface="+mn-ea"/>
+                <a:cs typeface="+mn-cs"/>
+              </a:rPr>
+              <a:t>__()</a:t>
+            </a:r>
+            <a:r>
+              <a:rPr lang="en-US" dirty="0">
+                <a:effectLst/>
+              </a:rPr>
+              <a:t> raises </a:t>
+            </a:r>
+            <a:r>
+              <a:rPr lang="en-US" sz="1200" kern="1200" dirty="0" err="1">
+                <a:solidFill>
+                  <a:schemeClr val="tx1"/>
+                </a:solidFill>
+                <a:effectLst/>
+                <a:latin typeface="+mn-lt"/>
+                <a:ea typeface="+mn-ea"/>
+                <a:cs typeface="+mn-cs"/>
+              </a:rPr>
+              <a:t>InvalidProductError</a:t>
+            </a:r>
+            <a:r>
+              <a:rPr lang="en-US" dirty="0">
+                <a:effectLst/>
+              </a:rPr>
+              <a:t> when validation fails.</a:t>
+            </a:r>
+          </a:p>
+          <a:p>
+            <a:r>
+              <a:rPr lang="en-US" sz="1200" kern="1200" dirty="0" err="1">
+                <a:solidFill>
+                  <a:schemeClr val="tx1"/>
+                </a:solidFill>
+                <a:effectLst/>
+                <a:latin typeface="+mn-lt"/>
+                <a:ea typeface="+mn-ea"/>
+                <a:cs typeface="+mn-cs"/>
+              </a:rPr>
+              <a:t>Product.sell</a:t>
+            </a:r>
+            <a:r>
+              <a:rPr lang="en-US" sz="1200" kern="1200" dirty="0">
+                <a:solidFill>
+                  <a:schemeClr val="tx1"/>
+                </a:solidFill>
+                <a:effectLst/>
+                <a:latin typeface="+mn-lt"/>
+                <a:ea typeface="+mn-ea"/>
+                <a:cs typeface="+mn-cs"/>
+              </a:rPr>
+              <a:t>()</a:t>
+            </a:r>
+            <a:r>
+              <a:rPr lang="en-US" dirty="0">
+                <a:effectLst/>
+              </a:rPr>
+              <a:t> raises </a:t>
+            </a:r>
+            <a:r>
+              <a:rPr lang="en-US" sz="1200" kern="1200" dirty="0" err="1">
+                <a:solidFill>
+                  <a:schemeClr val="tx1"/>
+                </a:solidFill>
+                <a:effectLst/>
+                <a:latin typeface="+mn-lt"/>
+                <a:ea typeface="+mn-ea"/>
+                <a:cs typeface="+mn-cs"/>
+              </a:rPr>
+              <a:t>OutOfStockError</a:t>
+            </a:r>
+            <a:r>
+              <a:rPr lang="en-US" dirty="0">
+                <a:effectLst/>
+              </a:rPr>
+              <a:t> when stock is too low, and </a:t>
+            </a:r>
+            <a:r>
+              <a:rPr lang="en-US" sz="1200" kern="1200" dirty="0" err="1">
+                <a:solidFill>
+                  <a:schemeClr val="tx1"/>
+                </a:solidFill>
+                <a:effectLst/>
+                <a:latin typeface="+mn-lt"/>
+                <a:ea typeface="+mn-ea"/>
+                <a:cs typeface="+mn-cs"/>
+              </a:rPr>
+              <a:t>InvalidProductError</a:t>
+            </a:r>
+            <a:r>
+              <a:rPr lang="en-US" dirty="0">
+                <a:effectLst/>
+              </a:rPr>
+              <a:t> if the quantity is invalid.</a:t>
+            </a:r>
+          </a:p>
+          <a:p>
+            <a:r>
+              <a:rPr lang="en-US" sz="1200" kern="1200" dirty="0" err="1">
+                <a:solidFill>
+                  <a:schemeClr val="tx1"/>
+                </a:solidFill>
+                <a:effectLst/>
+                <a:latin typeface="+mn-lt"/>
+                <a:ea typeface="+mn-ea"/>
+                <a:cs typeface="+mn-cs"/>
+              </a:rPr>
+              <a:t>PerishableProduct.sell</a:t>
+            </a:r>
+            <a:r>
+              <a:rPr lang="en-US" sz="1200" kern="1200" dirty="0">
+                <a:solidFill>
+                  <a:schemeClr val="tx1"/>
+                </a:solidFill>
+                <a:effectLst/>
+                <a:latin typeface="+mn-lt"/>
+                <a:ea typeface="+mn-ea"/>
+                <a:cs typeface="+mn-cs"/>
+              </a:rPr>
+              <a:t>()</a:t>
+            </a:r>
+            <a:r>
+              <a:rPr lang="en-US" dirty="0">
+                <a:effectLst/>
+              </a:rPr>
+              <a:t> raises </a:t>
+            </a:r>
+            <a:r>
+              <a:rPr lang="en-US" sz="1200" kern="1200" dirty="0" err="1">
+                <a:solidFill>
+                  <a:schemeClr val="tx1"/>
+                </a:solidFill>
+                <a:effectLst/>
+                <a:latin typeface="+mn-lt"/>
+                <a:ea typeface="+mn-ea"/>
+                <a:cs typeface="+mn-cs"/>
+              </a:rPr>
+              <a:t>OutOfStockError</a:t>
+            </a:r>
+            <a:r>
+              <a:rPr lang="en-US" dirty="0">
+                <a:effectLst/>
+              </a:rPr>
+              <a:t> when the item has expired.</a:t>
+            </a:r>
+          </a:p>
+          <a:p>
+            <a:r>
+              <a:rPr lang="en-US" sz="1200" kern="1200" dirty="0" err="1">
+                <a:solidFill>
+                  <a:schemeClr val="tx1"/>
+                </a:solidFill>
+                <a:effectLst/>
+                <a:latin typeface="+mn-lt"/>
+                <a:ea typeface="+mn-ea"/>
+                <a:cs typeface="+mn-cs"/>
+              </a:rPr>
+              <a:t>Inventory.add_product</a:t>
+            </a:r>
+            <a:r>
+              <a:rPr lang="en-US" sz="1200" kern="1200" dirty="0">
+                <a:solidFill>
+                  <a:schemeClr val="tx1"/>
+                </a:solidFill>
+                <a:effectLst/>
+                <a:latin typeface="+mn-lt"/>
+                <a:ea typeface="+mn-ea"/>
+                <a:cs typeface="+mn-cs"/>
+              </a:rPr>
+              <a:t>()</a:t>
+            </a:r>
+            <a:r>
+              <a:rPr lang="en-US" dirty="0">
+                <a:effectLst/>
+              </a:rPr>
+              <a:t> raises </a:t>
+            </a:r>
+            <a:r>
+              <a:rPr lang="en-US" sz="1200" kern="1200" dirty="0" err="1">
+                <a:solidFill>
+                  <a:schemeClr val="tx1"/>
+                </a:solidFill>
+                <a:effectLst/>
+                <a:latin typeface="+mn-lt"/>
+                <a:ea typeface="+mn-ea"/>
+                <a:cs typeface="+mn-cs"/>
+              </a:rPr>
+              <a:t>DuplicateProductError</a:t>
+            </a:r>
+            <a:r>
+              <a:rPr lang="en-US" dirty="0">
+                <a:effectLst/>
+              </a:rPr>
+              <a:t> for ID clashes.</a:t>
+            </a:r>
+          </a:p>
+          <a:p>
+            <a:r>
+              <a:rPr lang="en-US" sz="1200" kern="1200" dirty="0" err="1">
+                <a:solidFill>
+                  <a:schemeClr val="tx1"/>
+                </a:solidFill>
+                <a:effectLst/>
+                <a:latin typeface="+mn-lt"/>
+                <a:ea typeface="+mn-ea"/>
+                <a:cs typeface="+mn-cs"/>
+              </a:rPr>
+              <a:t>Inventory.find_product</a:t>
+            </a:r>
+            <a:r>
+              <a:rPr lang="en-US" sz="1200" kern="1200" dirty="0">
+                <a:solidFill>
+                  <a:schemeClr val="tx1"/>
+                </a:solidFill>
+                <a:effectLst/>
+                <a:latin typeface="+mn-lt"/>
+                <a:ea typeface="+mn-ea"/>
+                <a:cs typeface="+mn-cs"/>
+              </a:rPr>
+              <a:t>()</a:t>
+            </a:r>
+            <a:r>
+              <a:rPr lang="en-US" dirty="0">
+                <a:effectLst/>
+              </a:rPr>
+              <a:t> and </a:t>
+            </a:r>
+            <a:r>
+              <a:rPr lang="en-US" sz="1200" kern="1200" dirty="0" err="1">
+                <a:solidFill>
+                  <a:schemeClr val="tx1"/>
+                </a:solidFill>
+                <a:effectLst/>
+                <a:latin typeface="+mn-lt"/>
+                <a:ea typeface="+mn-ea"/>
+                <a:cs typeface="+mn-cs"/>
+              </a:rPr>
+              <a:t>remove_product</a:t>
+            </a:r>
+            <a:r>
+              <a:rPr lang="en-US" sz="1200" kern="1200" dirty="0">
+                <a:solidFill>
+                  <a:schemeClr val="tx1"/>
+                </a:solidFill>
+                <a:effectLst/>
+                <a:latin typeface="+mn-lt"/>
+                <a:ea typeface="+mn-ea"/>
+                <a:cs typeface="+mn-cs"/>
+              </a:rPr>
+              <a:t>()</a:t>
+            </a:r>
+            <a:r>
+              <a:rPr lang="en-US" dirty="0">
+                <a:effectLst/>
+              </a:rPr>
+              <a:t> raise </a:t>
+            </a:r>
+            <a:r>
+              <a:rPr lang="en-US" sz="1200" kern="1200" dirty="0" err="1">
+                <a:solidFill>
+                  <a:schemeClr val="tx1"/>
+                </a:solidFill>
+                <a:effectLst/>
+                <a:latin typeface="+mn-lt"/>
+                <a:ea typeface="+mn-ea"/>
+                <a:cs typeface="+mn-cs"/>
+              </a:rPr>
+              <a:t>InvalidProductError</a:t>
+            </a:r>
+            <a:r>
+              <a:rPr lang="en-US" dirty="0">
+                <a:effectLst/>
+              </a:rPr>
+              <a:t> when the ID isn't found.</a:t>
+            </a:r>
+          </a:p>
+          <a:p>
+            <a:br>
+              <a:rPr lang="en-US" b="1" dirty="0">
+                <a:effectLst/>
+              </a:rPr>
+            </a:br>
+            <a:r>
+              <a:rPr lang="en-US" b="1" dirty="0">
+                <a:effectLst/>
+              </a:rPr>
+              <a:t>The Big Picture</a:t>
+            </a:r>
+          </a:p>
+          <a:p>
+            <a:r>
+              <a:rPr lang="en-US" dirty="0">
+                <a:effectLst/>
+              </a:rPr>
+              <a:t>If you had to explain the whole system in two sentences: </a:t>
+            </a:r>
+            <a:r>
+              <a:rPr lang="en-US" sz="1200" kern="1200" dirty="0">
+                <a:solidFill>
+                  <a:schemeClr val="tx1"/>
+                </a:solidFill>
+                <a:effectLst/>
+                <a:latin typeface="+mn-lt"/>
+                <a:ea typeface="+mn-ea"/>
+                <a:cs typeface="+mn-cs"/>
+              </a:rPr>
+              <a:t>Inventory</a:t>
+            </a:r>
+            <a:r>
+              <a:rPr lang="en-US" dirty="0">
+                <a:effectLst/>
+              </a:rPr>
+              <a:t> is a box that holds </a:t>
+            </a:r>
+            <a:r>
+              <a:rPr lang="en-US" sz="1200" kern="1200" dirty="0">
+                <a:solidFill>
+                  <a:schemeClr val="tx1"/>
+                </a:solidFill>
+                <a:effectLst/>
+                <a:latin typeface="+mn-lt"/>
+                <a:ea typeface="+mn-ea"/>
+                <a:cs typeface="+mn-cs"/>
+              </a:rPr>
+              <a:t>Product</a:t>
+            </a:r>
+            <a:r>
+              <a:rPr lang="en-US" dirty="0">
+                <a:effectLst/>
+              </a:rPr>
+              <a:t> objects (some of which are </a:t>
+            </a:r>
+            <a:r>
+              <a:rPr lang="en-US" sz="1200" kern="1200" dirty="0" err="1">
+                <a:solidFill>
+                  <a:schemeClr val="tx1"/>
+                </a:solidFill>
+                <a:effectLst/>
                 <a:latin typeface="+mn-lt"/>
                 <a:ea typeface="+mn-ea"/>
                 <a:cs typeface="+mn-cs"/>
@@ -3279,252 +6631,98 @@
               <a:t>PerishableProduct</a:t>
             </a:r>
             <a:r>
-              <a:rPr lang="en-US" dirty="0"/>
-              <a:t> </a:t>
-            </a:r>
-            <a:r>
-              <a:rPr lang="en-US" b="1" dirty="0"/>
-              <a:t>adds</a:t>
-            </a:r>
-            <a:r>
-              <a:rPr lang="en-US" dirty="0"/>
-              <a:t> an </a:t>
+              <a:rPr lang="en-US" dirty="0">
+                <a:effectLst/>
+              </a:rPr>
+              <a:t> or </a:t>
             </a:r>
             <a:r>
               <a:rPr lang="en-US" sz="1200" kern="1200" dirty="0" err="1">
                 <a:solidFill>
                   <a:schemeClr val="tx1"/>
                 </a:solidFill>
-                <a:latin typeface="+mn-lt"/>
-                <a:ea typeface="+mn-ea"/>
-                <a:cs typeface="+mn-cs"/>
-              </a:rPr>
-              <a:t>expiry_date</a:t>
-            </a:r>
-            <a:r>
-              <a:rPr lang="en-US" dirty="0"/>
-              <a:t> and </a:t>
-            </a:r>
-            <a:r>
-              <a:rPr lang="en-US" b="1" dirty="0"/>
-              <a:t>overrides</a:t>
-            </a:r>
-            <a:r>
-              <a:rPr lang="en-US" dirty="0"/>
-              <a:t> </a:t>
+                <a:effectLst/>
+                <a:latin typeface="+mn-lt"/>
+                <a:ea typeface="+mn-ea"/>
+                <a:cs typeface="+mn-cs"/>
+              </a:rPr>
+              <a:t>DigitalProduct</a:t>
+            </a:r>
+            <a:r>
+              <a:rPr lang="en-US" dirty="0">
+                <a:effectLst/>
+              </a:rPr>
+              <a:t>), and </a:t>
             </a:r>
             <a:r>
               <a:rPr lang="en-US" sz="1200" kern="1200" dirty="0">
                 <a:solidFill>
                   <a:schemeClr val="tx1"/>
                 </a:solidFill>
-                <a:latin typeface="+mn-lt"/>
-                <a:ea typeface="+mn-ea"/>
-                <a:cs typeface="+mn-cs"/>
-              </a:rPr>
-              <a:t>sell()</a:t>
-            </a:r>
-            <a:r>
-              <a:rPr lang="en-US" dirty="0"/>
-              <a:t> and </a:t>
+                <a:effectLst/>
+                <a:latin typeface="+mn-lt"/>
+                <a:ea typeface="+mn-ea"/>
+                <a:cs typeface="+mn-cs"/>
+              </a:rPr>
+              <a:t>main.py</a:t>
+            </a:r>
+            <a:r>
+              <a:rPr lang="en-US" dirty="0">
+                <a:effectLst/>
+              </a:rPr>
+              <a:t> runs a menu loop that manipulates that box, recording every action in a separate </a:t>
             </a:r>
             <a:r>
               <a:rPr lang="en-US" sz="1200" kern="1200" dirty="0" err="1">
                 <a:solidFill>
                   <a:schemeClr val="tx1"/>
                 </a:solidFill>
-                <a:latin typeface="+mn-lt"/>
-                <a:ea typeface="+mn-ea"/>
-                <a:cs typeface="+mn-cs"/>
-              </a:rPr>
-              <a:t>to_dict</a:t>
+                <a:effectLst/>
+                <a:latin typeface="+mn-lt"/>
+                <a:ea typeface="+mn-ea"/>
+                <a:cs typeface="+mn-cs"/>
+              </a:rPr>
+              <a:t>TransactionLog</a:t>
+            </a:r>
+            <a:r>
+              <a:rPr lang="en-US" dirty="0">
+                <a:effectLst/>
+              </a:rPr>
+              <a:t>. The three custom exceptions are the tripwires that fire when something goes wrong, and they all get caught in one place, </a:t>
             </a:r>
             <a:r>
               <a:rPr lang="en-US" sz="1200" kern="1200" dirty="0">
                 <a:solidFill>
                   <a:schemeClr val="tx1"/>
                 </a:solidFill>
-                <a:latin typeface="+mn-lt"/>
-                <a:ea typeface="+mn-ea"/>
-                <a:cs typeface="+mn-cs"/>
-              </a:rPr>
-              <a:t>()</a:t>
-            </a:r>
-            <a:r>
-              <a:rPr lang="en-US" dirty="0"/>
-              <a:t>. "Override" means replacing the parent's version with a new one.</a:t>
-            </a:r>
-          </a:p>
-          <a:p>
-            <a:r>
-              <a:rPr lang="en-US" sz="1200" kern="1200" dirty="0" err="1">
-                <a:solidFill>
-                  <a:schemeClr val="tx1"/>
-                </a:solidFill>
-                <a:latin typeface="+mn-lt"/>
-                <a:ea typeface="+mn-ea"/>
-                <a:cs typeface="+mn-cs"/>
-              </a:rPr>
-              <a:t>DigitalProduct</a:t>
-            </a:r>
-            <a:r>
-              <a:rPr lang="en-US" dirty="0"/>
-              <a:t> </a:t>
-            </a:r>
-            <a:r>
-              <a:rPr lang="en-US" b="1" dirty="0"/>
-              <a:t>adds</a:t>
-            </a:r>
-            <a:r>
-              <a:rPr lang="en-US" dirty="0"/>
-              <a:t> a </a:t>
-            </a:r>
-            <a:r>
-              <a:rPr lang="en-US" sz="1200" kern="1200" dirty="0" err="1">
-                <a:solidFill>
-                  <a:schemeClr val="tx1"/>
-                </a:solidFill>
-                <a:latin typeface="+mn-lt"/>
-                <a:ea typeface="+mn-ea"/>
-                <a:cs typeface="+mn-cs"/>
-              </a:rPr>
-              <a:t>download_link</a:t>
-            </a:r>
-            <a:r>
-              <a:rPr lang="en-US" dirty="0"/>
-              <a:t>, sets </a:t>
-            </a:r>
-            <a:r>
-              <a:rPr lang="en-US" sz="1200" kern="1200" dirty="0">
-                <a:solidFill>
-                  <a:schemeClr val="tx1"/>
-                </a:solidFill>
-                <a:latin typeface="+mn-lt"/>
-                <a:ea typeface="+mn-ea"/>
-                <a:cs typeface="+mn-cs"/>
-              </a:rPr>
-              <a:t>quantity = 0</a:t>
-            </a:r>
-            <a:r>
-              <a:rPr lang="en-US" dirty="0"/>
-              <a:t> (infinite copies available since it's downloadable), and overrides </a:t>
-            </a:r>
-            <a:r>
-              <a:rPr lang="en-US" sz="1200" kern="1200" dirty="0">
-                <a:solidFill>
-                  <a:schemeClr val="tx1"/>
-                </a:solidFill>
-                <a:latin typeface="+mn-lt"/>
-                <a:ea typeface="+mn-ea"/>
-                <a:cs typeface="+mn-cs"/>
-              </a:rPr>
-              <a:t>sell()</a:t>
-            </a:r>
-            <a:r>
-              <a:rPr lang="en-US" dirty="0"/>
+                <a:effectLst/>
+                <a:latin typeface="+mn-lt"/>
+                <a:ea typeface="+mn-ea"/>
+                <a:cs typeface="+mn-cs"/>
+              </a:rPr>
+              <a:t>main.py</a:t>
+            </a:r>
+            <a:r>
+              <a:rPr lang="en-US" dirty="0">
+                <a:effectLst/>
+              </a:rPr>
               <a:t>.</a:t>
             </a:r>
           </a:p>
           <a:p>
-            <a:r>
-              <a:rPr lang="en-US" dirty="0"/>
-              <a:t>The </a:t>
-            </a:r>
-            <a:r>
-              <a:rPr lang="en-US" sz="1200" kern="1200" dirty="0">
-                <a:solidFill>
-                  <a:schemeClr val="tx1"/>
-                </a:solidFill>
-                <a:latin typeface="+mn-lt"/>
-                <a:ea typeface="+mn-ea"/>
-                <a:cs typeface="+mn-cs"/>
-              </a:rPr>
-              <a:t>"type"</a:t>
-            </a:r>
-            <a:r>
-              <a:rPr lang="en-US" dirty="0"/>
-              <a:t> field in JSON (</a:t>
-            </a:r>
-            <a:r>
-              <a:rPr lang="en-US" sz="1200" kern="1200" dirty="0">
-                <a:solidFill>
-                  <a:schemeClr val="tx1"/>
-                </a:solidFill>
-                <a:latin typeface="+mn-lt"/>
-                <a:ea typeface="+mn-ea"/>
-                <a:cs typeface="+mn-cs"/>
-              </a:rPr>
-              <a:t>"standard"</a:t>
-            </a:r>
-            <a:r>
-              <a:rPr lang="en-US" dirty="0"/>
-              <a:t>, </a:t>
-            </a:r>
-            <a:r>
-              <a:rPr lang="en-US" sz="1200" kern="1200" dirty="0">
-                <a:solidFill>
-                  <a:schemeClr val="tx1"/>
-                </a:solidFill>
-                <a:latin typeface="+mn-lt"/>
-                <a:ea typeface="+mn-ea"/>
-                <a:cs typeface="+mn-cs"/>
-              </a:rPr>
-              <a:t>"perishable"</a:t>
-            </a:r>
-            <a:r>
-              <a:rPr lang="en-US" dirty="0"/>
-              <a:t>, </a:t>
-            </a:r>
-            <a:r>
-              <a:rPr lang="en-US" sz="1200" kern="1200" dirty="0">
-                <a:solidFill>
-                  <a:schemeClr val="tx1"/>
-                </a:solidFill>
-                <a:latin typeface="+mn-lt"/>
-                <a:ea typeface="+mn-ea"/>
-                <a:cs typeface="+mn-cs"/>
-              </a:rPr>
-              <a:t>"digital"</a:t>
-            </a:r>
-            <a:r>
-              <a:rPr lang="en-US" dirty="0"/>
-              <a:t>) is how </a:t>
-            </a:r>
-            <a:r>
-              <a:rPr lang="en-US" sz="1200" kern="1200" dirty="0" err="1">
-                <a:solidFill>
-                  <a:schemeClr val="tx1"/>
-                </a:solidFill>
-                <a:latin typeface="+mn-lt"/>
-                <a:ea typeface="+mn-ea"/>
-                <a:cs typeface="+mn-cs"/>
-              </a:rPr>
-              <a:t>from_dict</a:t>
-            </a:r>
-            <a:r>
-              <a:rPr lang="en-US" sz="1200" kern="1200" dirty="0">
-                <a:solidFill>
-                  <a:schemeClr val="tx1"/>
-                </a:solidFill>
-                <a:latin typeface="+mn-lt"/>
-                <a:ea typeface="+mn-ea"/>
-                <a:cs typeface="+mn-cs"/>
-              </a:rPr>
-              <a:t>()</a:t>
-            </a:r>
-            <a:r>
-              <a:rPr lang="en-US" dirty="0"/>
-              <a:t> knows which subclass to build when loading data.</a:t>
-            </a:r>
-          </a:p>
-          <a:p>
             <a:endParaRPr lang="en-GB" dirty="0"/>
           </a:p>
         </p:txBody>
       </p:sp>
       <p:sp>
         <p:nvSpPr>
-          <p:cNvPr id="4" name="Slide Number Placeholder 3"/>
+          <p:cNvPr id="4" name="Slide Number Placeholder 3">
+            <a:extLst>
+              <a:ext uri="{FF2B5EF4-FFF2-40B4-BE49-F238E27FC236}">
+                <a16:creationId xmlns:a16="http://schemas.microsoft.com/office/drawing/2014/main" id="{322C605D-A559-621E-16A4-40EE2328EFD0}"/>
+              </a:ext>
+            </a:extLst>
+          </p:cNvPr>
           <p:cNvSpPr>
             <a:spLocks noGrp="1"/>
           </p:cNvSpPr>
@@ -3548,7 +6746,7 @@
     </p:spTree>
     <p:extLst>
       <p:ext uri="{BB962C8B-B14F-4D97-AF65-F5344CB8AC3E}">
-        <p14:creationId xmlns:p14="http://schemas.microsoft.com/office/powerpoint/2010/main" val="3480307173"/>
+        <p14:creationId xmlns:p14="http://schemas.microsoft.com/office/powerpoint/2010/main" val="494843843"/>
       </p:ext>
     </p:extLst>
   </p:cSld>
@@ -9494,7 +12692,7 @@
 </file>
 
 <file path=ppt/slides/slide12.xml><?xml version="1.0" encoding="utf-8"?>
-<p:sld xmlns:a="http://schemas.openxmlformats.org/drawingml/2006/main" xmlns:r="http://schemas.openxmlformats.org/officeDocument/2006/relationships" xmlns:p="http://schemas.openxmlformats.org/presentationml/2006/main" show="0">
+<p:sld xmlns:a="http://schemas.openxmlformats.org/drawingml/2006/main" xmlns:r="http://schemas.openxmlformats.org/officeDocument/2006/relationships" xmlns:p="http://schemas.openxmlformats.org/presentationml/2006/main">
   <p:cSld>
     <p:spTree>
       <p:nvGrpSpPr>
@@ -12338,7 +15536,7 @@
         <p:spPr>
           <a:xfrm>
             <a:off x="1005840" y="2331720"/>
-            <a:ext cx="5029200" cy="3611880"/>
+            <a:ext cx="5029200" cy="841256"/>
           </a:xfrm>
           <a:prstGeom prst="rect">
             <a:avLst/>
@@ -12357,7 +15555,7 @@
               </a:spcAft>
             </a:pPr>
             <a:r>
-              <a:rPr sz="1400" b="1">
+              <a:rPr sz="1400" b="1" dirty="0">
                 <a:solidFill>
                   <a:srgbClr val="F4A261"/>
                 </a:solidFill>
@@ -12366,13 +15564,40 @@
               <a:t>■  </a:t>
             </a:r>
             <a:r>
-              <a:rPr sz="1400">
+              <a:rPr sz="1400" dirty="0">
                 <a:solidFill>
                   <a:srgbClr val="1F2D3D"/>
                 </a:solidFill>
                 <a:latin typeface="Calibri"/>
               </a:rPr>
-              <a:t>Designing a clean class hierarchy upfront.</a:t>
+              <a:t>Designing a clean class hierarchy up</a:t>
+            </a:r>
+            <a:r>
+              <a:rPr lang="en-US" sz="1400" dirty="0">
+                <a:solidFill>
+                  <a:srgbClr val="1F2D3D"/>
+                </a:solidFill>
+                <a:latin typeface="Calibri"/>
+              </a:rPr>
+              <a:t> </a:t>
+            </a:r>
+            <a:r>
+              <a:rPr sz="1400" dirty="0" err="1">
+                <a:solidFill>
+                  <a:srgbClr val="1F2D3D"/>
+                </a:solidFill>
+                <a:latin typeface="Calibri"/>
+              </a:rPr>
+              <a:t>fron</a:t>
+            </a:r>
+            <a:r>
+              <a:rPr lang="en-GB" sz="1400" dirty="0">
+                <a:solidFill>
+                  <a:srgbClr val="1F2D3D"/>
+                </a:solidFill>
+                <a:latin typeface="Calibri"/>
+              </a:rPr>
+              <a:t>t.</a:t>
             </a:r>
           </a:p>
           <a:p>
@@ -12382,22 +15607,24 @@
               </a:spcAft>
             </a:pPr>
             <a:r>
-              <a:rPr sz="1400" b="1">
+              <a:rPr lang="en-GB" sz="1400" b="1" dirty="0">
                 <a:solidFill>
                   <a:srgbClr val="F4A261"/>
                 </a:solidFill>
                 <a:latin typeface="Calibri"/>
               </a:rPr>
-              <a:t>■  </a:t>
-            </a:r>
-            <a:r>
-              <a:rPr sz="1400">
-                <a:solidFill>
-                  <a:srgbClr val="1F2D3D"/>
-                </a:solidFill>
-                <a:latin typeface="Calibri"/>
-              </a:rPr>
-              <a:t>Getting serialization right across subclasses.</a:t>
+              <a:t>■ </a:t>
+            </a:r>
+            <a:r>
+              <a:rPr lang="en-GB" sz="1400" dirty="0">
+                <a:solidFill>
+                  <a:schemeClr val="tx2">
+                    <a:lumMod val="50000"/>
+                  </a:schemeClr>
+                </a:solidFill>
+                <a:latin typeface="Calibri"/>
+              </a:rPr>
+              <a:t>Team collaboration across different work schedule  </a:t>
             </a:r>
           </a:p>
           <a:p>
@@ -12407,7 +15634,7 @@
               </a:spcAft>
             </a:pPr>
             <a:r>
-              <a:rPr sz="1400" b="1">
+              <a:rPr sz="1400" b="1" dirty="0">
                 <a:solidFill>
                   <a:srgbClr val="F4A261"/>
                 </a:solidFill>
@@ -12416,63 +15643,13 @@
               <a:t>■  </a:t>
             </a:r>
             <a:r>
-              <a:rPr sz="1400">
+              <a:rPr sz="1400" dirty="0">
                 <a:solidFill>
                   <a:srgbClr val="1F2D3D"/>
                 </a:solidFill>
                 <a:latin typeface="Calibri"/>
               </a:rPr>
-              <a:t>Handling corrupted / partial JSON gracefully.</a:t>
-            </a:r>
-          </a:p>
-          <a:p>
-            <a:pPr algn="l">
-              <a:spcAft>
-                <a:spcPts val="400"/>
-              </a:spcAft>
-            </a:pPr>
-            <a:r>
-              <a:rPr sz="1400" b="1">
-                <a:solidFill>
-                  <a:srgbClr val="F4A261"/>
-                </a:solidFill>
-                <a:latin typeface="Calibri"/>
-              </a:rPr>
-              <a:t>■  </a:t>
-            </a:r>
-            <a:r>
-              <a:rPr sz="1400">
-                <a:solidFill>
-                  <a:srgbClr val="1F2D3D"/>
-                </a:solidFill>
-                <a:latin typeface="Calibri"/>
-              </a:rPr>
               <a:t>Coordinating Git branches across the team.</a:t>
-            </a:r>
-          </a:p>
-          <a:p>
-            <a:pPr algn="l">
-              <a:spcAft>
-                <a:spcPts val="400"/>
-              </a:spcAft>
-            </a:pPr>
-            <a:r>
-              <a:rPr sz="1400" b="1">
-                <a:solidFill>
-                  <a:srgbClr val="F4A261"/>
-                </a:solidFill>
-                <a:latin typeface="Calibri"/>
-              </a:rPr>
-              <a:t>■  </a:t>
-            </a:r>
-            <a:r>
-              <a:rPr sz="1400">
-                <a:solidFill>
-                  <a:srgbClr val="1F2D3D"/>
-                </a:solidFill>
-                <a:latin typeface="Calibri"/>
-              </a:rPr>
-              <a:t>Choosing between exceptions and return codes.</a:t>
             </a:r>
           </a:p>
         </p:txBody>
@@ -12568,7 +15745,7 @@
         <p:spPr>
           <a:xfrm>
             <a:off x="6537960" y="2331720"/>
-            <a:ext cx="5029200" cy="3611880"/>
+            <a:ext cx="5029200" cy="1107996"/>
           </a:xfrm>
           <a:prstGeom prst="rect">
             <a:avLst/>
@@ -12587,7 +15764,7 @@
               </a:spcAft>
             </a:pPr>
             <a:r>
-              <a:rPr sz="1400" b="1">
+              <a:rPr sz="1400" b="1" dirty="0">
                 <a:solidFill>
                   <a:srgbClr val="F4A261"/>
                 </a:solidFill>
@@ -12596,7 +15773,7 @@
               <a:t>■  </a:t>
             </a:r>
             <a:r>
-              <a:rPr sz="1400">
+              <a:rPr sz="1400" dirty="0">
                 <a:solidFill>
                   <a:srgbClr val="1F2D3D"/>
                 </a:solidFill>
@@ -12612,7 +15789,7 @@
               </a:spcAft>
             </a:pPr>
             <a:r>
-              <a:rPr sz="1400" b="1">
+              <a:rPr sz="1400" b="1" dirty="0">
                 <a:solidFill>
                   <a:srgbClr val="F4A261"/>
                 </a:solidFill>
@@ -12621,7 +15798,7 @@
               <a:t>■  </a:t>
             </a:r>
             <a:r>
-              <a:rPr sz="1400">
+              <a:rPr sz="1400" dirty="0">
                 <a:solidFill>
                   <a:srgbClr val="1F2D3D"/>
                 </a:solidFill>
@@ -12637,7 +15814,7 @@
               </a:spcAft>
             </a:pPr>
             <a:r>
-              <a:rPr sz="1400" b="1">
+              <a:rPr sz="1400" b="1" dirty="0">
                 <a:solidFill>
                   <a:srgbClr val="F4A261"/>
                 </a:solidFill>
@@ -12646,7 +15823,7 @@
               <a:t>■  </a:t>
             </a:r>
             <a:r>
-              <a:rPr sz="1400">
+              <a:rPr sz="1400" dirty="0">
                 <a:solidFill>
                   <a:srgbClr val="1F2D3D"/>
                 </a:solidFill>
@@ -12662,7 +15839,7 @@
               </a:spcAft>
             </a:pPr>
             <a:r>
-              <a:rPr sz="1400" b="1">
+              <a:rPr sz="1400" b="1" dirty="0">
                 <a:solidFill>
                   <a:srgbClr val="F4A261"/>
                 </a:solidFill>
@@ -12671,32 +15848,7 @@
               <a:t>■  </a:t>
             </a:r>
             <a:r>
-              <a:rPr sz="1400">
-                <a:solidFill>
-                  <a:srgbClr val="1F2D3D"/>
-                </a:solidFill>
-                <a:latin typeface="Calibri"/>
-              </a:rPr>
-              <a:t>Small modules are easier to reason about.</a:t>
-            </a:r>
-          </a:p>
-          <a:p>
-            <a:pPr algn="l">
-              <a:spcAft>
-                <a:spcPts val="400"/>
-              </a:spcAft>
-            </a:pPr>
-            <a:r>
-              <a:rPr sz="1400" b="1">
-                <a:solidFill>
-                  <a:srgbClr val="F4A261"/>
-                </a:solidFill>
-                <a:latin typeface="Calibri"/>
-              </a:rPr>
-              <a:t>■  </a:t>
-            </a:r>
-            <a:r>
-              <a:rPr sz="1400">
+              <a:rPr sz="1400" dirty="0">
                 <a:solidFill>
                   <a:srgbClr val="1F2D3D"/>
                 </a:solidFill>
@@ -17693,7 +20845,7 @@
         </p:nvSpPr>
         <p:spPr>
           <a:xfrm>
-            <a:off x="0" y="0"/>
+            <a:off x="320040" y="0"/>
             <a:ext cx="12191695" cy="6858000"/>
           </a:xfrm>
           <a:prstGeom prst="rect">
@@ -17966,120 +21118,6 @@
           </a:p>
         </p:txBody>
       </p:sp>
-      <p:sp>
-        <p:nvSpPr>
-          <p:cNvPr id="9" name="Rounded Rectangle 8"/>
-          <p:cNvSpPr/>
-          <p:nvPr/>
-        </p:nvSpPr>
-        <p:spPr>
-          <a:xfrm>
-            <a:off x="914400" y="3200400"/>
-            <a:ext cx="2834640" cy="914400"/>
-          </a:xfrm>
-          <a:prstGeom prst="roundRect">
-            <a:avLst/>
-          </a:prstGeom>
-          <a:solidFill>
-            <a:srgbClr val="F4A261"/>
-          </a:solidFill>
-          <a:ln>
-            <a:noFill/>
-          </a:ln>
-        </p:spPr>
-        <p:style>
-          <a:lnRef idx="1">
-            <a:schemeClr val="accent1"/>
-          </a:lnRef>
-          <a:fillRef idx="3">
-            <a:schemeClr val="accent1"/>
-          </a:fillRef>
-          <a:effectRef idx="2">
-            <a:schemeClr val="accent1"/>
-          </a:effectRef>
-          <a:fontRef idx="minor">
-            <a:schemeClr val="lt1"/>
-          </a:fontRef>
-        </p:style>
-        <p:txBody>
-          <a:bodyPr rtlCol="0" anchor="ctr"/>
-          <a:lstStyle/>
-          <a:p>
-            <a:pPr algn="ctr"/>
-            <a:endParaRPr/>
-          </a:p>
-        </p:txBody>
-      </p:sp>
-      <p:sp>
-        <p:nvSpPr>
-          <p:cNvPr id="10" name="TextBox 9"/>
-          <p:cNvSpPr txBox="1"/>
-          <p:nvPr/>
-        </p:nvSpPr>
-        <p:spPr>
-          <a:xfrm>
-            <a:off x="914400" y="3337560"/>
-            <a:ext cx="2834640" cy="365760"/>
-          </a:xfrm>
-          <a:prstGeom prst="rect">
-            <a:avLst/>
-          </a:prstGeom>
-          <a:noFill/>
-        </p:spPr>
-        <p:txBody>
-          <a:bodyPr wrap="square" lIns="45720" tIns="18288" rIns="45720" bIns="18288">
-            <a:spAutoFit/>
-          </a:bodyPr>
-          <a:lstStyle/>
-          <a:p>
-            <a:pPr algn="ctr"/>
-            <a:r>
-              <a:rPr sz="1600" b="1">
-                <a:solidFill>
-                  <a:srgbClr val="FFFFFF"/>
-                </a:solidFill>
-                <a:latin typeface="Calibri"/>
-              </a:rPr>
-              <a:t>Product</a:t>
-            </a:r>
-          </a:p>
-        </p:txBody>
-      </p:sp>
-      <p:sp>
-        <p:nvSpPr>
-          <p:cNvPr id="11" name="TextBox 10"/>
-          <p:cNvSpPr txBox="1"/>
-          <p:nvPr/>
-        </p:nvSpPr>
-        <p:spPr>
-          <a:xfrm>
-            <a:off x="914400" y="3703320"/>
-            <a:ext cx="2834640" cy="365760"/>
-          </a:xfrm>
-          <a:prstGeom prst="rect">
-            <a:avLst/>
-          </a:prstGeom>
-          <a:noFill/>
-        </p:spPr>
-        <p:txBody>
-          <a:bodyPr wrap="square" lIns="45720" tIns="18288" rIns="45720" bIns="18288">
-            <a:spAutoFit/>
-          </a:bodyPr>
-          <a:lstStyle/>
-          <a:p>
-            <a:pPr algn="ctr"/>
-            <a:r>
-              <a:rPr sz="1200" b="0">
-                <a:solidFill>
-                  <a:srgbClr val="FFFFFF"/>
-                </a:solidFill>
-                <a:latin typeface="Calibri"/>
-              </a:rPr>
-              <a:t>Standard stock item</a:t>
-            </a:r>
-          </a:p>
-        </p:txBody>
-      </p:sp>
       <p:cxnSp>
         <p:nvCxnSpPr>
           <p:cNvPr id="12" name="Connector 11"/>
@@ -18115,155 +21153,168 @@
           </a:fontRef>
         </p:style>
       </p:cxnSp>
-      <p:sp>
-        <p:nvSpPr>
-          <p:cNvPr id="13" name="Rounded Rectangle 12"/>
-          <p:cNvSpPr/>
+      <p:grpSp>
+        <p:nvGrpSpPr>
+          <p:cNvPr id="25" name="Group 24">
+            <a:extLst>
+              <a:ext uri="{FF2B5EF4-FFF2-40B4-BE49-F238E27FC236}">
+                <a16:creationId xmlns:a16="http://schemas.microsoft.com/office/drawing/2014/main" id="{868B5EE4-B59D-A5E0-2ACA-501E037C50EA}"/>
+              </a:ext>
+            </a:extLst>
+          </p:cNvPr>
+          <p:cNvGrpSpPr/>
           <p:nvPr/>
-        </p:nvSpPr>
-        <p:spPr>
-          <a:xfrm>
-            <a:off x="4663440" y="3200400"/>
-            <a:ext cx="2834640" cy="914400"/>
-          </a:xfrm>
-          <a:prstGeom prst="roundRect">
-            <a:avLst/>
-          </a:prstGeom>
-          <a:solidFill>
-            <a:srgbClr val="F4A261"/>
-          </a:solidFill>
-          <a:ln>
+        </p:nvGrpSpPr>
+        <p:grpSpPr>
+          <a:xfrm>
+            <a:off x="859404" y="3242541"/>
+            <a:ext cx="2906202" cy="914400"/>
+            <a:chOff x="1371600" y="3860358"/>
+            <a:chExt cx="2906202" cy="914400"/>
+          </a:xfrm>
+        </p:grpSpPr>
+        <p:grpSp>
+          <p:nvGrpSpPr>
+            <p:cNvPr id="24" name="Group 23">
+              <a:extLst>
+                <a:ext uri="{FF2B5EF4-FFF2-40B4-BE49-F238E27FC236}">
+                  <a16:creationId xmlns:a16="http://schemas.microsoft.com/office/drawing/2014/main" id="{3A046D46-9C8F-B8E3-0F4E-1BAD0A167360}"/>
+                </a:ext>
+              </a:extLst>
+            </p:cNvPr>
+            <p:cNvGrpSpPr/>
+            <p:nvPr/>
+          </p:nvGrpSpPr>
+          <p:grpSpPr>
+            <a:xfrm>
+              <a:off x="1443162" y="3860358"/>
+              <a:ext cx="2834640" cy="914400"/>
+              <a:chOff x="4663440" y="3200400"/>
+              <a:chExt cx="2834640" cy="914400"/>
+            </a:xfrm>
+          </p:grpSpPr>
+          <p:sp>
+            <p:nvSpPr>
+              <p:cNvPr id="13" name="Rounded Rectangle 12"/>
+              <p:cNvSpPr/>
+              <p:nvPr/>
+            </p:nvSpPr>
+            <p:spPr>
+              <a:xfrm>
+                <a:off x="4663440" y="3200400"/>
+                <a:ext cx="2834640" cy="914400"/>
+              </a:xfrm>
+              <a:prstGeom prst="roundRect">
+                <a:avLst/>
+              </a:prstGeom>
+              <a:solidFill>
+                <a:srgbClr val="F4A261"/>
+              </a:solidFill>
+              <a:ln>
+                <a:noFill/>
+              </a:ln>
+            </p:spPr>
+            <p:style>
+              <a:lnRef idx="1">
+                <a:schemeClr val="accent1"/>
+              </a:lnRef>
+              <a:fillRef idx="3">
+                <a:schemeClr val="accent1"/>
+              </a:fillRef>
+              <a:effectRef idx="2">
+                <a:schemeClr val="accent1"/>
+              </a:effectRef>
+              <a:fontRef idx="minor">
+                <a:schemeClr val="lt1"/>
+              </a:fontRef>
+            </p:style>
+            <p:txBody>
+              <a:bodyPr rtlCol="0" anchor="ctr"/>
+              <a:lstStyle/>
+              <a:p>
+                <a:pPr algn="ctr"/>
+                <a:endParaRPr/>
+              </a:p>
+            </p:txBody>
+          </p:sp>
+          <p:sp>
+            <p:nvSpPr>
+              <p:cNvPr id="15" name="TextBox 14"/>
+              <p:cNvSpPr txBox="1"/>
+              <p:nvPr/>
+            </p:nvSpPr>
+            <p:spPr>
+              <a:xfrm>
+                <a:off x="4663440" y="3703320"/>
+                <a:ext cx="2834640" cy="365760"/>
+              </a:xfrm>
+              <a:prstGeom prst="rect">
+                <a:avLst/>
+              </a:prstGeom>
+              <a:noFill/>
+            </p:spPr>
+            <p:txBody>
+              <a:bodyPr wrap="square" lIns="45720" tIns="18288" rIns="45720" bIns="18288">
+                <a:spAutoFit/>
+              </a:bodyPr>
+              <a:lstStyle/>
+              <a:p>
+                <a:pPr algn="ctr"/>
+                <a:r>
+                  <a:rPr sz="1200" b="0">
+                    <a:solidFill>
+                      <a:srgbClr val="FFFFFF"/>
+                    </a:solidFill>
+                    <a:latin typeface="Calibri"/>
+                  </a:rPr>
+                  <a:t>Has expiry_date; expires</a:t>
+                </a:r>
+              </a:p>
+            </p:txBody>
+          </p:sp>
+        </p:grpSp>
+        <p:sp>
+          <p:nvSpPr>
+            <p:cNvPr id="14" name="TextBox 13"/>
+            <p:cNvSpPr txBox="1"/>
+            <p:nvPr/>
+          </p:nvSpPr>
+          <p:spPr>
+            <a:xfrm>
+              <a:off x="1371600" y="3977640"/>
+              <a:ext cx="2834640" cy="365760"/>
+            </a:xfrm>
+            <a:prstGeom prst="rect">
+              <a:avLst/>
+            </a:prstGeom>
             <a:noFill/>
-          </a:ln>
-        </p:spPr>
-        <p:style>
-          <a:lnRef idx="1">
-            <a:schemeClr val="accent1"/>
-          </a:lnRef>
-          <a:fillRef idx="3">
-            <a:schemeClr val="accent1"/>
-          </a:fillRef>
-          <a:effectRef idx="2">
-            <a:schemeClr val="accent1"/>
-          </a:effectRef>
-          <a:fontRef idx="minor">
-            <a:schemeClr val="lt1"/>
-          </a:fontRef>
-        </p:style>
-        <p:txBody>
-          <a:bodyPr rtlCol="0" anchor="ctr"/>
-          <a:lstStyle/>
-          <a:p>
-            <a:pPr algn="ctr"/>
-            <a:endParaRPr/>
-          </a:p>
-        </p:txBody>
-      </p:sp>
-      <p:sp>
-        <p:nvSpPr>
-          <p:cNvPr id="14" name="TextBox 13"/>
-          <p:cNvSpPr txBox="1"/>
-          <p:nvPr/>
-        </p:nvSpPr>
-        <p:spPr>
-          <a:xfrm>
-            <a:off x="4663440" y="3337560"/>
-            <a:ext cx="2834640" cy="365760"/>
-          </a:xfrm>
-          <a:prstGeom prst="rect">
-            <a:avLst/>
-          </a:prstGeom>
-          <a:noFill/>
-        </p:spPr>
-        <p:txBody>
-          <a:bodyPr wrap="square" lIns="45720" tIns="18288" rIns="45720" bIns="18288">
-            <a:spAutoFit/>
-          </a:bodyPr>
-          <a:lstStyle/>
-          <a:p>
-            <a:pPr algn="ctr"/>
-            <a:r>
-              <a:rPr sz="1600" b="1">
+          </p:spPr>
+          <p:txBody>
+            <a:bodyPr wrap="square" lIns="45720" tIns="18288" rIns="45720" bIns="18288">
+              <a:spAutoFit/>
+            </a:bodyPr>
+            <a:lstStyle/>
+            <a:p>
+              <a:pPr algn="ctr"/>
+              <a:r>
+                <a:rPr sz="1600" b="1" dirty="0" err="1">
+                  <a:solidFill>
+                    <a:srgbClr val="FFFFFF"/>
+                  </a:solidFill>
+                  <a:latin typeface="Calibri"/>
+                </a:rPr>
+                <a:t>PerishableProduct</a:t>
+              </a:r>
+              <a:endParaRPr sz="1600" b="1" dirty="0">
                 <a:solidFill>
                   <a:srgbClr val="FFFFFF"/>
                 </a:solidFill>
                 <a:latin typeface="Calibri"/>
-              </a:rPr>
-              <a:t>PerishableProduct</a:t>
-            </a:r>
-          </a:p>
-        </p:txBody>
-      </p:sp>
-      <p:sp>
-        <p:nvSpPr>
-          <p:cNvPr id="15" name="TextBox 14"/>
-          <p:cNvSpPr txBox="1"/>
-          <p:nvPr/>
-        </p:nvSpPr>
-        <p:spPr>
-          <a:xfrm>
-            <a:off x="4663440" y="3703320"/>
-            <a:ext cx="2834640" cy="365760"/>
-          </a:xfrm>
-          <a:prstGeom prst="rect">
-            <a:avLst/>
-          </a:prstGeom>
-          <a:noFill/>
-        </p:spPr>
-        <p:txBody>
-          <a:bodyPr wrap="square" lIns="45720" tIns="18288" rIns="45720" bIns="18288">
-            <a:spAutoFit/>
-          </a:bodyPr>
-          <a:lstStyle/>
-          <a:p>
-            <a:pPr algn="ctr"/>
-            <a:r>
-              <a:rPr sz="1200" b="0">
-                <a:solidFill>
-                  <a:srgbClr val="FFFFFF"/>
-                </a:solidFill>
-                <a:latin typeface="Calibri"/>
-              </a:rPr>
-              <a:t>Has expiry_date; expires</a:t>
-            </a:r>
-          </a:p>
-        </p:txBody>
-      </p:sp>
-      <p:cxnSp>
-        <p:nvCxnSpPr>
-          <p:cNvPr id="16" name="Connector 15"/>
-          <p:cNvCxnSpPr/>
-          <p:nvPr/>
-        </p:nvCxnSpPr>
-        <p:spPr>
-          <a:xfrm flipV="1">
-            <a:off x="6080760" y="2560320"/>
-            <a:ext cx="0" cy="640080"/>
-          </a:xfrm>
-          <a:prstGeom prst="line">
-            <a:avLst/>
-          </a:prstGeom>
-          <a:ln w="19050">
-            <a:solidFill>
-              <a:srgbClr val="0E3B66"/>
-            </a:solidFill>
-          </a:ln>
-        </p:spPr>
-        <p:style>
-          <a:lnRef idx="2">
-            <a:schemeClr val="accent1"/>
-          </a:lnRef>
-          <a:fillRef idx="0">
-            <a:schemeClr val="accent1"/>
-          </a:fillRef>
-          <a:effectRef idx="1">
-            <a:schemeClr val="accent1"/>
-          </a:effectRef>
-          <a:fontRef idx="minor">
-            <a:schemeClr val="tx1"/>
-          </a:fontRef>
-        </p:style>
-      </p:cxnSp>
+              </a:endParaRPr>
+            </a:p>
+          </p:txBody>
+        </p:sp>
+      </p:grpSp>
       <p:sp>
         <p:nvSpPr>
           <p:cNvPr id="17" name="Rounded Rectangle 16"/>
@@ -18272,7 +21323,7 @@
         </p:nvSpPr>
         <p:spPr>
           <a:xfrm>
-            <a:off x="8412480" y="3200400"/>
+            <a:off x="8426394" y="3223260"/>
             <a:ext cx="2834640" cy="914400"/>
           </a:xfrm>
           <a:prstGeom prst="roundRect">
@@ -18619,7 +21670,13 @@
   <p:cSld>
     <p:spTree>
       <p:nvGrpSpPr>
-        <p:cNvPr id="1" name=""/>
+        <p:cNvPr id="1" name="">
+          <a:extLst>
+            <a:ext uri="{FF2B5EF4-FFF2-40B4-BE49-F238E27FC236}">
+              <a16:creationId xmlns:a16="http://schemas.microsoft.com/office/drawing/2014/main" id="{2B36C897-92E7-D652-491F-CAF9C7285806}"/>
+            </a:ext>
+          </a:extLst>
+        </p:cNvPr>
         <p:cNvGrpSpPr/>
         <p:nvPr/>
       </p:nvGrpSpPr>
@@ -18633,51 +21690,13 @@
       </p:grpSpPr>
       <p:sp>
         <p:nvSpPr>
-          <p:cNvPr id="2" name="Rectangle 1"/>
-          <p:cNvSpPr/>
-          <p:nvPr/>
-        </p:nvSpPr>
-        <p:spPr>
-          <a:xfrm>
-            <a:off x="0" y="0"/>
-            <a:ext cx="12192000" cy="6858000"/>
-          </a:xfrm>
-          <a:prstGeom prst="rect">
-            <a:avLst/>
-          </a:prstGeom>
-          <a:solidFill>
-            <a:srgbClr val="F5F7FA"/>
-          </a:solidFill>
-          <a:ln>
-            <a:noFill/>
-          </a:ln>
-        </p:spPr>
-        <p:style>
-          <a:lnRef idx="1">
-            <a:schemeClr val="accent1"/>
-          </a:lnRef>
-          <a:fillRef idx="3">
-            <a:schemeClr val="accent1"/>
-          </a:fillRef>
-          <a:effectRef idx="2">
-            <a:schemeClr val="accent1"/>
-          </a:effectRef>
-          <a:fontRef idx="minor">
-            <a:schemeClr val="lt1"/>
-          </a:fontRef>
-        </p:style>
-        <p:txBody>
-          <a:bodyPr rtlCol="0" anchor="ctr"/>
-          <a:lstStyle/>
-          <a:p>
-            <a:pPr algn="ctr"/>
-            <a:endParaRPr/>
-          </a:p>
-        </p:txBody>
-      </p:sp>
-      <p:sp>
-        <p:nvSpPr>
-          <p:cNvPr id="3" name="Rectangle 2"/>
+          <p:cNvPr id="3" name="Rectangle 2">
+            <a:extLst>
+              <a:ext uri="{FF2B5EF4-FFF2-40B4-BE49-F238E27FC236}">
+                <a16:creationId xmlns:a16="http://schemas.microsoft.com/office/drawing/2014/main" id="{08E4AA62-2863-A07B-22A0-010A58D88C17}"/>
+              </a:ext>
+            </a:extLst>
+          </p:cNvPr>
           <p:cNvSpPr/>
           <p:nvPr/>
         </p:nvSpPr>
@@ -18721,7 +21740,13 @@
       </p:sp>
       <p:sp>
         <p:nvSpPr>
-          <p:cNvPr id="4" name="TextBox 3"/>
+          <p:cNvPr id="4" name="TextBox 3">
+            <a:extLst>
+              <a:ext uri="{FF2B5EF4-FFF2-40B4-BE49-F238E27FC236}">
+                <a16:creationId xmlns:a16="http://schemas.microsoft.com/office/drawing/2014/main" id="{E2F12EFF-7441-929F-F1D3-9DBE80A3E931}"/>
+              </a:ext>
+            </a:extLst>
+          </p:cNvPr>
           <p:cNvSpPr txBox="1"/>
           <p:nvPr/>
         </p:nvSpPr>
@@ -18756,7 +21781,13 @@
       </p:sp>
       <p:sp>
         <p:nvSpPr>
-          <p:cNvPr id="5" name="Rectangle 4"/>
+          <p:cNvPr id="5" name="Rectangle 4">
+            <a:extLst>
+              <a:ext uri="{FF2B5EF4-FFF2-40B4-BE49-F238E27FC236}">
+                <a16:creationId xmlns:a16="http://schemas.microsoft.com/office/drawing/2014/main" id="{0169D1F2-0DA1-86D3-6C9F-7CD3E804621E}"/>
+              </a:ext>
+            </a:extLst>
+          </p:cNvPr>
           <p:cNvSpPr/>
           <p:nvPr/>
         </p:nvSpPr>
@@ -18800,14 +21831,20 @@
       </p:sp>
       <p:sp>
         <p:nvSpPr>
-          <p:cNvPr id="6" name="TextBox 5"/>
+          <p:cNvPr id="36" name="TextBox 35">
+            <a:extLst>
+              <a:ext uri="{FF2B5EF4-FFF2-40B4-BE49-F238E27FC236}">
+                <a16:creationId xmlns:a16="http://schemas.microsoft.com/office/drawing/2014/main" id="{6E98F018-7716-A6CC-BC6C-919A9A86677E}"/>
+              </a:ext>
+            </a:extLst>
+          </p:cNvPr>
           <p:cNvSpPr txBox="1"/>
           <p:nvPr/>
         </p:nvSpPr>
         <p:spPr>
           <a:xfrm>
-            <a:off x="640080" y="1143000"/>
-            <a:ext cx="10972800" cy="457200"/>
+            <a:off x="8275320" y="4206240"/>
+            <a:ext cx="3383280" cy="228600"/>
           </a:xfrm>
           <a:prstGeom prst="rect">
             <a:avLst/>
@@ -18820,314 +21857,42 @@
           </a:bodyPr>
           <a:lstStyle/>
           <a:p>
-            <a:pPr algn="l"/>
-            <a:r>
-              <a:rPr sz="1600" b="0">
-                <a:solidFill>
-                  <a:srgbClr val="6B7280"/>
-                </a:solidFill>
-                <a:latin typeface="Calibri"/>
-              </a:rPr>
-              <a:t>UML hierarchy: base class and its specialised subclasses</a:t>
-            </a:r>
-          </a:p>
-        </p:txBody>
-      </p:sp>
-      <p:sp>
-        <p:nvSpPr>
-          <p:cNvPr id="7" name="Rounded Rectangle 6"/>
-          <p:cNvSpPr/>
+            <a:pPr algn="ctr"/>
+            <a:r>
+              <a:rPr sz="1000" b="0">
+                <a:solidFill>
+                  <a:srgbClr val="FFFFFF"/>
+                </a:solidFill>
+                <a:latin typeface="Calibri"/>
+              </a:rPr>
+              <a:t>&lt;&lt; subclass &gt;&gt;</a:t>
+            </a:r>
+          </a:p>
+        </p:txBody>
+      </p:sp>
+      <p:cxnSp>
+        <p:nvCxnSpPr>
+          <p:cNvPr id="43" name="Connector 42">
+            <a:extLst>
+              <a:ext uri="{FF2B5EF4-FFF2-40B4-BE49-F238E27FC236}">
+                <a16:creationId xmlns:a16="http://schemas.microsoft.com/office/drawing/2014/main" id="{A537C658-A1F6-4374-F7FD-ED89DA9FA1FC}"/>
+              </a:ext>
+            </a:extLst>
+          </p:cNvPr>
+          <p:cNvCxnSpPr/>
           <p:nvPr/>
-        </p:nvSpPr>
-        <p:spPr>
-          <a:xfrm>
-            <a:off x="4572000" y="1600200"/>
-            <a:ext cx="3017520" cy="1920240"/>
-          </a:xfrm>
-          <a:prstGeom prst="roundRect">
+        </p:nvCxnSpPr>
+        <p:spPr>
+          <a:xfrm>
+            <a:off x="0" y="3806688"/>
+            <a:ext cx="0" cy="0"/>
+          </a:xfrm>
+          <a:prstGeom prst="line">
             <a:avLst/>
           </a:prstGeom>
-          <a:solidFill>
-            <a:srgbClr val="FFFFFF"/>
-          </a:solidFill>
           <a:ln w="22225">
             <a:solidFill>
               <a:srgbClr val="0E3B66"/>
-            </a:solidFill>
-          </a:ln>
-        </p:spPr>
-        <p:style>
-          <a:lnRef idx="1">
-            <a:schemeClr val="accent1"/>
-          </a:lnRef>
-          <a:fillRef idx="3">
-            <a:schemeClr val="accent1"/>
-          </a:fillRef>
-          <a:effectRef idx="2">
-            <a:schemeClr val="accent1"/>
-          </a:effectRef>
-          <a:fontRef idx="minor">
-            <a:schemeClr val="lt1"/>
-          </a:fontRef>
-        </p:style>
-        <p:txBody>
-          <a:bodyPr rtlCol="0" anchor="ctr"/>
-          <a:lstStyle/>
-          <a:p>
-            <a:pPr algn="ctr"/>
-            <a:endParaRPr/>
-          </a:p>
-        </p:txBody>
-      </p:sp>
-      <p:sp>
-        <p:nvSpPr>
-          <p:cNvPr id="8" name="Rectangle 7"/>
-          <p:cNvSpPr/>
-          <p:nvPr/>
-        </p:nvSpPr>
-        <p:spPr>
-          <a:xfrm>
-            <a:off x="4572000" y="1600200"/>
-            <a:ext cx="3017520" cy="502920"/>
-          </a:xfrm>
-          <a:prstGeom prst="rect">
-            <a:avLst/>
-          </a:prstGeom>
-          <a:solidFill>
-            <a:srgbClr val="0E3B66"/>
-          </a:solidFill>
-          <a:ln>
-            <a:noFill/>
-          </a:ln>
-        </p:spPr>
-        <p:style>
-          <a:lnRef idx="1">
-            <a:schemeClr val="accent1"/>
-          </a:lnRef>
-          <a:fillRef idx="3">
-            <a:schemeClr val="accent1"/>
-          </a:fillRef>
-          <a:effectRef idx="2">
-            <a:schemeClr val="accent1"/>
-          </a:effectRef>
-          <a:fontRef idx="minor">
-            <a:schemeClr val="lt1"/>
-          </a:fontRef>
-        </p:style>
-        <p:txBody>
-          <a:bodyPr rtlCol="0" anchor="ctr"/>
-          <a:lstStyle/>
-          <a:p>
-            <a:pPr algn="ctr"/>
-            <a:endParaRPr/>
-          </a:p>
-        </p:txBody>
-      </p:sp>
-      <p:sp>
-        <p:nvSpPr>
-          <p:cNvPr id="9" name="TextBox 8"/>
-          <p:cNvSpPr txBox="1"/>
-          <p:nvPr/>
-        </p:nvSpPr>
-        <p:spPr>
-          <a:xfrm>
-            <a:off x="4572000" y="1645920"/>
-            <a:ext cx="3017520" cy="228600"/>
-          </a:xfrm>
-          <a:prstGeom prst="rect">
-            <a:avLst/>
-          </a:prstGeom>
-          <a:noFill/>
-        </p:spPr>
-        <p:txBody>
-          <a:bodyPr wrap="square" lIns="45720" tIns="18288" rIns="45720" bIns="18288">
-            <a:spAutoFit/>
-          </a:bodyPr>
-          <a:lstStyle/>
-          <a:p>
-            <a:pPr algn="ctr"/>
-            <a:r>
-              <a:rPr sz="1000" b="0">
-                <a:solidFill>
-                  <a:srgbClr val="FFFFFF"/>
-                </a:solidFill>
-                <a:latin typeface="Calibri"/>
-              </a:rPr>
-              <a:t>&lt;&lt; base class &gt;&gt;</a:t>
-            </a:r>
-          </a:p>
-        </p:txBody>
-      </p:sp>
-      <p:sp>
-        <p:nvSpPr>
-          <p:cNvPr id="10" name="TextBox 9"/>
-          <p:cNvSpPr txBox="1"/>
-          <p:nvPr/>
-        </p:nvSpPr>
-        <p:spPr>
-          <a:xfrm>
-            <a:off x="4572000" y="1801368"/>
-            <a:ext cx="3017520" cy="365760"/>
-          </a:xfrm>
-          <a:prstGeom prst="rect">
-            <a:avLst/>
-          </a:prstGeom>
-          <a:noFill/>
-        </p:spPr>
-        <p:txBody>
-          <a:bodyPr wrap="square" lIns="45720" tIns="18288" rIns="45720" bIns="18288">
-            <a:spAutoFit/>
-          </a:bodyPr>
-          <a:lstStyle/>
-          <a:p>
-            <a:pPr algn="ctr"/>
-            <a:r>
-              <a:rPr sz="1400" b="1">
-                <a:solidFill>
-                  <a:srgbClr val="FFFFFF"/>
-                </a:solidFill>
-                <a:latin typeface="Calibri"/>
-              </a:rPr>
-              <a:t>Product</a:t>
-            </a:r>
-          </a:p>
-        </p:txBody>
-      </p:sp>
-      <p:sp>
-        <p:nvSpPr>
-          <p:cNvPr id="11" name="TextBox 10"/>
-          <p:cNvSpPr txBox="1"/>
-          <p:nvPr/>
-        </p:nvSpPr>
-        <p:spPr>
-          <a:xfrm>
-            <a:off x="4709160" y="2194560"/>
-            <a:ext cx="2743200" cy="274320"/>
-          </a:xfrm>
-          <a:prstGeom prst="rect">
-            <a:avLst/>
-          </a:prstGeom>
-          <a:noFill/>
-        </p:spPr>
-        <p:txBody>
-          <a:bodyPr wrap="square" lIns="45720" tIns="18288" rIns="45720" bIns="18288">
-            <a:spAutoFit/>
-          </a:bodyPr>
-          <a:lstStyle/>
-          <a:p>
-            <a:pPr algn="l"/>
-            <a:r>
-              <a:rPr sz="900" b="1">
-                <a:solidFill>
-                  <a:srgbClr val="6B7280"/>
-                </a:solidFill>
-                <a:latin typeface="Calibri"/>
-              </a:rPr>
-              <a:t>Attributes</a:t>
-            </a:r>
-          </a:p>
-        </p:txBody>
-      </p:sp>
-      <p:sp>
-        <p:nvSpPr>
-          <p:cNvPr id="12" name="TextBox 11"/>
-          <p:cNvSpPr txBox="1"/>
-          <p:nvPr/>
-        </p:nvSpPr>
-        <p:spPr>
-          <a:xfrm>
-            <a:off x="4709160" y="2423160"/>
-            <a:ext cx="2743200" cy="1097280"/>
-          </a:xfrm>
-          <a:prstGeom prst="rect">
-            <a:avLst/>
-          </a:prstGeom>
-          <a:noFill/>
-        </p:spPr>
-        <p:txBody>
-          <a:bodyPr wrap="square" lIns="45720" tIns="18288" rIns="45720" bIns="18288">
-            <a:spAutoFit/>
-          </a:bodyPr>
-          <a:lstStyle/>
-          <a:p>
-            <a:pPr algn="l"/>
-            <a:r>
-              <a:rPr sz="1000" b="0">
-                <a:solidFill>
-                  <a:srgbClr val="1F2D3D"/>
-                </a:solidFill>
-                <a:latin typeface="Consolas"/>
-              </a:rPr>
-              <a:t>+ product_id : str</a:t>
-            </a:r>
-          </a:p>
-          <a:p>
-            <a:pPr algn="l"/>
-            <a:r>
-              <a:rPr sz="1000" b="0">
-                <a:solidFill>
-                  <a:srgbClr val="1F2D3D"/>
-                </a:solidFill>
-                <a:latin typeface="Consolas"/>
-              </a:rPr>
-              <a:t>+ name : str</a:t>
-            </a:r>
-          </a:p>
-          <a:p>
-            <a:pPr algn="l"/>
-            <a:r>
-              <a:rPr sz="1000" b="0">
-                <a:solidFill>
-                  <a:srgbClr val="1F2D3D"/>
-                </a:solidFill>
-                <a:latin typeface="Consolas"/>
-              </a:rPr>
-              <a:t>+ price : float</a:t>
-            </a:r>
-          </a:p>
-          <a:p>
-            <a:pPr algn="l"/>
-            <a:r>
-              <a:rPr sz="1000" b="0">
-                <a:solidFill>
-                  <a:srgbClr val="1F2D3D"/>
-                </a:solidFill>
-                <a:latin typeface="Consolas"/>
-              </a:rPr>
-              <a:t>+ quantity : int</a:t>
-            </a:r>
-          </a:p>
-          <a:p>
-            <a:pPr algn="l"/>
-            <a:r>
-              <a:rPr sz="1000" b="0">
-                <a:solidFill>
-                  <a:srgbClr val="1F2D3D"/>
-                </a:solidFill>
-                <a:latin typeface="Consolas"/>
-              </a:rPr>
-              <a:t>+ category : str</a:t>
-            </a:r>
-          </a:p>
-        </p:txBody>
-      </p:sp>
-      <p:cxnSp>
-        <p:nvCxnSpPr>
-          <p:cNvPr id="13" name="Connector 12"/>
-          <p:cNvCxnSpPr/>
-          <p:nvPr/>
-        </p:nvCxnSpPr>
-        <p:spPr>
-          <a:xfrm>
-            <a:off x="4663440" y="3383280"/>
-            <a:ext cx="2834640" cy="0"/>
-          </a:xfrm>
-          <a:prstGeom prst="line">
-            <a:avLst/>
-          </a:prstGeom>
-          <a:ln w="9525">
-            <a:solidFill>
-              <a:srgbClr val="D0D5DC"/>
             </a:solidFill>
           </a:ln>
         </p:spPr>
@@ -19146,16 +21911,186 @@
           </a:fontRef>
         </p:style>
       </p:cxnSp>
-      <p:sp>
-        <p:nvSpPr>
-          <p:cNvPr id="14" name="TextBox 13"/>
+      <p:cxnSp>
+        <p:nvCxnSpPr>
+          <p:cNvPr id="44" name="Connector 43">
+            <a:extLst>
+              <a:ext uri="{FF2B5EF4-FFF2-40B4-BE49-F238E27FC236}">
+                <a16:creationId xmlns:a16="http://schemas.microsoft.com/office/drawing/2014/main" id="{8F96736A-E134-2795-EC4B-2E972C82DBDC}"/>
+              </a:ext>
+            </a:extLst>
+          </p:cNvPr>
+          <p:cNvCxnSpPr/>
+          <p:nvPr/>
+        </p:nvCxnSpPr>
+        <p:spPr>
+          <a:xfrm>
+            <a:off x="0" y="3440928"/>
+            <a:ext cx="0" cy="365760"/>
+          </a:xfrm>
+          <a:prstGeom prst="line">
+            <a:avLst/>
+          </a:prstGeom>
+          <a:ln w="22225">
+            <a:solidFill>
+              <a:srgbClr val="0E3B66"/>
+            </a:solidFill>
+          </a:ln>
+        </p:spPr>
+        <p:style>
+          <a:lnRef idx="2">
+            <a:schemeClr val="accent1"/>
+          </a:lnRef>
+          <a:fillRef idx="0">
+            <a:schemeClr val="accent1"/>
+          </a:fillRef>
+          <a:effectRef idx="1">
+            <a:schemeClr val="accent1"/>
+          </a:effectRef>
+          <a:fontRef idx="minor">
+            <a:schemeClr val="tx1"/>
+          </a:fontRef>
+        </p:style>
+      </p:cxnSp>
+      <p:cxnSp>
+        <p:nvCxnSpPr>
+          <p:cNvPr id="45" name="Connector 44">
+            <a:extLst>
+              <a:ext uri="{FF2B5EF4-FFF2-40B4-BE49-F238E27FC236}">
+                <a16:creationId xmlns:a16="http://schemas.microsoft.com/office/drawing/2014/main" id="{423AB4CC-AD28-13E3-9E79-12573FE9B4D4}"/>
+              </a:ext>
+            </a:extLst>
+          </p:cNvPr>
+          <p:cNvCxnSpPr/>
+          <p:nvPr/>
+        </p:nvCxnSpPr>
+        <p:spPr>
+          <a:xfrm>
+            <a:off x="0" y="3806688"/>
+            <a:ext cx="0" cy="274320"/>
+          </a:xfrm>
+          <a:prstGeom prst="line">
+            <a:avLst/>
+          </a:prstGeom>
+          <a:ln w="22225">
+            <a:solidFill>
+              <a:srgbClr val="0E3B66"/>
+            </a:solidFill>
+          </a:ln>
+        </p:spPr>
+        <p:style>
+          <a:lnRef idx="2">
+            <a:schemeClr val="accent1"/>
+          </a:lnRef>
+          <a:fillRef idx="0">
+            <a:schemeClr val="accent1"/>
+          </a:fillRef>
+          <a:effectRef idx="1">
+            <a:schemeClr val="accent1"/>
+          </a:effectRef>
+          <a:fontRef idx="minor">
+            <a:schemeClr val="tx1"/>
+          </a:fontRef>
+        </p:style>
+      </p:cxnSp>
+      <p:cxnSp>
+        <p:nvCxnSpPr>
+          <p:cNvPr id="46" name="Connector 45">
+            <a:extLst>
+              <a:ext uri="{FF2B5EF4-FFF2-40B4-BE49-F238E27FC236}">
+                <a16:creationId xmlns:a16="http://schemas.microsoft.com/office/drawing/2014/main" id="{5495A4F7-893E-7D07-C4AF-A1ABA89C5AFD}"/>
+              </a:ext>
+            </a:extLst>
+          </p:cNvPr>
+          <p:cNvCxnSpPr/>
+          <p:nvPr/>
+        </p:nvCxnSpPr>
+        <p:spPr>
+          <a:xfrm>
+            <a:off x="0" y="3806688"/>
+            <a:ext cx="0" cy="274320"/>
+          </a:xfrm>
+          <a:prstGeom prst="line">
+            <a:avLst/>
+          </a:prstGeom>
+          <a:ln w="22225">
+            <a:solidFill>
+              <a:srgbClr val="0E3B66"/>
+            </a:solidFill>
+          </a:ln>
+        </p:spPr>
+        <p:style>
+          <a:lnRef idx="2">
+            <a:schemeClr val="accent1"/>
+          </a:lnRef>
+          <a:fillRef idx="0">
+            <a:schemeClr val="accent1"/>
+          </a:fillRef>
+          <a:effectRef idx="1">
+            <a:schemeClr val="accent1"/>
+          </a:effectRef>
+          <a:fontRef idx="minor">
+            <a:schemeClr val="tx1"/>
+          </a:fontRef>
+        </p:style>
+      </p:cxnSp>
+      <p:cxnSp>
+        <p:nvCxnSpPr>
+          <p:cNvPr id="47" name="Connector 46">
+            <a:extLst>
+              <a:ext uri="{FF2B5EF4-FFF2-40B4-BE49-F238E27FC236}">
+                <a16:creationId xmlns:a16="http://schemas.microsoft.com/office/drawing/2014/main" id="{E56D2DA6-EDBD-43E4-7FAE-3681CD5DEDAA}"/>
+              </a:ext>
+            </a:extLst>
+          </p:cNvPr>
+          <p:cNvCxnSpPr/>
+          <p:nvPr/>
+        </p:nvCxnSpPr>
+        <p:spPr>
+          <a:xfrm>
+            <a:off x="0" y="3806688"/>
+            <a:ext cx="0" cy="274320"/>
+          </a:xfrm>
+          <a:prstGeom prst="line">
+            <a:avLst/>
+          </a:prstGeom>
+          <a:ln w="22225">
+            <a:solidFill>
+              <a:srgbClr val="0E3B66"/>
+            </a:solidFill>
+          </a:ln>
+        </p:spPr>
+        <p:style>
+          <a:lnRef idx="2">
+            <a:schemeClr val="accent1"/>
+          </a:lnRef>
+          <a:fillRef idx="0">
+            <a:schemeClr val="accent1"/>
+          </a:fillRef>
+          <a:effectRef idx="1">
+            <a:schemeClr val="accent1"/>
+          </a:effectRef>
+          <a:fontRef idx="minor">
+            <a:schemeClr val="tx1"/>
+          </a:fontRef>
+        </p:style>
+      </p:cxnSp>
+      <p:sp>
+        <p:nvSpPr>
+          <p:cNvPr id="50" name="TextBox 49">
+            <a:extLst>
+              <a:ext uri="{FF2B5EF4-FFF2-40B4-BE49-F238E27FC236}">
+                <a16:creationId xmlns:a16="http://schemas.microsoft.com/office/drawing/2014/main" id="{1A84E6DD-5F0E-9740-AC60-08969DA6A1BC}"/>
+              </a:ext>
+            </a:extLst>
+          </p:cNvPr>
           <p:cNvSpPr txBox="1"/>
           <p:nvPr/>
         </p:nvSpPr>
         <p:spPr>
           <a:xfrm>
-            <a:off x="4709160" y="3474720"/>
-            <a:ext cx="2743200" cy="274320"/>
+            <a:off x="11247120" y="6446520"/>
+            <a:ext cx="640080" cy="274320"/>
           </a:xfrm>
           <a:prstGeom prst="rect">
             <a:avLst/>
@@ -19168,29 +22103,65 @@
           </a:bodyPr>
           <a:lstStyle/>
           <a:p>
-            <a:pPr algn="l"/>
-            <a:r>
-              <a:rPr sz="900" b="1">
+            <a:pPr algn="r"/>
+            <a:r>
+              <a:rPr sz="1000" b="0">
                 <a:solidFill>
                   <a:srgbClr val="6B7280"/>
                 </a:solidFill>
                 <a:latin typeface="Calibri"/>
               </a:rPr>
-              <a:t>Methods</a:t>
-            </a:r>
-          </a:p>
-        </p:txBody>
-      </p:sp>
-      <p:sp>
-        <p:nvSpPr>
-          <p:cNvPr id="15" name="TextBox 14"/>
+              <a:t>17</a:t>
+            </a:r>
+          </a:p>
+        </p:txBody>
+      </p:sp>
+      <p:pic>
+        <p:nvPicPr>
+          <p:cNvPr id="6" name="Picture 5">
+            <a:extLst>
+              <a:ext uri="{FF2B5EF4-FFF2-40B4-BE49-F238E27FC236}">
+                <a16:creationId xmlns:a16="http://schemas.microsoft.com/office/drawing/2014/main" id="{A6A51D73-CC5D-AB60-EA38-409D3E96FD65}"/>
+              </a:ext>
+            </a:extLst>
+          </p:cNvPr>
+          <p:cNvPicPr>
+            <a:picLocks noChangeAspect="1"/>
+          </p:cNvPicPr>
+          <p:nvPr/>
+        </p:nvPicPr>
+        <p:blipFill>
+          <a:blip r:embed="rId3"/>
+          <a:stretch>
+            <a:fillRect/>
+          </a:stretch>
+        </p:blipFill>
+        <p:spPr>
+          <a:xfrm>
+            <a:off x="0" y="0"/>
+            <a:ext cx="12192000" cy="6858000"/>
+          </a:xfrm>
+          <a:prstGeom prst="rect">
+            <a:avLst/>
+          </a:prstGeom>
+        </p:spPr>
+      </p:pic>
+      <p:sp>
+        <p:nvSpPr>
+          <p:cNvPr id="7" name="TextBox 6">
+            <a:extLst>
+              <a:ext uri="{FF2B5EF4-FFF2-40B4-BE49-F238E27FC236}">
+                <a16:creationId xmlns:a16="http://schemas.microsoft.com/office/drawing/2014/main" id="{7B3C42AC-7A9F-A73D-ABD8-D00873FBE8B3}"/>
+              </a:ext>
+            </a:extLst>
+          </p:cNvPr>
           <p:cNvSpPr txBox="1"/>
           <p:nvPr/>
         </p:nvSpPr>
         <p:spPr>
           <a:xfrm>
-            <a:off x="4709160" y="3703320"/>
-            <a:ext cx="2743200" cy="0"/>
+            <a:off x="160020" y="556590"/>
+            <a:ext cx="3388250" cy="529376"/>
           </a:xfrm>
           <a:prstGeom prst="rect">
             <a:avLst/>
@@ -19205,109 +22176,33 @@
           <a:p>
             <a:pPr algn="l"/>
             <a:r>
-              <a:rPr sz="1000" b="0">
-                <a:solidFill>
-                  <a:srgbClr val="1F2D3D"/>
-                </a:solidFill>
-                <a:latin typeface="Consolas"/>
-              </a:rPr>
-              <a:t>+ sell(qty)</a:t>
-            </a:r>
-          </a:p>
-          <a:p>
-            <a:pPr algn="l"/>
-            <a:r>
-              <a:rPr sz="1000" b="0">
-                <a:solidFill>
-                  <a:srgbClr val="1F2D3D"/>
-                </a:solidFill>
-                <a:latin typeface="Consolas"/>
-              </a:rPr>
-              <a:t>+ restock(qty)</a:t>
-            </a:r>
-          </a:p>
-          <a:p>
-            <a:pPr algn="l"/>
-            <a:r>
-              <a:rPr sz="1000" b="0">
-                <a:solidFill>
-                  <a:srgbClr val="1F2D3D"/>
-                </a:solidFill>
-                <a:latin typeface="Consolas"/>
-              </a:rPr>
-              <a:t>+ to_dict()</a:t>
-            </a:r>
-          </a:p>
-          <a:p>
-            <a:pPr algn="l"/>
-            <a:r>
-              <a:rPr sz="1000" b="0">
-                <a:solidFill>
-                  <a:srgbClr val="1F2D3D"/>
-                </a:solidFill>
-                <a:latin typeface="Consolas"/>
-              </a:rPr>
-              <a:t>+ from_dict(data)  [classmethod]</a:t>
-            </a:r>
-          </a:p>
-        </p:txBody>
-      </p:sp>
-      <p:sp>
-        <p:nvSpPr>
-          <p:cNvPr id="16" name="Rounded Rectangle 15"/>
+              <a:rPr sz="3200" b="1" dirty="0">
+                <a:solidFill>
+                  <a:srgbClr val="0E3B66"/>
+                </a:solidFill>
+                <a:latin typeface="Calibri"/>
+              </a:rPr>
+              <a:t>Product Class Tree</a:t>
+            </a:r>
+          </a:p>
+        </p:txBody>
+      </p:sp>
+      <p:sp>
+        <p:nvSpPr>
+          <p:cNvPr id="8" name="Rectangle 7">
+            <a:extLst>
+              <a:ext uri="{FF2B5EF4-FFF2-40B4-BE49-F238E27FC236}">
+                <a16:creationId xmlns:a16="http://schemas.microsoft.com/office/drawing/2014/main" id="{070D9284-C3B6-A871-4359-7669D3E176E2}"/>
+              </a:ext>
+            </a:extLst>
+          </p:cNvPr>
           <p:cNvSpPr/>
           <p:nvPr/>
         </p:nvSpPr>
         <p:spPr>
           <a:xfrm>
-            <a:off x="502920" y="4160520"/>
-            <a:ext cx="3383280" cy="2331720"/>
-          </a:xfrm>
-          <a:prstGeom prst="roundRect">
-            <a:avLst/>
-          </a:prstGeom>
-          <a:solidFill>
-            <a:srgbClr val="FFFFFF"/>
-          </a:solidFill>
-          <a:ln w="22225">
-            <a:solidFill>
-              <a:srgbClr val="F4A261"/>
-            </a:solidFill>
-          </a:ln>
-        </p:spPr>
-        <p:style>
-          <a:lnRef idx="1">
-            <a:schemeClr val="accent1"/>
-          </a:lnRef>
-          <a:fillRef idx="3">
-            <a:schemeClr val="accent1"/>
-          </a:fillRef>
-          <a:effectRef idx="2">
-            <a:schemeClr val="accent1"/>
-          </a:effectRef>
-          <a:fontRef idx="minor">
-            <a:schemeClr val="lt1"/>
-          </a:fontRef>
-        </p:style>
-        <p:txBody>
-          <a:bodyPr rtlCol="0" anchor="ctr"/>
-          <a:lstStyle/>
-          <a:p>
-            <a:pPr algn="ctr"/>
-            <a:endParaRPr/>
-          </a:p>
-        </p:txBody>
-      </p:sp>
-      <p:sp>
-        <p:nvSpPr>
-          <p:cNvPr id="17" name="Rectangle 16"/>
-          <p:cNvSpPr/>
-          <p:nvPr/>
-        </p:nvSpPr>
-        <p:spPr>
-          <a:xfrm>
-            <a:off x="502920" y="4160520"/>
-            <a:ext cx="3383280" cy="502920"/>
+            <a:off x="838200" y="1203960"/>
+            <a:ext cx="1097280" cy="64008"/>
           </a:xfrm>
           <a:prstGeom prst="rect">
             <a:avLst/>
@@ -19342,1298 +22237,12 @@
           </a:p>
         </p:txBody>
       </p:sp>
-      <p:sp>
-        <p:nvSpPr>
-          <p:cNvPr id="18" name="TextBox 17"/>
-          <p:cNvSpPr txBox="1"/>
-          <p:nvPr/>
-        </p:nvSpPr>
-        <p:spPr>
-          <a:xfrm>
-            <a:off x="502920" y="4206240"/>
-            <a:ext cx="3383280" cy="228600"/>
-          </a:xfrm>
-          <a:prstGeom prst="rect">
-            <a:avLst/>
-          </a:prstGeom>
-          <a:noFill/>
-        </p:spPr>
-        <p:txBody>
-          <a:bodyPr wrap="square" lIns="45720" tIns="18288" rIns="45720" bIns="18288">
-            <a:spAutoFit/>
-          </a:bodyPr>
-          <a:lstStyle/>
-          <a:p>
-            <a:pPr algn="ctr"/>
-            <a:r>
-              <a:rPr sz="1000" b="0">
-                <a:solidFill>
-                  <a:srgbClr val="FFFFFF"/>
-                </a:solidFill>
-                <a:latin typeface="Calibri"/>
-              </a:rPr>
-              <a:t>&lt;&lt; standard product &gt;&gt;</a:t>
-            </a:r>
-          </a:p>
-        </p:txBody>
-      </p:sp>
-      <p:sp>
-        <p:nvSpPr>
-          <p:cNvPr id="19" name="TextBox 18"/>
-          <p:cNvSpPr txBox="1"/>
-          <p:nvPr/>
-        </p:nvSpPr>
-        <p:spPr>
-          <a:xfrm>
-            <a:off x="502920" y="4361688"/>
-            <a:ext cx="3383280" cy="365760"/>
-          </a:xfrm>
-          <a:prstGeom prst="rect">
-            <a:avLst/>
-          </a:prstGeom>
-          <a:noFill/>
-        </p:spPr>
-        <p:txBody>
-          <a:bodyPr wrap="square" lIns="45720" tIns="18288" rIns="45720" bIns="18288">
-            <a:spAutoFit/>
-          </a:bodyPr>
-          <a:lstStyle/>
-          <a:p>
-            <a:pPr algn="ctr"/>
-            <a:r>
-              <a:rPr sz="1400" b="1">
-                <a:solidFill>
-                  <a:srgbClr val="FFFFFF"/>
-                </a:solidFill>
-                <a:latin typeface="Calibri"/>
-              </a:rPr>
-              <a:t>Product</a:t>
-            </a:r>
-          </a:p>
-        </p:txBody>
-      </p:sp>
-      <p:sp>
-        <p:nvSpPr>
-          <p:cNvPr id="20" name="TextBox 19"/>
-          <p:cNvSpPr txBox="1"/>
-          <p:nvPr/>
-        </p:nvSpPr>
-        <p:spPr>
-          <a:xfrm>
-            <a:off x="640080" y="4754880"/>
-            <a:ext cx="3108960" cy="274320"/>
-          </a:xfrm>
-          <a:prstGeom prst="rect">
-            <a:avLst/>
-          </a:prstGeom>
-          <a:noFill/>
-        </p:spPr>
-        <p:txBody>
-          <a:bodyPr wrap="square" lIns="45720" tIns="18288" rIns="45720" bIns="18288">
-            <a:spAutoFit/>
-          </a:bodyPr>
-          <a:lstStyle/>
-          <a:p>
-            <a:pPr algn="l"/>
-            <a:r>
-              <a:rPr sz="900" b="1">
-                <a:solidFill>
-                  <a:srgbClr val="6B7280"/>
-                </a:solidFill>
-                <a:latin typeface="Calibri"/>
-              </a:rPr>
-              <a:t>Attributes</a:t>
-            </a:r>
-          </a:p>
-        </p:txBody>
-      </p:sp>
-      <p:sp>
-        <p:nvSpPr>
-          <p:cNvPr id="21" name="TextBox 20"/>
-          <p:cNvSpPr txBox="1"/>
-          <p:nvPr/>
-        </p:nvSpPr>
-        <p:spPr>
-          <a:xfrm>
-            <a:off x="640080" y="4983480"/>
-            <a:ext cx="3108960" cy="1097280"/>
-          </a:xfrm>
-          <a:prstGeom prst="rect">
-            <a:avLst/>
-          </a:prstGeom>
-          <a:noFill/>
-        </p:spPr>
-        <p:txBody>
-          <a:bodyPr wrap="square" lIns="45720" tIns="18288" rIns="45720" bIns="18288">
-            <a:spAutoFit/>
-          </a:bodyPr>
-          <a:lstStyle/>
-          <a:p>
-            <a:pPr algn="l"/>
-            <a:r>
-              <a:rPr sz="1000" b="0">
-                <a:solidFill>
-                  <a:srgbClr val="1F2D3D"/>
-                </a:solidFill>
-                <a:latin typeface="Consolas"/>
-              </a:rPr>
-              <a:t>+ (inherits all)</a:t>
-            </a:r>
-          </a:p>
-        </p:txBody>
-      </p:sp>
-      <p:cxnSp>
-        <p:nvCxnSpPr>
-          <p:cNvPr id="22" name="Connector 21"/>
-          <p:cNvCxnSpPr/>
-          <p:nvPr/>
-        </p:nvCxnSpPr>
-        <p:spPr>
-          <a:xfrm>
-            <a:off x="594360" y="5212080"/>
-            <a:ext cx="3200400" cy="0"/>
-          </a:xfrm>
-          <a:prstGeom prst="line">
-            <a:avLst/>
-          </a:prstGeom>
-          <a:ln w="9525">
-            <a:solidFill>
-              <a:srgbClr val="D0D5DC"/>
-            </a:solidFill>
-          </a:ln>
-        </p:spPr>
-        <p:style>
-          <a:lnRef idx="2">
-            <a:schemeClr val="accent1"/>
-          </a:lnRef>
-          <a:fillRef idx="0">
-            <a:schemeClr val="accent1"/>
-          </a:fillRef>
-          <a:effectRef idx="1">
-            <a:schemeClr val="accent1"/>
-          </a:effectRef>
-          <a:fontRef idx="minor">
-            <a:schemeClr val="tx1"/>
-          </a:fontRef>
-        </p:style>
-      </p:cxnSp>
-      <p:sp>
-        <p:nvSpPr>
-          <p:cNvPr id="23" name="TextBox 22"/>
-          <p:cNvSpPr txBox="1"/>
-          <p:nvPr/>
-        </p:nvSpPr>
-        <p:spPr>
-          <a:xfrm>
-            <a:off x="640080" y="5303520"/>
-            <a:ext cx="3108960" cy="274320"/>
-          </a:xfrm>
-          <a:prstGeom prst="rect">
-            <a:avLst/>
-          </a:prstGeom>
-          <a:noFill/>
-        </p:spPr>
-        <p:txBody>
-          <a:bodyPr wrap="square" lIns="45720" tIns="18288" rIns="45720" bIns="18288">
-            <a:spAutoFit/>
-          </a:bodyPr>
-          <a:lstStyle/>
-          <a:p>
-            <a:pPr algn="l"/>
-            <a:r>
-              <a:rPr sz="900" b="1">
-                <a:solidFill>
-                  <a:srgbClr val="6B7280"/>
-                </a:solidFill>
-                <a:latin typeface="Calibri"/>
-              </a:rPr>
-              <a:t>Methods</a:t>
-            </a:r>
-          </a:p>
-        </p:txBody>
-      </p:sp>
-      <p:sp>
-        <p:nvSpPr>
-          <p:cNvPr id="24" name="TextBox 23"/>
-          <p:cNvSpPr txBox="1"/>
-          <p:nvPr/>
-        </p:nvSpPr>
-        <p:spPr>
-          <a:xfrm>
-            <a:off x="640080" y="5532120"/>
-            <a:ext cx="3108960" cy="914400"/>
-          </a:xfrm>
-          <a:prstGeom prst="rect">
-            <a:avLst/>
-          </a:prstGeom>
-          <a:noFill/>
-        </p:spPr>
-        <p:txBody>
-          <a:bodyPr wrap="square" lIns="45720" tIns="18288" rIns="45720" bIns="18288">
-            <a:spAutoFit/>
-          </a:bodyPr>
-          <a:lstStyle/>
-          <a:p>
-            <a:pPr algn="l"/>
-            <a:r>
-              <a:rPr sz="1000" b="0">
-                <a:solidFill>
-                  <a:srgbClr val="1F2D3D"/>
-                </a:solidFill>
-                <a:latin typeface="Consolas"/>
-              </a:rPr>
-              <a:t>+ (uses base sell / restock)</a:t>
-            </a:r>
-          </a:p>
-          <a:p>
-            <a:pPr algn="l"/>
-            <a:r>
-              <a:rPr sz="1000" b="0">
-                <a:solidFill>
-                  <a:srgbClr val="1F2D3D"/>
-                </a:solidFill>
-                <a:latin typeface="Consolas"/>
-              </a:rPr>
-              <a:t>+ type in JSON: "standard"</a:t>
-            </a:r>
-          </a:p>
-        </p:txBody>
-      </p:sp>
-      <p:sp>
-        <p:nvSpPr>
-          <p:cNvPr id="25" name="Rounded Rectangle 24"/>
-          <p:cNvSpPr/>
-          <p:nvPr/>
-        </p:nvSpPr>
-        <p:spPr>
-          <a:xfrm>
-            <a:off x="4389120" y="4160520"/>
-            <a:ext cx="3383280" cy="2331720"/>
-          </a:xfrm>
-          <a:prstGeom prst="roundRect">
-            <a:avLst/>
-          </a:prstGeom>
-          <a:solidFill>
-            <a:srgbClr val="FFFFFF"/>
-          </a:solidFill>
-          <a:ln w="22225">
-            <a:solidFill>
-              <a:srgbClr val="F4A261"/>
-            </a:solidFill>
-          </a:ln>
-        </p:spPr>
-        <p:style>
-          <a:lnRef idx="1">
-            <a:schemeClr val="accent1"/>
-          </a:lnRef>
-          <a:fillRef idx="3">
-            <a:schemeClr val="accent1"/>
-          </a:fillRef>
-          <a:effectRef idx="2">
-            <a:schemeClr val="accent1"/>
-          </a:effectRef>
-          <a:fontRef idx="minor">
-            <a:schemeClr val="lt1"/>
-          </a:fontRef>
-        </p:style>
-        <p:txBody>
-          <a:bodyPr rtlCol="0" anchor="ctr"/>
-          <a:lstStyle/>
-          <a:p>
-            <a:pPr algn="ctr"/>
-            <a:endParaRPr/>
-          </a:p>
-        </p:txBody>
-      </p:sp>
-      <p:sp>
-        <p:nvSpPr>
-          <p:cNvPr id="26" name="Rectangle 25"/>
-          <p:cNvSpPr/>
-          <p:nvPr/>
-        </p:nvSpPr>
-        <p:spPr>
-          <a:xfrm>
-            <a:off x="4389120" y="4160520"/>
-            <a:ext cx="3383280" cy="502920"/>
-          </a:xfrm>
-          <a:prstGeom prst="rect">
-            <a:avLst/>
-          </a:prstGeom>
-          <a:solidFill>
-            <a:srgbClr val="F4A261"/>
-          </a:solidFill>
-          <a:ln>
-            <a:noFill/>
-          </a:ln>
-        </p:spPr>
-        <p:style>
-          <a:lnRef idx="1">
-            <a:schemeClr val="accent1"/>
-          </a:lnRef>
-          <a:fillRef idx="3">
-            <a:schemeClr val="accent1"/>
-          </a:fillRef>
-          <a:effectRef idx="2">
-            <a:schemeClr val="accent1"/>
-          </a:effectRef>
-          <a:fontRef idx="minor">
-            <a:schemeClr val="lt1"/>
-          </a:fontRef>
-        </p:style>
-        <p:txBody>
-          <a:bodyPr rtlCol="0" anchor="ctr"/>
-          <a:lstStyle/>
-          <a:p>
-            <a:pPr algn="ctr"/>
-            <a:endParaRPr/>
-          </a:p>
-        </p:txBody>
-      </p:sp>
-      <p:sp>
-        <p:nvSpPr>
-          <p:cNvPr id="27" name="TextBox 26"/>
-          <p:cNvSpPr txBox="1"/>
-          <p:nvPr/>
-        </p:nvSpPr>
-        <p:spPr>
-          <a:xfrm>
-            <a:off x="4389120" y="4206240"/>
-            <a:ext cx="3383280" cy="228600"/>
-          </a:xfrm>
-          <a:prstGeom prst="rect">
-            <a:avLst/>
-          </a:prstGeom>
-          <a:noFill/>
-        </p:spPr>
-        <p:txBody>
-          <a:bodyPr wrap="square" lIns="45720" tIns="18288" rIns="45720" bIns="18288">
-            <a:spAutoFit/>
-          </a:bodyPr>
-          <a:lstStyle/>
-          <a:p>
-            <a:pPr algn="ctr"/>
-            <a:r>
-              <a:rPr sz="1000" b="0">
-                <a:solidFill>
-                  <a:srgbClr val="FFFFFF"/>
-                </a:solidFill>
-                <a:latin typeface="Calibri"/>
-              </a:rPr>
-              <a:t>&lt;&lt; subclass &gt;&gt;</a:t>
-            </a:r>
-          </a:p>
-        </p:txBody>
-      </p:sp>
-      <p:sp>
-        <p:nvSpPr>
-          <p:cNvPr id="28" name="TextBox 27"/>
-          <p:cNvSpPr txBox="1"/>
-          <p:nvPr/>
-        </p:nvSpPr>
-        <p:spPr>
-          <a:xfrm>
-            <a:off x="4389120" y="4361688"/>
-            <a:ext cx="3383280" cy="365760"/>
-          </a:xfrm>
-          <a:prstGeom prst="rect">
-            <a:avLst/>
-          </a:prstGeom>
-          <a:noFill/>
-        </p:spPr>
-        <p:txBody>
-          <a:bodyPr wrap="square" lIns="45720" tIns="18288" rIns="45720" bIns="18288">
-            <a:spAutoFit/>
-          </a:bodyPr>
-          <a:lstStyle/>
-          <a:p>
-            <a:pPr algn="ctr"/>
-            <a:r>
-              <a:rPr sz="1400" b="1">
-                <a:solidFill>
-                  <a:srgbClr val="FFFFFF"/>
-                </a:solidFill>
-                <a:latin typeface="Calibri"/>
-              </a:rPr>
-              <a:t>PerishableProduct</a:t>
-            </a:r>
-          </a:p>
-        </p:txBody>
-      </p:sp>
-      <p:sp>
-        <p:nvSpPr>
-          <p:cNvPr id="29" name="TextBox 28"/>
-          <p:cNvSpPr txBox="1"/>
-          <p:nvPr/>
-        </p:nvSpPr>
-        <p:spPr>
-          <a:xfrm>
-            <a:off x="4526280" y="4754880"/>
-            <a:ext cx="3108960" cy="274320"/>
-          </a:xfrm>
-          <a:prstGeom prst="rect">
-            <a:avLst/>
-          </a:prstGeom>
-          <a:noFill/>
-        </p:spPr>
-        <p:txBody>
-          <a:bodyPr wrap="square" lIns="45720" tIns="18288" rIns="45720" bIns="18288">
-            <a:spAutoFit/>
-          </a:bodyPr>
-          <a:lstStyle/>
-          <a:p>
-            <a:pPr algn="l"/>
-            <a:r>
-              <a:rPr sz="900" b="1">
-                <a:solidFill>
-                  <a:srgbClr val="6B7280"/>
-                </a:solidFill>
-                <a:latin typeface="Calibri"/>
-              </a:rPr>
-              <a:t>Attributes</a:t>
-            </a:r>
-          </a:p>
-        </p:txBody>
-      </p:sp>
-      <p:sp>
-        <p:nvSpPr>
-          <p:cNvPr id="30" name="TextBox 29"/>
-          <p:cNvSpPr txBox="1"/>
-          <p:nvPr/>
-        </p:nvSpPr>
-        <p:spPr>
-          <a:xfrm>
-            <a:off x="4526280" y="4983480"/>
-            <a:ext cx="3108960" cy="1097280"/>
-          </a:xfrm>
-          <a:prstGeom prst="rect">
-            <a:avLst/>
-          </a:prstGeom>
-          <a:noFill/>
-        </p:spPr>
-        <p:txBody>
-          <a:bodyPr wrap="square" lIns="45720" tIns="18288" rIns="45720" bIns="18288">
-            <a:spAutoFit/>
-          </a:bodyPr>
-          <a:lstStyle/>
-          <a:p>
-            <a:pPr algn="l"/>
-            <a:r>
-              <a:rPr sz="1000" b="0">
-                <a:solidFill>
-                  <a:srgbClr val="1F2D3D"/>
-                </a:solidFill>
-                <a:latin typeface="Consolas"/>
-              </a:rPr>
-              <a:t>+ expiry_date : str  (YYYY-MM-DD)</a:t>
-            </a:r>
-          </a:p>
-        </p:txBody>
-      </p:sp>
-      <p:cxnSp>
-        <p:nvCxnSpPr>
-          <p:cNvPr id="31" name="Connector 30"/>
-          <p:cNvCxnSpPr/>
-          <p:nvPr/>
-        </p:nvCxnSpPr>
-        <p:spPr>
-          <a:xfrm>
-            <a:off x="4480560" y="5212080"/>
-            <a:ext cx="3200400" cy="0"/>
-          </a:xfrm>
-          <a:prstGeom prst="line">
-            <a:avLst/>
-          </a:prstGeom>
-          <a:ln w="9525">
-            <a:solidFill>
-              <a:srgbClr val="D0D5DC"/>
-            </a:solidFill>
-          </a:ln>
-        </p:spPr>
-        <p:style>
-          <a:lnRef idx="2">
-            <a:schemeClr val="accent1"/>
-          </a:lnRef>
-          <a:fillRef idx="0">
-            <a:schemeClr val="accent1"/>
-          </a:fillRef>
-          <a:effectRef idx="1">
-            <a:schemeClr val="accent1"/>
-          </a:effectRef>
-          <a:fontRef idx="minor">
-            <a:schemeClr val="tx1"/>
-          </a:fontRef>
-        </p:style>
-      </p:cxnSp>
-      <p:sp>
-        <p:nvSpPr>
-          <p:cNvPr id="32" name="TextBox 31"/>
-          <p:cNvSpPr txBox="1"/>
-          <p:nvPr/>
-        </p:nvSpPr>
-        <p:spPr>
-          <a:xfrm>
-            <a:off x="4526280" y="5303520"/>
-            <a:ext cx="3108960" cy="274320"/>
-          </a:xfrm>
-          <a:prstGeom prst="rect">
-            <a:avLst/>
-          </a:prstGeom>
-          <a:noFill/>
-        </p:spPr>
-        <p:txBody>
-          <a:bodyPr wrap="square" lIns="45720" tIns="18288" rIns="45720" bIns="18288">
-            <a:spAutoFit/>
-          </a:bodyPr>
-          <a:lstStyle/>
-          <a:p>
-            <a:pPr algn="l"/>
-            <a:r>
-              <a:rPr sz="900" b="1">
-                <a:solidFill>
-                  <a:srgbClr val="6B7280"/>
-                </a:solidFill>
-                <a:latin typeface="Calibri"/>
-              </a:rPr>
-              <a:t>Methods</a:t>
-            </a:r>
-          </a:p>
-        </p:txBody>
-      </p:sp>
-      <p:sp>
-        <p:nvSpPr>
-          <p:cNvPr id="33" name="TextBox 32"/>
-          <p:cNvSpPr txBox="1"/>
-          <p:nvPr/>
-        </p:nvSpPr>
-        <p:spPr>
-          <a:xfrm>
-            <a:off x="4526280" y="5532120"/>
-            <a:ext cx="3108960" cy="914400"/>
-          </a:xfrm>
-          <a:prstGeom prst="rect">
-            <a:avLst/>
-          </a:prstGeom>
-          <a:noFill/>
-        </p:spPr>
-        <p:txBody>
-          <a:bodyPr wrap="square" lIns="45720" tIns="18288" rIns="45720" bIns="18288">
-            <a:spAutoFit/>
-          </a:bodyPr>
-          <a:lstStyle/>
-          <a:p>
-            <a:pPr algn="l"/>
-            <a:r>
-              <a:rPr sz="1000" b="0">
-                <a:solidFill>
-                  <a:srgbClr val="1F2D3D"/>
-                </a:solidFill>
-                <a:latin typeface="Consolas"/>
-              </a:rPr>
-              <a:t>+ is_expired()</a:t>
-            </a:r>
-          </a:p>
-          <a:p>
-            <a:pPr algn="l"/>
-            <a:r>
-              <a:rPr sz="1000" b="0">
-                <a:solidFill>
-                  <a:srgbClr val="1F2D3D"/>
-                </a:solidFill>
-                <a:latin typeface="Consolas"/>
-              </a:rPr>
-              <a:t>+ sell(qty)  [override]</a:t>
-            </a:r>
-          </a:p>
-          <a:p>
-            <a:pPr algn="l"/>
-            <a:r>
-              <a:rPr sz="1000" b="0">
-                <a:solidFill>
-                  <a:srgbClr val="1F2D3D"/>
-                </a:solidFill>
-                <a:latin typeface="Consolas"/>
-              </a:rPr>
-              <a:t>+ to_dict()  [override]</a:t>
-            </a:r>
-          </a:p>
-          <a:p>
-            <a:pPr algn="l"/>
-            <a:r>
-              <a:rPr sz="1000" b="0">
-                <a:solidFill>
-                  <a:srgbClr val="1F2D3D"/>
-                </a:solidFill>
-                <a:latin typeface="Consolas"/>
-              </a:rPr>
-              <a:t>+ type in JSON: "perishable"</a:t>
-            </a:r>
-          </a:p>
-        </p:txBody>
-      </p:sp>
-      <p:sp>
-        <p:nvSpPr>
-          <p:cNvPr id="34" name="Rounded Rectangle 33"/>
-          <p:cNvSpPr/>
-          <p:nvPr/>
-        </p:nvSpPr>
-        <p:spPr>
-          <a:xfrm>
-            <a:off x="8275320" y="4160520"/>
-            <a:ext cx="3383280" cy="2331720"/>
-          </a:xfrm>
-          <a:prstGeom prst="roundRect">
-            <a:avLst/>
-          </a:prstGeom>
-          <a:solidFill>
-            <a:srgbClr val="FFFFFF"/>
-          </a:solidFill>
-          <a:ln w="22225">
-            <a:solidFill>
-              <a:srgbClr val="F4A261"/>
-            </a:solidFill>
-          </a:ln>
-        </p:spPr>
-        <p:style>
-          <a:lnRef idx="1">
-            <a:schemeClr val="accent1"/>
-          </a:lnRef>
-          <a:fillRef idx="3">
-            <a:schemeClr val="accent1"/>
-          </a:fillRef>
-          <a:effectRef idx="2">
-            <a:schemeClr val="accent1"/>
-          </a:effectRef>
-          <a:fontRef idx="minor">
-            <a:schemeClr val="lt1"/>
-          </a:fontRef>
-        </p:style>
-        <p:txBody>
-          <a:bodyPr rtlCol="0" anchor="ctr"/>
-          <a:lstStyle/>
-          <a:p>
-            <a:pPr algn="ctr"/>
-            <a:endParaRPr/>
-          </a:p>
-        </p:txBody>
-      </p:sp>
-      <p:sp>
-        <p:nvSpPr>
-          <p:cNvPr id="35" name="Rectangle 34"/>
-          <p:cNvSpPr/>
-          <p:nvPr/>
-        </p:nvSpPr>
-        <p:spPr>
-          <a:xfrm>
-            <a:off x="8275320" y="4160520"/>
-            <a:ext cx="3383280" cy="502920"/>
-          </a:xfrm>
-          <a:prstGeom prst="rect">
-            <a:avLst/>
-          </a:prstGeom>
-          <a:solidFill>
-            <a:srgbClr val="F4A261"/>
-          </a:solidFill>
-          <a:ln>
-            <a:noFill/>
-          </a:ln>
-        </p:spPr>
-        <p:style>
-          <a:lnRef idx="1">
-            <a:schemeClr val="accent1"/>
-          </a:lnRef>
-          <a:fillRef idx="3">
-            <a:schemeClr val="accent1"/>
-          </a:fillRef>
-          <a:effectRef idx="2">
-            <a:schemeClr val="accent1"/>
-          </a:effectRef>
-          <a:fontRef idx="minor">
-            <a:schemeClr val="lt1"/>
-          </a:fontRef>
-        </p:style>
-        <p:txBody>
-          <a:bodyPr rtlCol="0" anchor="ctr"/>
-          <a:lstStyle/>
-          <a:p>
-            <a:pPr algn="ctr"/>
-            <a:endParaRPr/>
-          </a:p>
-        </p:txBody>
-      </p:sp>
-      <p:sp>
-        <p:nvSpPr>
-          <p:cNvPr id="36" name="TextBox 35"/>
-          <p:cNvSpPr txBox="1"/>
-          <p:nvPr/>
-        </p:nvSpPr>
-        <p:spPr>
-          <a:xfrm>
-            <a:off x="8275320" y="4206240"/>
-            <a:ext cx="3383280" cy="228600"/>
-          </a:xfrm>
-          <a:prstGeom prst="rect">
-            <a:avLst/>
-          </a:prstGeom>
-          <a:noFill/>
-        </p:spPr>
-        <p:txBody>
-          <a:bodyPr wrap="square" lIns="45720" tIns="18288" rIns="45720" bIns="18288">
-            <a:spAutoFit/>
-          </a:bodyPr>
-          <a:lstStyle/>
-          <a:p>
-            <a:pPr algn="ctr"/>
-            <a:r>
-              <a:rPr sz="1000" b="0">
-                <a:solidFill>
-                  <a:srgbClr val="FFFFFF"/>
-                </a:solidFill>
-                <a:latin typeface="Calibri"/>
-              </a:rPr>
-              <a:t>&lt;&lt; subclass &gt;&gt;</a:t>
-            </a:r>
-          </a:p>
-        </p:txBody>
-      </p:sp>
-      <p:sp>
-        <p:nvSpPr>
-          <p:cNvPr id="37" name="TextBox 36"/>
-          <p:cNvSpPr txBox="1"/>
-          <p:nvPr/>
-        </p:nvSpPr>
-        <p:spPr>
-          <a:xfrm>
-            <a:off x="8275320" y="4361688"/>
-            <a:ext cx="3383280" cy="365760"/>
-          </a:xfrm>
-          <a:prstGeom prst="rect">
-            <a:avLst/>
-          </a:prstGeom>
-          <a:noFill/>
-        </p:spPr>
-        <p:txBody>
-          <a:bodyPr wrap="square" lIns="45720" tIns="18288" rIns="45720" bIns="18288">
-            <a:spAutoFit/>
-          </a:bodyPr>
-          <a:lstStyle/>
-          <a:p>
-            <a:pPr algn="ctr"/>
-            <a:r>
-              <a:rPr sz="1400" b="1">
-                <a:solidFill>
-                  <a:srgbClr val="FFFFFF"/>
-                </a:solidFill>
-                <a:latin typeface="Calibri"/>
-              </a:rPr>
-              <a:t>DigitalProduct</a:t>
-            </a:r>
-          </a:p>
-        </p:txBody>
-      </p:sp>
-      <p:sp>
-        <p:nvSpPr>
-          <p:cNvPr id="38" name="TextBox 37"/>
-          <p:cNvSpPr txBox="1"/>
-          <p:nvPr/>
-        </p:nvSpPr>
-        <p:spPr>
-          <a:xfrm>
-            <a:off x="8412480" y="4754880"/>
-            <a:ext cx="3108960" cy="274320"/>
-          </a:xfrm>
-          <a:prstGeom prst="rect">
-            <a:avLst/>
-          </a:prstGeom>
-          <a:noFill/>
-        </p:spPr>
-        <p:txBody>
-          <a:bodyPr wrap="square" lIns="45720" tIns="18288" rIns="45720" bIns="18288">
-            <a:spAutoFit/>
-          </a:bodyPr>
-          <a:lstStyle/>
-          <a:p>
-            <a:pPr algn="l"/>
-            <a:r>
-              <a:rPr sz="900" b="1">
-                <a:solidFill>
-                  <a:srgbClr val="6B7280"/>
-                </a:solidFill>
-                <a:latin typeface="Calibri"/>
-              </a:rPr>
-              <a:t>Attributes</a:t>
-            </a:r>
-          </a:p>
-        </p:txBody>
-      </p:sp>
-      <p:sp>
-        <p:nvSpPr>
-          <p:cNvPr id="39" name="TextBox 38"/>
-          <p:cNvSpPr txBox="1"/>
-          <p:nvPr/>
-        </p:nvSpPr>
-        <p:spPr>
-          <a:xfrm>
-            <a:off x="8412480" y="4983480"/>
-            <a:ext cx="3108960" cy="1097280"/>
-          </a:xfrm>
-          <a:prstGeom prst="rect">
-            <a:avLst/>
-          </a:prstGeom>
-          <a:noFill/>
-        </p:spPr>
-        <p:txBody>
-          <a:bodyPr wrap="square" lIns="45720" tIns="18288" rIns="45720" bIns="18288">
-            <a:spAutoFit/>
-          </a:bodyPr>
-          <a:lstStyle/>
-          <a:p>
-            <a:pPr algn="l"/>
-            <a:r>
-              <a:rPr sz="1000" b="0">
-                <a:solidFill>
-                  <a:srgbClr val="1F2D3D"/>
-                </a:solidFill>
-                <a:latin typeface="Consolas"/>
-              </a:rPr>
-              <a:t>+ download_link : str</a:t>
-            </a:r>
-          </a:p>
-          <a:p>
-            <a:pPr algn="l"/>
-            <a:r>
-              <a:rPr sz="1000" b="0">
-                <a:solidFill>
-                  <a:srgbClr val="1F2D3D"/>
-                </a:solidFill>
-                <a:latin typeface="Consolas"/>
-              </a:rPr>
-              <a:t>+ quantity = 0  (unlimited)</a:t>
-            </a:r>
-          </a:p>
-        </p:txBody>
-      </p:sp>
-      <p:cxnSp>
-        <p:nvCxnSpPr>
-          <p:cNvPr id="40" name="Connector 39"/>
-          <p:cNvCxnSpPr/>
-          <p:nvPr/>
-        </p:nvCxnSpPr>
-        <p:spPr>
-          <a:xfrm>
-            <a:off x="8366760" y="5394960"/>
-            <a:ext cx="3200400" cy="0"/>
-          </a:xfrm>
-          <a:prstGeom prst="line">
-            <a:avLst/>
-          </a:prstGeom>
-          <a:ln w="9525">
-            <a:solidFill>
-              <a:srgbClr val="D0D5DC"/>
-            </a:solidFill>
-          </a:ln>
-        </p:spPr>
-        <p:style>
-          <a:lnRef idx="2">
-            <a:schemeClr val="accent1"/>
-          </a:lnRef>
-          <a:fillRef idx="0">
-            <a:schemeClr val="accent1"/>
-          </a:fillRef>
-          <a:effectRef idx="1">
-            <a:schemeClr val="accent1"/>
-          </a:effectRef>
-          <a:fontRef idx="minor">
-            <a:schemeClr val="tx1"/>
-          </a:fontRef>
-        </p:style>
-      </p:cxnSp>
-      <p:sp>
-        <p:nvSpPr>
-          <p:cNvPr id="41" name="TextBox 40"/>
-          <p:cNvSpPr txBox="1"/>
-          <p:nvPr/>
-        </p:nvSpPr>
-        <p:spPr>
-          <a:xfrm>
-            <a:off x="8412480" y="5486400"/>
-            <a:ext cx="3108960" cy="274320"/>
-          </a:xfrm>
-          <a:prstGeom prst="rect">
-            <a:avLst/>
-          </a:prstGeom>
-          <a:noFill/>
-        </p:spPr>
-        <p:txBody>
-          <a:bodyPr wrap="square" lIns="45720" tIns="18288" rIns="45720" bIns="18288">
-            <a:spAutoFit/>
-          </a:bodyPr>
-          <a:lstStyle/>
-          <a:p>
-            <a:pPr algn="l"/>
-            <a:r>
-              <a:rPr sz="900" b="1">
-                <a:solidFill>
-                  <a:srgbClr val="6B7280"/>
-                </a:solidFill>
-                <a:latin typeface="Calibri"/>
-              </a:rPr>
-              <a:t>Methods</a:t>
-            </a:r>
-          </a:p>
-        </p:txBody>
-      </p:sp>
-      <p:sp>
-        <p:nvSpPr>
-          <p:cNvPr id="42" name="TextBox 41"/>
-          <p:cNvSpPr txBox="1"/>
-          <p:nvPr/>
-        </p:nvSpPr>
-        <p:spPr>
-          <a:xfrm>
-            <a:off x="8412480" y="5715000"/>
-            <a:ext cx="3108960" cy="731520"/>
-          </a:xfrm>
-          <a:prstGeom prst="rect">
-            <a:avLst/>
-          </a:prstGeom>
-          <a:noFill/>
-        </p:spPr>
-        <p:txBody>
-          <a:bodyPr wrap="square" lIns="45720" tIns="18288" rIns="45720" bIns="18288">
-            <a:spAutoFit/>
-          </a:bodyPr>
-          <a:lstStyle/>
-          <a:p>
-            <a:pPr algn="l"/>
-            <a:r>
-              <a:rPr sz="1000" b="0">
-                <a:solidFill>
-                  <a:srgbClr val="1F2D3D"/>
-                </a:solidFill>
-                <a:latin typeface="Consolas"/>
-              </a:rPr>
-              <a:t>+ sell(qty=1)  [override]</a:t>
-            </a:r>
-          </a:p>
-          <a:p>
-            <a:pPr algn="l"/>
-            <a:r>
-              <a:rPr sz="1000" b="0">
-                <a:solidFill>
-                  <a:srgbClr val="1F2D3D"/>
-                </a:solidFill>
-                <a:latin typeface="Consolas"/>
-              </a:rPr>
-              <a:t>+ get_download_link()</a:t>
-            </a:r>
-          </a:p>
-          <a:p>
-            <a:pPr algn="l"/>
-            <a:r>
-              <a:rPr sz="1000" b="0">
-                <a:solidFill>
-                  <a:srgbClr val="1F2D3D"/>
-                </a:solidFill>
-                <a:latin typeface="Consolas"/>
-              </a:rPr>
-              <a:t>+ to_dict()  [override]</a:t>
-            </a:r>
-          </a:p>
-          <a:p>
-            <a:pPr algn="l"/>
-            <a:r>
-              <a:rPr sz="1000" b="0">
-                <a:solidFill>
-                  <a:srgbClr val="1F2D3D"/>
-                </a:solidFill>
-                <a:latin typeface="Consolas"/>
-              </a:rPr>
-              <a:t>+ type in JSON: "digital"</a:t>
-            </a:r>
-          </a:p>
-        </p:txBody>
-      </p:sp>
-      <p:cxnSp>
-        <p:nvCxnSpPr>
-          <p:cNvPr id="43" name="Connector 42"/>
-          <p:cNvCxnSpPr/>
-          <p:nvPr/>
-        </p:nvCxnSpPr>
-        <p:spPr>
-          <a:xfrm>
-            <a:off x="0" y="3886200"/>
-            <a:ext cx="0" cy="0"/>
-          </a:xfrm>
-          <a:prstGeom prst="line">
-            <a:avLst/>
-          </a:prstGeom>
-          <a:ln w="22225">
-            <a:solidFill>
-              <a:srgbClr val="0E3B66"/>
-            </a:solidFill>
-          </a:ln>
-        </p:spPr>
-        <p:style>
-          <a:lnRef idx="2">
-            <a:schemeClr val="accent1"/>
-          </a:lnRef>
-          <a:fillRef idx="0">
-            <a:schemeClr val="accent1"/>
-          </a:fillRef>
-          <a:effectRef idx="1">
-            <a:schemeClr val="accent1"/>
-          </a:effectRef>
-          <a:fontRef idx="minor">
-            <a:schemeClr val="tx1"/>
-          </a:fontRef>
-        </p:style>
-      </p:cxnSp>
-      <p:cxnSp>
-        <p:nvCxnSpPr>
-          <p:cNvPr id="44" name="Connector 43"/>
-          <p:cNvCxnSpPr/>
-          <p:nvPr/>
-        </p:nvCxnSpPr>
-        <p:spPr>
-          <a:xfrm>
-            <a:off x="0" y="3520440"/>
-            <a:ext cx="0" cy="365760"/>
-          </a:xfrm>
-          <a:prstGeom prst="line">
-            <a:avLst/>
-          </a:prstGeom>
-          <a:ln w="22225">
-            <a:solidFill>
-              <a:srgbClr val="0E3B66"/>
-            </a:solidFill>
-          </a:ln>
-        </p:spPr>
-        <p:style>
-          <a:lnRef idx="2">
-            <a:schemeClr val="accent1"/>
-          </a:lnRef>
-          <a:fillRef idx="0">
-            <a:schemeClr val="accent1"/>
-          </a:fillRef>
-          <a:effectRef idx="1">
-            <a:schemeClr val="accent1"/>
-          </a:effectRef>
-          <a:fontRef idx="minor">
-            <a:schemeClr val="tx1"/>
-          </a:fontRef>
-        </p:style>
-      </p:cxnSp>
-      <p:cxnSp>
-        <p:nvCxnSpPr>
-          <p:cNvPr id="45" name="Connector 44"/>
-          <p:cNvCxnSpPr/>
-          <p:nvPr/>
-        </p:nvCxnSpPr>
-        <p:spPr>
-          <a:xfrm>
-            <a:off x="0" y="3886200"/>
-            <a:ext cx="0" cy="274320"/>
-          </a:xfrm>
-          <a:prstGeom prst="line">
-            <a:avLst/>
-          </a:prstGeom>
-          <a:ln w="22225">
-            <a:solidFill>
-              <a:srgbClr val="0E3B66"/>
-            </a:solidFill>
-          </a:ln>
-        </p:spPr>
-        <p:style>
-          <a:lnRef idx="2">
-            <a:schemeClr val="accent1"/>
-          </a:lnRef>
-          <a:fillRef idx="0">
-            <a:schemeClr val="accent1"/>
-          </a:fillRef>
-          <a:effectRef idx="1">
-            <a:schemeClr val="accent1"/>
-          </a:effectRef>
-          <a:fontRef idx="minor">
-            <a:schemeClr val="tx1"/>
-          </a:fontRef>
-        </p:style>
-      </p:cxnSp>
-      <p:cxnSp>
-        <p:nvCxnSpPr>
-          <p:cNvPr id="46" name="Connector 45"/>
-          <p:cNvCxnSpPr/>
-          <p:nvPr/>
-        </p:nvCxnSpPr>
-        <p:spPr>
-          <a:xfrm>
-            <a:off x="0" y="3886200"/>
-            <a:ext cx="0" cy="274320"/>
-          </a:xfrm>
-          <a:prstGeom prst="line">
-            <a:avLst/>
-          </a:prstGeom>
-          <a:ln w="22225">
-            <a:solidFill>
-              <a:srgbClr val="0E3B66"/>
-            </a:solidFill>
-          </a:ln>
-        </p:spPr>
-        <p:style>
-          <a:lnRef idx="2">
-            <a:schemeClr val="accent1"/>
-          </a:lnRef>
-          <a:fillRef idx="0">
-            <a:schemeClr val="accent1"/>
-          </a:fillRef>
-          <a:effectRef idx="1">
-            <a:schemeClr val="accent1"/>
-          </a:effectRef>
-          <a:fontRef idx="minor">
-            <a:schemeClr val="tx1"/>
-          </a:fontRef>
-        </p:style>
-      </p:cxnSp>
-      <p:cxnSp>
-        <p:nvCxnSpPr>
-          <p:cNvPr id="47" name="Connector 46"/>
-          <p:cNvCxnSpPr/>
-          <p:nvPr/>
-        </p:nvCxnSpPr>
-        <p:spPr>
-          <a:xfrm>
-            <a:off x="0" y="3886200"/>
-            <a:ext cx="0" cy="274320"/>
-          </a:xfrm>
-          <a:prstGeom prst="line">
-            <a:avLst/>
-          </a:prstGeom>
-          <a:ln w="22225">
-            <a:solidFill>
-              <a:srgbClr val="0E3B66"/>
-            </a:solidFill>
-          </a:ln>
-        </p:spPr>
-        <p:style>
-          <a:lnRef idx="2">
-            <a:schemeClr val="accent1"/>
-          </a:lnRef>
-          <a:fillRef idx="0">
-            <a:schemeClr val="accent1"/>
-          </a:fillRef>
-          <a:effectRef idx="1">
-            <a:schemeClr val="accent1"/>
-          </a:effectRef>
-          <a:fontRef idx="minor">
-            <a:schemeClr val="tx1"/>
-          </a:fontRef>
-        </p:style>
-      </p:cxnSp>
-      <p:sp>
-        <p:nvSpPr>
-          <p:cNvPr id="48" name="TextBox 47"/>
-          <p:cNvSpPr txBox="1"/>
-          <p:nvPr/>
-        </p:nvSpPr>
-        <p:spPr>
-          <a:xfrm>
-            <a:off x="502920" y="6583680"/>
-            <a:ext cx="10972800" cy="274320"/>
-          </a:xfrm>
-          <a:prstGeom prst="rect">
-            <a:avLst/>
-          </a:prstGeom>
-          <a:noFill/>
-        </p:spPr>
-        <p:txBody>
-          <a:bodyPr wrap="square" lIns="45720" tIns="18288" rIns="45720" bIns="18288">
-            <a:spAutoFit/>
-          </a:bodyPr>
-          <a:lstStyle/>
-          <a:p>
-            <a:pPr algn="l"/>
-            <a:r>
-              <a:rPr sz="1100" b="0">
-                <a:solidFill>
-                  <a:srgbClr val="6B7280"/>
-                </a:solidFill>
-                <a:latin typeface="Calibri"/>
-              </a:rPr>
-              <a:t>All subclasses inherit from Product. from_dict() acts as a factory: it reads "type" and returns the correct subclass.</a:t>
-            </a:r>
-          </a:p>
-        </p:txBody>
-      </p:sp>
-      <p:sp>
-        <p:nvSpPr>
-          <p:cNvPr id="49" name="TextBox 48"/>
-          <p:cNvSpPr txBox="1"/>
-          <p:nvPr/>
-        </p:nvSpPr>
-        <p:spPr>
-          <a:xfrm>
-            <a:off x="640080" y="6446520"/>
-            <a:ext cx="5486400" cy="274320"/>
-          </a:xfrm>
-          <a:prstGeom prst="rect">
-            <a:avLst/>
-          </a:prstGeom>
-          <a:noFill/>
-        </p:spPr>
-        <p:txBody>
-          <a:bodyPr wrap="square" lIns="45720" tIns="18288" rIns="45720" bIns="18288">
-            <a:spAutoFit/>
-          </a:bodyPr>
-          <a:lstStyle/>
-          <a:p>
-            <a:pPr algn="l"/>
-            <a:r>
-              <a:rPr sz="1000" b="0">
-                <a:solidFill>
-                  <a:srgbClr val="6B7280"/>
-                </a:solidFill>
-                <a:latin typeface="Calibri"/>
-              </a:rPr>
-              <a:t>Inventory Management System  |  Project 4</a:t>
-            </a:r>
-          </a:p>
-        </p:txBody>
-      </p:sp>
-      <p:sp>
-        <p:nvSpPr>
-          <p:cNvPr id="50" name="TextBox 49"/>
-          <p:cNvSpPr txBox="1"/>
-          <p:nvPr/>
-        </p:nvSpPr>
-        <p:spPr>
-          <a:xfrm>
-            <a:off x="11247120" y="6446520"/>
-            <a:ext cx="640080" cy="274320"/>
-          </a:xfrm>
-          <a:prstGeom prst="rect">
-            <a:avLst/>
-          </a:prstGeom>
-          <a:noFill/>
-        </p:spPr>
-        <p:txBody>
-          <a:bodyPr wrap="square" lIns="45720" tIns="18288" rIns="45720" bIns="18288">
-            <a:spAutoFit/>
-          </a:bodyPr>
-          <a:lstStyle/>
-          <a:p>
-            <a:pPr algn="r"/>
-            <a:r>
-              <a:rPr sz="1000" b="0">
-                <a:solidFill>
-                  <a:srgbClr val="6B7280"/>
-                </a:solidFill>
-                <a:latin typeface="Calibri"/>
-              </a:rPr>
-              <a:t>17</a:t>
-            </a:r>
-          </a:p>
-        </p:txBody>
-      </p:sp>
     </p:spTree>
+    <p:extLst>
+      <p:ext uri="{BB962C8B-B14F-4D97-AF65-F5344CB8AC3E}">
+        <p14:creationId xmlns:p14="http://schemas.microsoft.com/office/powerpoint/2010/main" val="1252368480"/>
+      </p:ext>
+    </p:extLst>
   </p:cSld>
   <p:clrMapOvr>
     <a:masterClrMapping/>

--- a/Inventory_Management_System.pptx
+++ b/Inventory_Management_System.pptx
@@ -145,7 +145,7 @@
 <file path=ppt/revisionInfo.xml><?xml version="1.0" encoding="utf-8"?>
 <p1510:revInfo xmlns:a="http://schemas.openxmlformats.org/drawingml/2006/main" xmlns:r="http://schemas.openxmlformats.org/officeDocument/2006/relationships" xmlns:p1510="http://schemas.microsoft.com/office/powerpoint/2015/10/main">
   <p1510:revLst>
-    <p1510:client id="{5816BE70-0E7B-4F76-9B9A-339FBF9AAFBE}" v="5" dt="2026-04-24T20:40:22.041"/>
+    <p1510:client id="{5816BE70-0E7B-4F76-9B9A-339FBF9AAFBE}" v="7" dt="2026-04-25T07:24:56.884"/>
   </p1510:revLst>
 </p1510:revInfo>
 </file>
@@ -155,7 +155,7 @@
   <pc:docChgLst>
     <pc:chgData name="Olamide Adeboye" userId="9e787034137b2853" providerId="LiveId" clId="{7D6CD3DA-39E8-4DBC-AE6D-988E01832CC9}"/>
     <pc:docChg chg="undo redo custSel addSld delSld modSld">
-      <pc:chgData name="Olamide Adeboye" userId="9e787034137b2853" providerId="LiveId" clId="{7D6CD3DA-39E8-4DBC-AE6D-988E01832CC9}" dt="2026-04-24T20:43:26.228" v="407" actId="20577"/>
+      <pc:chgData name="Olamide Adeboye" userId="9e787034137b2853" providerId="LiveId" clId="{7D6CD3DA-39E8-4DBC-AE6D-988E01832CC9}" dt="2026-04-25T07:25:54.200" v="561" actId="108"/>
       <pc:docMkLst>
         <pc:docMk/>
       </pc:docMkLst>
@@ -262,11 +262,19 @@
         </pc:sldMkLst>
       </pc:sldChg>
       <pc:sldChg chg="modSp mod modNotesTx">
-        <pc:chgData name="Olamide Adeboye" userId="9e787034137b2853" providerId="LiveId" clId="{7D6CD3DA-39E8-4DBC-AE6D-988E01832CC9}" dt="2026-04-24T20:42:34.298" v="403" actId="20577"/>
+        <pc:chgData name="Olamide Adeboye" userId="9e787034137b2853" providerId="LiveId" clId="{7D6CD3DA-39E8-4DBC-AE6D-988E01832CC9}" dt="2026-04-25T07:25:54.200" v="561" actId="108"/>
         <pc:sldMkLst>
           <pc:docMk/>
           <pc:sldMk cId="0" sldId="269"/>
         </pc:sldMkLst>
+        <pc:spChg chg="mod">
+          <ac:chgData name="Olamide Adeboye" userId="9e787034137b2853" providerId="LiveId" clId="{7D6CD3DA-39E8-4DBC-AE6D-988E01832CC9}" dt="2026-04-25T07:25:54.200" v="561" actId="108"/>
+          <ac:spMkLst>
+            <pc:docMk/>
+            <pc:sldMk cId="0" sldId="269"/>
+            <ac:spMk id="7" creationId="{00000000-0000-0000-0000-000000000000}"/>
+          </ac:spMkLst>
+        </pc:spChg>
         <pc:spChg chg="mod">
           <ac:chgData name="Olamide Adeboye" userId="9e787034137b2853" providerId="LiveId" clId="{7D6CD3DA-39E8-4DBC-AE6D-988E01832CC9}" dt="2026-04-24T20:42:34.298" v="403" actId="20577"/>
           <ac:spMkLst>
@@ -759,7 +767,7 @@
           <a:p>
             <a:fld id="{6FB49FE8-59AD-4B3E-B77C-CD46C2740DFC}" type="datetimeFigureOut">
               <a:rPr lang="en-GB" smtClean="0"/>
-              <a:t>24/04/2026</a:t>
+              <a:t>25/04/2026</a:t>
             </a:fld>
             <a:endParaRPr lang="en-GB"/>
           </a:p>
@@ -8273,7 +8281,7 @@
           <a:p>
             <a:fld id="{5BCAD085-E8A6-8845-BD4E-CB4CCA059FC4}" type="datetimeFigureOut">
               <a:rPr lang="en-US" smtClean="0"/>
-              <a:t>4/24/2026</a:t>
+              <a:t>4/25/2026</a:t>
             </a:fld>
             <a:endParaRPr lang="en-US"/>
           </a:p>
@@ -8441,7 +8449,7 @@
           <a:p>
             <a:fld id="{5BCAD085-E8A6-8845-BD4E-CB4CCA059FC4}" type="datetimeFigureOut">
               <a:rPr lang="en-US" smtClean="0"/>
-              <a:t>4/24/2026</a:t>
+              <a:t>4/25/2026</a:t>
             </a:fld>
             <a:endParaRPr lang="en-US"/>
           </a:p>
@@ -8619,7 +8627,7 @@
           <a:p>
             <a:fld id="{5BCAD085-E8A6-8845-BD4E-CB4CCA059FC4}" type="datetimeFigureOut">
               <a:rPr lang="en-US" smtClean="0"/>
-              <a:t>4/24/2026</a:t>
+              <a:t>4/25/2026</a:t>
             </a:fld>
             <a:endParaRPr lang="en-US"/>
           </a:p>
@@ -8787,7 +8795,7 @@
           <a:p>
             <a:fld id="{5BCAD085-E8A6-8845-BD4E-CB4CCA059FC4}" type="datetimeFigureOut">
               <a:rPr lang="en-US" smtClean="0"/>
-              <a:t>4/24/2026</a:t>
+              <a:t>4/25/2026</a:t>
             </a:fld>
             <a:endParaRPr lang="en-US"/>
           </a:p>
@@ -9032,7 +9040,7 @@
           <a:p>
             <a:fld id="{5BCAD085-E8A6-8845-BD4E-CB4CCA059FC4}" type="datetimeFigureOut">
               <a:rPr lang="en-US" smtClean="0"/>
-              <a:t>4/24/2026</a:t>
+              <a:t>4/25/2026</a:t>
             </a:fld>
             <a:endParaRPr lang="en-US"/>
           </a:p>
@@ -9317,7 +9325,7 @@
           <a:p>
             <a:fld id="{5BCAD085-E8A6-8845-BD4E-CB4CCA059FC4}" type="datetimeFigureOut">
               <a:rPr lang="en-US" smtClean="0"/>
-              <a:t>4/24/2026</a:t>
+              <a:t>4/25/2026</a:t>
             </a:fld>
             <a:endParaRPr lang="en-US"/>
           </a:p>
@@ -9736,7 +9744,7 @@
           <a:p>
             <a:fld id="{5BCAD085-E8A6-8845-BD4E-CB4CCA059FC4}" type="datetimeFigureOut">
               <a:rPr lang="en-US" smtClean="0"/>
-              <a:t>4/24/2026</a:t>
+              <a:t>4/25/2026</a:t>
             </a:fld>
             <a:endParaRPr lang="en-US"/>
           </a:p>
@@ -9853,7 +9861,7 @@
           <a:p>
             <a:fld id="{5BCAD085-E8A6-8845-BD4E-CB4CCA059FC4}" type="datetimeFigureOut">
               <a:rPr lang="en-US" smtClean="0"/>
-              <a:t>4/24/2026</a:t>
+              <a:t>4/25/2026</a:t>
             </a:fld>
             <a:endParaRPr lang="en-US"/>
           </a:p>
@@ -9948,7 +9956,7 @@
           <a:p>
             <a:fld id="{5BCAD085-E8A6-8845-BD4E-CB4CCA059FC4}" type="datetimeFigureOut">
               <a:rPr lang="en-US" smtClean="0"/>
-              <a:t>4/24/2026</a:t>
+              <a:t>4/25/2026</a:t>
             </a:fld>
             <a:endParaRPr lang="en-US"/>
           </a:p>
@@ -10223,7 +10231,7 @@
           <a:p>
             <a:fld id="{5BCAD085-E8A6-8845-BD4E-CB4CCA059FC4}" type="datetimeFigureOut">
               <a:rPr lang="en-US" smtClean="0"/>
-              <a:t>4/24/2026</a:t>
+              <a:t>4/25/2026</a:t>
             </a:fld>
             <a:endParaRPr lang="en-US"/>
           </a:p>
@@ -10475,7 +10483,7 @@
           <a:p>
             <a:fld id="{5BCAD085-E8A6-8845-BD4E-CB4CCA059FC4}" type="datetimeFigureOut">
               <a:rPr lang="en-US" smtClean="0"/>
-              <a:t>4/24/2026</a:t>
+              <a:t>4/25/2026</a:t>
             </a:fld>
             <a:endParaRPr lang="en-US"/>
           </a:p>
@@ -10686,7 +10694,7 @@
           <a:p>
             <a:fld id="{5BCAD085-E8A6-8845-BD4E-CB4CCA059FC4}" type="datetimeFigureOut">
               <a:rPr lang="en-US" smtClean="0"/>
-              <a:t>4/24/2026</a:t>
+              <a:t>4/25/2026</a:t>
             </a:fld>
             <a:endParaRPr lang="en-US"/>
           </a:p>
@@ -15487,8 +15495,79 @@
           <a:bodyPr rtlCol="0" anchor="ctr"/>
           <a:lstStyle/>
           <a:p>
-            <a:pPr algn="ctr"/>
-            <a:endParaRPr/>
+            <a:br>
+              <a:rPr lang="en-US" b="1" dirty="0">
+                <a:solidFill>
+                  <a:srgbClr val="0E3B66"/>
+                </a:solidFill>
+              </a:rPr>
+            </a:br>
+            <a:br>
+              <a:rPr lang="en-US" b="1" dirty="0">
+                <a:solidFill>
+                  <a:srgbClr val="0E3B66"/>
+                </a:solidFill>
+              </a:rPr>
+            </a:br>
+            <a:r>
+              <a:rPr lang="en-US" b="1" dirty="0">
+                <a:solidFill>
+                  <a:srgbClr val="0E3B66"/>
+                </a:solidFill>
+              </a:rPr>
+              <a:t>O</a:t>
+            </a:r>
+            <a:r>
+              <a:rPr lang="en-GB" b="1" dirty="0" err="1">
+                <a:solidFill>
+                  <a:srgbClr val="0E3B66"/>
+                </a:solidFill>
+              </a:rPr>
+              <a:t>pportunities</a:t>
+            </a:r>
+            <a:endParaRPr lang="en-GB" b="1" dirty="0">
+              <a:solidFill>
+                <a:srgbClr val="0E3B66"/>
+              </a:solidFill>
+            </a:endParaRPr>
+          </a:p>
+          <a:p>
+            <a:pPr>
+              <a:spcAft>
+                <a:spcPts val="400"/>
+              </a:spcAft>
+            </a:pPr>
+            <a:r>
+              <a:rPr lang="en-US" b="1" dirty="0">
+                <a:solidFill>
+                  <a:srgbClr val="F4A261"/>
+                </a:solidFill>
+              </a:rPr>
+              <a:t>■  </a:t>
+            </a:r>
+            <a:r>
+              <a:rPr lang="en-US" sz="1400" dirty="0">
+                <a:solidFill>
+                  <a:srgbClr val="1F2D3D"/>
+                </a:solidFill>
+                <a:latin typeface="Calibri"/>
+              </a:rPr>
+              <a:t>Building a proper graphical interface for this with good UI and UX.</a:t>
+            </a:r>
+          </a:p>
+          <a:p>
+            <a:endParaRPr lang="en-GB" b="1" dirty="0">
+              <a:solidFill>
+                <a:srgbClr val="0E3B66"/>
+              </a:solidFill>
+            </a:endParaRPr>
+          </a:p>
+          <a:p>
+            <a:endParaRPr lang="en-GB" b="1" dirty="0">
+              <a:solidFill>
+                <a:srgbClr val="0E3B66"/>
+              </a:solidFill>
+            </a:endParaRPr>
           </a:p>
         </p:txBody>
       </p:sp>
@@ -15516,7 +15595,7 @@
           <a:p>
             <a:pPr algn="l"/>
             <a:r>
-              <a:rPr sz="2000" b="1">
+              <a:rPr sz="2000" b="1" dirty="0">
                 <a:solidFill>
                   <a:srgbClr val="0E3B66"/>
                 </a:solidFill>
